--- a/Athanase_Endowment_Pitch_21pp.pptx
+++ b/Athanase_Endowment_Pitch_21pp.pptx
@@ -4,28 +4,31 @@
   <p:sldMasterIdLst>
     <p:sldMasterId id="2147483648" r:id="rId4"/>
   </p:sldMasterIdLst>
+  <p:notesMasterIdLst>
+    <p:notesMasterId r:id="rId26"/>
+  </p:notesMasterIdLst>
   <p:sldIdLst>
     <p:sldId id="256" r:id="rId5"/>
-    <p:sldId id="260" r:id="rId9"/>
-    <p:sldId id="263" r:id="rId12"/>
-    <p:sldId id="267" r:id="rId16"/>
-    <p:sldId id="284" r:id="rId33"/>
-    <p:sldId id="271" r:id="rId20"/>
-    <p:sldId id="274" r:id="rId23"/>
-    <p:sldId id="278" r:id="rId27"/>
-    <p:sldId id="339" r:id="rId88"/>
-    <p:sldId id="279" r:id="rId28"/>
-    <p:sldId id="285" r:id="rId34"/>
-    <p:sldId id="282" r:id="rId31"/>
-    <p:sldId id="286" r:id="rId35"/>
-    <p:sldId id="289" r:id="rId38"/>
-    <p:sldId id="327" r:id="rId76"/>
-    <p:sldId id="326" r:id="rId75"/>
-    <p:sldId id="328" r:id="rId77"/>
-    <p:sldId id="325" r:id="rId74"/>
-    <p:sldId id="329" r:id="rId78"/>
-    <p:sldId id="317" r:id="rId66"/>
-    <p:sldId id="321" r:id="rId70"/>
+    <p:sldId id="260" r:id="rId6"/>
+    <p:sldId id="263" r:id="rId7"/>
+    <p:sldId id="267" r:id="rId8"/>
+    <p:sldId id="284" r:id="rId9"/>
+    <p:sldId id="274" r:id="rId11"/>
+    <p:sldId id="278" r:id="rId12"/>
+    <p:sldId id="339" r:id="rId13"/>
+    <p:sldId id="279" r:id="rId14"/>
+    <p:sldId id="340" r:id="rId33"/>
+    <p:sldId id="285" r:id="rId15"/>
+    <p:sldId id="282" r:id="rId16"/>
+    <p:sldId id="286" r:id="rId17"/>
+    <p:sldId id="289" r:id="rId18"/>
+    <p:sldId id="327" r:id="rId19"/>
+    <p:sldId id="326" r:id="rId20"/>
+    <p:sldId id="328" r:id="rId21"/>
+    <p:sldId id="325" r:id="rId22"/>
+    <p:sldId id="329" r:id="rId23"/>
+    <p:sldId id="317" r:id="rId24"/>
+    <p:sldId id="321" r:id="rId25"/>
   </p:sldIdLst>
   <p:sldSz cx="9753600" cy="7315200"/>
   <p:notesSz cx="6858000" cy="9144000"/>
@@ -143,15 +146,46 @@
 </p:presentation>
 </file>
 
+<file path=ppt/revisionInfo.xml><?xml version="1.0" encoding="utf-8"?>
+<p1510:revInfo xmlns:a="http://schemas.openxmlformats.org/drawingml/2006/main" xmlns:r="http://schemas.openxmlformats.org/officeDocument/2006/relationships" xmlns:p1510="http://schemas.microsoft.com/office/powerpoint/2015/10/main">
+  <p1510:revLst>
+    <p1510:client id="{C4CFD312-D45A-4B19-8463-6466AF1AAD16}" v="2" dt="2026-06-09T10:28:35.789"/>
+  </p1510:revLst>
+</p1510:revInfo>
+</file>
+
 <file path=ppt/changesInfos/changesInfo1.xml><?xml version="1.0" encoding="utf-8"?>
 <pc:chgInfo xmlns:a="http://schemas.openxmlformats.org/drawingml/2006/main" xmlns:r="http://schemas.openxmlformats.org/officeDocument/2006/relationships" xmlns:ac="http://schemas.microsoft.com/office/drawing/2013/main/command" xmlns:pc="http://schemas.microsoft.com/office/powerpoint/2013/main/command">
   <pc:docChgLst>
     <pc:chgData name="Stefan Charette" userId="0db9b4c6-585a-4616-ab53-47ba82066cad" providerId="ADAL" clId="{42E455C0-5321-4BA4-9654-3C8921CE5DA4}"/>
-    <pc:docChg chg="modSld">
-      <pc:chgData name="Stefan Charette" userId="0db9b4c6-585a-4616-ab53-47ba82066cad" providerId="ADAL" clId="{42E455C0-5321-4BA4-9654-3C8921CE5DA4}" dt="2026-06-09T08:13:34.859" v="41" actId="20577"/>
+    <pc:docChg chg="custSel modSld">
+      <pc:chgData name="Stefan Charette" userId="0db9b4c6-585a-4616-ab53-47ba82066cad" providerId="ADAL" clId="{42E455C0-5321-4BA4-9654-3C8921CE5DA4}" dt="2026-06-09T10:30:30.470" v="340" actId="478"/>
       <pc:docMkLst>
         <pc:docMk/>
       </pc:docMkLst>
+      <pc:sldChg chg="delSp modSp mod">
+        <pc:chgData name="Stefan Charette" userId="0db9b4c6-585a-4616-ab53-47ba82066cad" providerId="ADAL" clId="{42E455C0-5321-4BA4-9654-3C8921CE5DA4}" dt="2026-06-09T10:30:30.470" v="340" actId="478"/>
+        <pc:sldMkLst>
+          <pc:docMk/>
+          <pc:sldMk cId="0" sldId="256"/>
+        </pc:sldMkLst>
+        <pc:spChg chg="mod">
+          <ac:chgData name="Stefan Charette" userId="0db9b4c6-585a-4616-ab53-47ba82066cad" providerId="ADAL" clId="{42E455C0-5321-4BA4-9654-3C8921CE5DA4}" dt="2026-06-09T10:30:25.904" v="339" actId="20577"/>
+          <ac:spMkLst>
+            <pc:docMk/>
+            <pc:sldMk cId="0" sldId="256"/>
+            <ac:spMk id="5" creationId="{00000000-0000-0000-0000-000000000000}"/>
+          </ac:spMkLst>
+        </pc:spChg>
+        <pc:spChg chg="del">
+          <ac:chgData name="Stefan Charette" userId="0db9b4c6-585a-4616-ab53-47ba82066cad" providerId="ADAL" clId="{42E455C0-5321-4BA4-9654-3C8921CE5DA4}" dt="2026-06-09T10:30:30.470" v="340" actId="478"/>
+          <ac:spMkLst>
+            <pc:docMk/>
+            <pc:sldMk cId="0" sldId="256"/>
+            <ac:spMk id="6" creationId="{00000000-0000-0000-0000-000000000000}"/>
+          </ac:spMkLst>
+        </pc:spChg>
+      </pc:sldChg>
       <pc:sldChg chg="modSp mod">
         <pc:chgData name="Stefan Charette" userId="0db9b4c6-585a-4616-ab53-47ba82066cad" providerId="ADAL" clId="{42E455C0-5321-4BA4-9654-3C8921CE5DA4}" dt="2026-06-09T08:13:12.051" v="23" actId="20577"/>
         <pc:sldMkLst>
@@ -182,6 +216,29 @@
           </ac:spMkLst>
         </pc:spChg>
       </pc:sldChg>
+      <pc:sldChg chg="modSp mod">
+        <pc:chgData name="Stefan Charette" userId="0db9b4c6-585a-4616-ab53-47ba82066cad" providerId="ADAL" clId="{42E455C0-5321-4BA4-9654-3C8921CE5DA4}" dt="2026-06-09T10:29:33.258" v="301" actId="20577"/>
+        <pc:sldMkLst>
+          <pc:docMk/>
+          <pc:sldMk cId="0" sldId="339"/>
+        </pc:sldMkLst>
+        <pc:spChg chg="mod">
+          <ac:chgData name="Stefan Charette" userId="0db9b4c6-585a-4616-ab53-47ba82066cad" providerId="ADAL" clId="{42E455C0-5321-4BA4-9654-3C8921CE5DA4}" dt="2026-06-09T10:29:33.258" v="301" actId="20577"/>
+          <ac:spMkLst>
+            <pc:docMk/>
+            <pc:sldMk cId="0" sldId="339"/>
+            <ac:spMk id="20" creationId="{00000000-0000-0000-0000-000000000000}"/>
+          </ac:spMkLst>
+        </pc:spChg>
+        <pc:spChg chg="mod">
+          <ac:chgData name="Stefan Charette" userId="0db9b4c6-585a-4616-ab53-47ba82066cad" providerId="ADAL" clId="{42E455C0-5321-4BA4-9654-3C8921CE5DA4}" dt="2026-06-09T10:29:20.676" v="300" actId="20577"/>
+          <ac:spMkLst>
+            <pc:docMk/>
+            <pc:sldMk cId="0" sldId="339"/>
+            <ac:spMk id="24" creationId="{00000000-0000-0000-0000-000000000000}"/>
+          </ac:spMkLst>
+        </pc:spChg>
+      </pc:sldChg>
     </pc:docChg>
   </pc:docChgLst>
 </pc:chgInfo>
@@ -201,7 +258,7 @@
           <a:lstStyle/>
           <a:p>
             <a:r>
-              <a:rPr sz="880">
+              <a:rPr lang="en-US" sz="880">
                 <a:solidFill>
                   <a:srgbClr val="556A83"/>
                 </a:solidFill>
@@ -401,364 +458,7 @@
 </c:chartSpace>
 </file>
 
-<file path=ppt/charts/chart3.xml><?xml version="1.0" encoding="utf-8"?>
-<c:chartSpace xmlns:c="http://schemas.openxmlformats.org/drawingml/2006/chart" xmlns:a="http://schemas.openxmlformats.org/drawingml/2006/main" xmlns:r="http://schemas.openxmlformats.org/officeDocument/2006/relationships" xmlns:c16r2="http://schemas.microsoft.com/office/drawing/2015/06/chart">
-  <c:date1904 val="0"/>
-  <c:lang val="en-US"/>
-  <c:roundedCorners val="1"/>
-  <c:style val="2"/>
-  <c:chart>
-    <c:title>
-      <c:tx>
-        <c:rich>
-          <a:bodyPr/>
-          <a:lstStyle/>
-          <a:p>
-            <a:r>
-              <a:rPr sz="960">
-                <a:solidFill>
-                  <a:srgbClr val="556A83"/>
-                </a:solidFill>
-              </a:rPr>
-              <a:t>Figure 5.  Average monthly return (%)</a:t>
-            </a:r>
-          </a:p>
-        </c:rich>
-      </c:tx>
-      <c:overlay val="0"/>
-    </c:title>
-    <c:autoTitleDeleted val="0"/>
-    <c:plotArea>
-      <c:layout/>
-      <c:barChart>
-        <c:barDir val="col"/>
-        <c:grouping val="clustered"/>
-        <c:varyColors val="1"/>
-        <c:ser>
-          <c:idx val="0"/>
-          <c:order val="0"/>
-          <c:tx>
-            <c:strRef>
-              <c:f>Sheet1!$B$1</c:f>
-              <c:strCache>
-                <c:ptCount val="1"/>
-                <c:pt idx="0">
-                  <c:v>Athanase</c:v>
-                </c:pt>
-              </c:strCache>
-            </c:strRef>
-          </c:tx>
-          <c:spPr>
-            <a:solidFill>
-              <a:srgbClr val="152130"/>
-            </a:solidFill>
-          </c:spPr>
-          <c:invertIfNegative val="1"/>
-          <c:dLbls>
-            <c:numFmt formatCode="0.0&quot;%&quot;" sourceLinked="0"/>
-            <c:spPr>
-              <a:noFill/>
-              <a:ln>
-                <a:noFill/>
-              </a:ln>
-              <a:effectLst/>
-            </c:spPr>
-            <c:txPr>
-              <a:bodyPr/>
-              <a:lstStyle/>
-              <a:p>
-                <a:pPr>
-                  <a:defRPr sz="720">
-                    <a:solidFill>
-                      <a:srgbClr val="0E1620"/>
-                    </a:solidFill>
-                  </a:defRPr>
-                </a:pPr>
-                <a:endParaRPr lang="sv-SE"/>
-              </a:p>
-            </c:txPr>
-            <c:dLblPos val="outEnd"/>
-            <c:showLegendKey val="0"/>
-            <c:showVal val="1"/>
-            <c:showCatName val="0"/>
-            <c:showSerName val="0"/>
-            <c:showPercent val="0"/>
-            <c:showBubbleSize val="0"/>
-            <c:showLeaderLines val="0"/>
-            <c:extLst>
-              <c:ext xmlns:c15="http://schemas.microsoft.com/office/drawing/2012/chart" uri="{CE6537A1-D6FC-4f65-9D91-7224C49458BB}">
-                <c15:showLeaderLines val="0"/>
-              </c:ext>
-            </c:extLst>
-          </c:dLbls>
-          <c:cat>
-            <c:strRef>
-              <c:f>Sheet1!$A$2:$A$4</c:f>
-              <c:strCache>
-                <c:ptCount val="3"/>
-                <c:pt idx="0">
-                  <c:v>All markets</c:v>
-                </c:pt>
-                <c:pt idx="1">
-                  <c:v>Up markets</c:v>
-                </c:pt>
-                <c:pt idx="2">
-                  <c:v>Down markets</c:v>
-                </c:pt>
-              </c:strCache>
-            </c:strRef>
-          </c:cat>
-          <c:val>
-            <c:numRef>
-              <c:f>Sheet1!$B$2:$B$4</c:f>
-              <c:numCache>
-                <c:formatCode>General</c:formatCode>
-                <c:ptCount val="3"/>
-                <c:pt idx="0">
-                  <c:v>1.5</c:v>
-                </c:pt>
-                <c:pt idx="1">
-                  <c:v>1.2</c:v>
-                </c:pt>
-                <c:pt idx="2">
-                  <c:v>0.2</c:v>
-                </c:pt>
-              </c:numCache>
-            </c:numRef>
-          </c:val>
-          <c:extLst>
-            <c:ext xmlns:c14="http://schemas.microsoft.com/office/drawing/2007/8/2/chart" uri="{6F2FDCE9-48DA-4B69-8628-5D25D57E5C99}">
-              <c14:invertSolidFillFmt>
-                <c14:spPr xmlns:c14="http://schemas.microsoft.com/office/drawing/2007/8/2/chart">
-                  <a:solidFill>
-                    <a:srgbClr val="FFFFFF"/>
-                  </a:solidFill>
-                </c14:spPr>
-              </c14:invertSolidFillFmt>
-            </c:ext>
-            <c:ext xmlns:c16="http://schemas.microsoft.com/office/drawing/2014/chart" uri="{C3380CC4-5D6E-409C-BE32-E72D297353CC}">
-              <c16:uniqueId val="{00000000-E970-45BA-8499-251F9C2C08E0}"/>
-            </c:ext>
-          </c:extLst>
-        </c:ser>
-        <c:ser>
-          <c:idx val="1"/>
-          <c:order val="1"/>
-          <c:tx>
-            <c:strRef>
-              <c:f>Sheet1!$C$1</c:f>
-              <c:strCache>
-                <c:ptCount val="1"/>
-                <c:pt idx="0">
-                  <c:v>MSCI IMI</c:v>
-                </c:pt>
-              </c:strCache>
-            </c:strRef>
-          </c:tx>
-          <c:spPr>
-            <a:solidFill>
-              <a:srgbClr val="556A83"/>
-            </a:solidFill>
-          </c:spPr>
-          <c:invertIfNegative val="1"/>
-          <c:dLbls>
-            <c:numFmt formatCode="0.0&quot;%&quot;" sourceLinked="0"/>
-            <c:spPr>
-              <a:noFill/>
-              <a:ln>
-                <a:noFill/>
-              </a:ln>
-              <a:effectLst/>
-            </c:spPr>
-            <c:txPr>
-              <a:bodyPr/>
-              <a:lstStyle/>
-              <a:p>
-                <a:pPr>
-                  <a:defRPr sz="720">
-                    <a:solidFill>
-                      <a:srgbClr val="0E1620"/>
-                    </a:solidFill>
-                  </a:defRPr>
-                </a:pPr>
-                <a:endParaRPr lang="sv-SE"/>
-              </a:p>
-            </c:txPr>
-            <c:dLblPos val="outEnd"/>
-            <c:showLegendKey val="0"/>
-            <c:showVal val="1"/>
-            <c:showCatName val="0"/>
-            <c:showSerName val="0"/>
-            <c:showPercent val="0"/>
-            <c:showBubbleSize val="0"/>
-            <c:showLeaderLines val="0"/>
-            <c:extLst>
-              <c:ext xmlns:c15="http://schemas.microsoft.com/office/drawing/2012/chart" uri="{CE6537A1-D6FC-4f65-9D91-7224C49458BB}">
-                <c15:showLeaderLines val="0"/>
-              </c:ext>
-            </c:extLst>
-          </c:dLbls>
-          <c:cat>
-            <c:strRef>
-              <c:f>Sheet1!$A$2:$A$4</c:f>
-              <c:strCache>
-                <c:ptCount val="3"/>
-                <c:pt idx="0">
-                  <c:v>All markets</c:v>
-                </c:pt>
-                <c:pt idx="1">
-                  <c:v>Up markets</c:v>
-                </c:pt>
-                <c:pt idx="2">
-                  <c:v>Down markets</c:v>
-                </c:pt>
-              </c:strCache>
-            </c:strRef>
-          </c:cat>
-          <c:val>
-            <c:numRef>
-              <c:f>Sheet1!$C$2:$C$4</c:f>
-              <c:numCache>
-                <c:formatCode>General</c:formatCode>
-                <c:ptCount val="3"/>
-                <c:pt idx="0">
-                  <c:v>0.6</c:v>
-                </c:pt>
-                <c:pt idx="1">
-                  <c:v>1.3</c:v>
-                </c:pt>
-                <c:pt idx="2">
-                  <c:v>-1.7</c:v>
-                </c:pt>
-              </c:numCache>
-            </c:numRef>
-          </c:val>
-          <c:extLst>
-            <c:ext xmlns:c14="http://schemas.microsoft.com/office/drawing/2007/8/2/chart" uri="{6F2FDCE9-48DA-4B69-8628-5D25D57E5C99}">
-              <c14:invertSolidFillFmt>
-                <c14:spPr xmlns:c14="http://schemas.microsoft.com/office/drawing/2007/8/2/chart">
-                  <a:solidFill>
-                    <a:srgbClr val="FFFFFF"/>
-                  </a:solidFill>
-                </c14:spPr>
-              </c14:invertSolidFillFmt>
-            </c:ext>
-            <c:ext xmlns:c16="http://schemas.microsoft.com/office/drawing/2014/chart" uri="{C3380CC4-5D6E-409C-BE32-E72D297353CC}">
-              <c16:uniqueId val="{00000001-E970-45BA-8499-251F9C2C08E0}"/>
-            </c:ext>
-          </c:extLst>
-        </c:ser>
-        <c:dLbls>
-          <c:dLblPos val="outEnd"/>
-          <c:showLegendKey val="0"/>
-          <c:showVal val="1"/>
-          <c:showCatName val="0"/>
-          <c:showSerName val="0"/>
-          <c:showPercent val="0"/>
-          <c:showBubbleSize val="0"/>
-        </c:dLbls>
-        <c:gapWidth val="80"/>
-        <c:axId val="-2068027336"/>
-        <c:axId val="-2113994440"/>
-      </c:barChart>
-      <c:catAx>
-        <c:axId val="-2068027336"/>
-        <c:scaling>
-          <c:orientation val="minMax"/>
-        </c:scaling>
-        <c:delete val="0"/>
-        <c:axPos val="b"/>
-        <c:numFmt formatCode="General" sourceLinked="0"/>
-        <c:majorTickMark val="out"/>
-        <c:minorTickMark val="none"/>
-        <c:tickLblPos val="nextTo"/>
-        <c:txPr>
-          <a:bodyPr/>
-          <a:lstStyle/>
-          <a:p>
-            <a:pPr>
-              <a:defRPr sz="800">
-                <a:solidFill>
-                  <a:srgbClr val="0E1620"/>
-                </a:solidFill>
-              </a:defRPr>
-            </a:pPr>
-            <a:endParaRPr lang="sv-SE"/>
-          </a:p>
-        </c:txPr>
-        <c:crossAx val="-2113994440"/>
-        <c:crosses val="autoZero"/>
-        <c:auto val="1"/>
-        <c:lblAlgn val="ctr"/>
-        <c:lblOffset val="100"/>
-        <c:noMultiLvlLbl val="0"/>
-      </c:catAx>
-      <c:valAx>
-        <c:axId val="-2113994440"/>
-        <c:scaling>
-          <c:orientation val="minMax"/>
-        </c:scaling>
-        <c:delete val="0"/>
-        <c:axPos val="l"/>
-        <c:majorGridlines/>
-        <c:numFmt formatCode="General" sourceLinked="1"/>
-        <c:majorTickMark val="out"/>
-        <c:minorTickMark val="none"/>
-        <c:tickLblPos val="nextTo"/>
-        <c:txPr>
-          <a:bodyPr/>
-          <a:lstStyle/>
-          <a:p>
-            <a:pPr>
-              <a:defRPr sz="800">
-                <a:solidFill>
-                  <a:srgbClr val="0E1620"/>
-                </a:solidFill>
-              </a:defRPr>
-            </a:pPr>
-            <a:endParaRPr lang="sv-SE"/>
-          </a:p>
-        </c:txPr>
-        <c:crossAx val="-2068027336"/>
-        <c:crosses val="autoZero"/>
-        <c:crossBetween val="between"/>
-      </c:valAx>
-    </c:plotArea>
-    <c:legend>
-      <c:legendPos val="b"/>
-      <c:overlay val="0"/>
-      <c:txPr>
-        <a:bodyPr/>
-        <a:lstStyle/>
-        <a:p>
-          <a:pPr>
-            <a:defRPr sz="880"/>
-          </a:pPr>
-          <a:endParaRPr lang="sv-SE"/>
-        </a:p>
-      </c:txPr>
-    </c:legend>
-    <c:plotVisOnly val="1"/>
-    <c:dispBlanksAs val="gap"/>
-    <c:showDLblsOverMax val="1"/>
-  </c:chart>
-  <c:txPr>
-    <a:bodyPr/>
-    <a:lstStyle/>
-    <a:p>
-      <a:pPr>
-        <a:defRPr sz="1440"/>
-      </a:pPr>
-      <a:endParaRPr lang="en-US"/>
-    </a:p>
-  </c:txPr>
-  <c:externalData r:id="rId1">
-    <c:autoUpdate val="0"/>
-  </c:externalData>
-</c:chartSpace>
-</file>
-
-<file path=ppt/charts/chart4.xml><?xml version="1.0" encoding="utf-8"?>
+<file path=ppt/charts/chart2.xml><?xml version="1.0" encoding="utf-8"?>
 <c:chartSpace xmlns:c="http://schemas.openxmlformats.org/drawingml/2006/chart" xmlns:a="http://schemas.openxmlformats.org/drawingml/2006/main" xmlns:r="http://schemas.openxmlformats.org/officeDocument/2006/relationships" xmlns:c16r2="http://schemas.microsoft.com/office/drawing/2015/06/chart">
   <c:date1904 val="0"/>
   <c:lang val="en-US"/>
@@ -1235,6 +935,797 @@
 </c:chartSpace>
 </file>
 
+<file path=ppt/charts/chart3.xml><?xml version="1.0" encoding="utf-8"?>
+<c:chartSpace xmlns:c="http://schemas.openxmlformats.org/drawingml/2006/chart" xmlns:a="http://schemas.openxmlformats.org/drawingml/2006/main" xmlns:r="http://schemas.openxmlformats.org/officeDocument/2006/relationships" xmlns:c16r2="http://schemas.microsoft.com/office/drawing/2015/06/chart">
+  <c:date1904 val="0"/>
+  <c:lang val="en-US"/>
+  <c:roundedCorners val="1"/>
+  <c:style val="2"/>
+  <c:chart>
+    <c:title>
+      <c:tx>
+        <c:rich>
+          <a:bodyPr/>
+          <a:lstStyle/>
+          <a:p>
+            <a:r>
+              <a:rPr sz="960">
+                <a:solidFill>
+                  <a:srgbClr val="556A83"/>
+                </a:solidFill>
+              </a:rPr>
+              <a:t>Figure 5.  Average monthly return (%)</a:t>
+            </a:r>
+          </a:p>
+        </c:rich>
+      </c:tx>
+      <c:overlay val="0"/>
+    </c:title>
+    <c:autoTitleDeleted val="0"/>
+    <c:plotArea>
+      <c:layout/>
+      <c:barChart>
+        <c:barDir val="col"/>
+        <c:grouping val="clustered"/>
+        <c:varyColors val="1"/>
+        <c:ser>
+          <c:idx val="0"/>
+          <c:order val="0"/>
+          <c:tx>
+            <c:strRef>
+              <c:f>Sheet1!$B$1</c:f>
+              <c:strCache>
+                <c:ptCount val="1"/>
+                <c:pt idx="0">
+                  <c:v>Athanase</c:v>
+                </c:pt>
+              </c:strCache>
+            </c:strRef>
+          </c:tx>
+          <c:spPr>
+            <a:solidFill>
+              <a:srgbClr val="152130"/>
+            </a:solidFill>
+          </c:spPr>
+          <c:invertIfNegative val="1"/>
+          <c:dLbls>
+            <c:numFmt formatCode="0.0&quot;%&quot;" sourceLinked="0"/>
+            <c:spPr>
+              <a:noFill/>
+              <a:ln>
+                <a:noFill/>
+              </a:ln>
+              <a:effectLst/>
+            </c:spPr>
+            <c:txPr>
+              <a:bodyPr/>
+              <a:lstStyle/>
+              <a:p>
+                <a:pPr>
+                  <a:defRPr sz="720">
+                    <a:solidFill>
+                      <a:srgbClr val="0E1620"/>
+                    </a:solidFill>
+                  </a:defRPr>
+                </a:pPr>
+                <a:endParaRPr lang="sv-SE"/>
+              </a:p>
+            </c:txPr>
+            <c:dLblPos val="outEnd"/>
+            <c:showLegendKey val="0"/>
+            <c:showVal val="1"/>
+            <c:showCatName val="0"/>
+            <c:showSerName val="0"/>
+            <c:showPercent val="0"/>
+            <c:showBubbleSize val="0"/>
+            <c:showLeaderLines val="0"/>
+            <c:extLst>
+              <c:ext xmlns:c15="http://schemas.microsoft.com/office/drawing/2012/chart" uri="{CE6537A1-D6FC-4f65-9D91-7224C49458BB}">
+                <c15:showLeaderLines val="0"/>
+              </c:ext>
+            </c:extLst>
+          </c:dLbls>
+          <c:cat>
+            <c:strRef>
+              <c:f>Sheet1!$A$2:$A$4</c:f>
+              <c:strCache>
+                <c:ptCount val="3"/>
+                <c:pt idx="0">
+                  <c:v>All markets</c:v>
+                </c:pt>
+                <c:pt idx="1">
+                  <c:v>Up markets</c:v>
+                </c:pt>
+                <c:pt idx="2">
+                  <c:v>Down markets</c:v>
+                </c:pt>
+              </c:strCache>
+            </c:strRef>
+          </c:cat>
+          <c:val>
+            <c:numRef>
+              <c:f>Sheet1!$B$2:$B$4</c:f>
+              <c:numCache>
+                <c:formatCode>General</c:formatCode>
+                <c:ptCount val="3"/>
+                <c:pt idx="0">
+                  <c:v>1.5</c:v>
+                </c:pt>
+                <c:pt idx="1">
+                  <c:v>1.2</c:v>
+                </c:pt>
+                <c:pt idx="2">
+                  <c:v>0.2</c:v>
+                </c:pt>
+              </c:numCache>
+            </c:numRef>
+          </c:val>
+          <c:extLst>
+            <c:ext xmlns:c14="http://schemas.microsoft.com/office/drawing/2007/8/2/chart" uri="{6F2FDCE9-48DA-4B69-8628-5D25D57E5C99}">
+              <c14:invertSolidFillFmt>
+                <c14:spPr xmlns:c14="http://schemas.microsoft.com/office/drawing/2007/8/2/chart">
+                  <a:solidFill>
+                    <a:srgbClr val="FFFFFF"/>
+                  </a:solidFill>
+                </c14:spPr>
+              </c14:invertSolidFillFmt>
+            </c:ext>
+            <c:ext xmlns:c16="http://schemas.microsoft.com/office/drawing/2014/chart" uri="{C3380CC4-5D6E-409C-BE32-E72D297353CC}">
+              <c16:uniqueId val="{00000000-E970-45BA-8499-251F9C2C08E0}"/>
+            </c:ext>
+          </c:extLst>
+        </c:ser>
+        <c:ser>
+          <c:idx val="1"/>
+          <c:order val="1"/>
+          <c:tx>
+            <c:strRef>
+              <c:f>Sheet1!$C$1</c:f>
+              <c:strCache>
+                <c:ptCount val="1"/>
+                <c:pt idx="0">
+                  <c:v>MSCI IMI</c:v>
+                </c:pt>
+              </c:strCache>
+            </c:strRef>
+          </c:tx>
+          <c:spPr>
+            <a:solidFill>
+              <a:srgbClr val="556A83"/>
+            </a:solidFill>
+          </c:spPr>
+          <c:invertIfNegative val="1"/>
+          <c:dLbls>
+            <c:numFmt formatCode="0.0&quot;%&quot;" sourceLinked="0"/>
+            <c:spPr>
+              <a:noFill/>
+              <a:ln>
+                <a:noFill/>
+              </a:ln>
+              <a:effectLst/>
+            </c:spPr>
+            <c:txPr>
+              <a:bodyPr/>
+              <a:lstStyle/>
+              <a:p>
+                <a:pPr>
+                  <a:defRPr sz="720">
+                    <a:solidFill>
+                      <a:srgbClr val="0E1620"/>
+                    </a:solidFill>
+                  </a:defRPr>
+                </a:pPr>
+                <a:endParaRPr lang="sv-SE"/>
+              </a:p>
+            </c:txPr>
+            <c:dLblPos val="outEnd"/>
+            <c:showLegendKey val="0"/>
+            <c:showVal val="1"/>
+            <c:showCatName val="0"/>
+            <c:showSerName val="0"/>
+            <c:showPercent val="0"/>
+            <c:showBubbleSize val="0"/>
+            <c:showLeaderLines val="0"/>
+            <c:extLst>
+              <c:ext xmlns:c15="http://schemas.microsoft.com/office/drawing/2012/chart" uri="{CE6537A1-D6FC-4f65-9D91-7224C49458BB}">
+                <c15:showLeaderLines val="0"/>
+              </c:ext>
+            </c:extLst>
+          </c:dLbls>
+          <c:cat>
+            <c:strRef>
+              <c:f>Sheet1!$A$2:$A$4</c:f>
+              <c:strCache>
+                <c:ptCount val="3"/>
+                <c:pt idx="0">
+                  <c:v>All markets</c:v>
+                </c:pt>
+                <c:pt idx="1">
+                  <c:v>Up markets</c:v>
+                </c:pt>
+                <c:pt idx="2">
+                  <c:v>Down markets</c:v>
+                </c:pt>
+              </c:strCache>
+            </c:strRef>
+          </c:cat>
+          <c:val>
+            <c:numRef>
+              <c:f>Sheet1!$C$2:$C$4</c:f>
+              <c:numCache>
+                <c:formatCode>General</c:formatCode>
+                <c:ptCount val="3"/>
+                <c:pt idx="0">
+                  <c:v>0.6</c:v>
+                </c:pt>
+                <c:pt idx="1">
+                  <c:v>1.3</c:v>
+                </c:pt>
+                <c:pt idx="2">
+                  <c:v>-1.7</c:v>
+                </c:pt>
+              </c:numCache>
+            </c:numRef>
+          </c:val>
+          <c:extLst>
+            <c:ext xmlns:c14="http://schemas.microsoft.com/office/drawing/2007/8/2/chart" uri="{6F2FDCE9-48DA-4B69-8628-5D25D57E5C99}">
+              <c14:invertSolidFillFmt>
+                <c14:spPr xmlns:c14="http://schemas.microsoft.com/office/drawing/2007/8/2/chart">
+                  <a:solidFill>
+                    <a:srgbClr val="FFFFFF"/>
+                  </a:solidFill>
+                </c14:spPr>
+              </c14:invertSolidFillFmt>
+            </c:ext>
+            <c:ext xmlns:c16="http://schemas.microsoft.com/office/drawing/2014/chart" uri="{C3380CC4-5D6E-409C-BE32-E72D297353CC}">
+              <c16:uniqueId val="{00000001-E970-45BA-8499-251F9C2C08E0}"/>
+            </c:ext>
+          </c:extLst>
+        </c:ser>
+        <c:dLbls>
+          <c:dLblPos val="outEnd"/>
+          <c:showLegendKey val="0"/>
+          <c:showVal val="1"/>
+          <c:showCatName val="0"/>
+          <c:showSerName val="0"/>
+          <c:showPercent val="0"/>
+          <c:showBubbleSize val="0"/>
+        </c:dLbls>
+        <c:gapWidth val="80"/>
+        <c:axId val="-2068027336"/>
+        <c:axId val="-2113994440"/>
+      </c:barChart>
+      <c:catAx>
+        <c:axId val="-2068027336"/>
+        <c:scaling>
+          <c:orientation val="minMax"/>
+        </c:scaling>
+        <c:delete val="0"/>
+        <c:axPos val="b"/>
+        <c:numFmt formatCode="General" sourceLinked="0"/>
+        <c:majorTickMark val="out"/>
+        <c:minorTickMark val="none"/>
+        <c:tickLblPos val="nextTo"/>
+        <c:txPr>
+          <a:bodyPr/>
+          <a:lstStyle/>
+          <a:p>
+            <a:pPr>
+              <a:defRPr sz="800">
+                <a:solidFill>
+                  <a:srgbClr val="0E1620"/>
+                </a:solidFill>
+              </a:defRPr>
+            </a:pPr>
+            <a:endParaRPr lang="sv-SE"/>
+          </a:p>
+        </c:txPr>
+        <c:crossAx val="-2113994440"/>
+        <c:crosses val="autoZero"/>
+        <c:auto val="1"/>
+        <c:lblAlgn val="ctr"/>
+        <c:lblOffset val="100"/>
+        <c:noMultiLvlLbl val="0"/>
+      </c:catAx>
+      <c:valAx>
+        <c:axId val="-2113994440"/>
+        <c:scaling>
+          <c:orientation val="minMax"/>
+        </c:scaling>
+        <c:delete val="0"/>
+        <c:axPos val="l"/>
+        <c:majorGridlines/>
+        <c:numFmt formatCode="General" sourceLinked="1"/>
+        <c:majorTickMark val="out"/>
+        <c:minorTickMark val="none"/>
+        <c:tickLblPos val="nextTo"/>
+        <c:txPr>
+          <a:bodyPr/>
+          <a:lstStyle/>
+          <a:p>
+            <a:pPr>
+              <a:defRPr sz="800">
+                <a:solidFill>
+                  <a:srgbClr val="0E1620"/>
+                </a:solidFill>
+              </a:defRPr>
+            </a:pPr>
+            <a:endParaRPr lang="sv-SE"/>
+          </a:p>
+        </c:txPr>
+        <c:crossAx val="-2068027336"/>
+        <c:crosses val="autoZero"/>
+        <c:crossBetween val="between"/>
+      </c:valAx>
+    </c:plotArea>
+    <c:legend>
+      <c:legendPos val="b"/>
+      <c:overlay val="0"/>
+      <c:txPr>
+        <a:bodyPr/>
+        <a:lstStyle/>
+        <a:p>
+          <a:pPr>
+            <a:defRPr sz="880"/>
+          </a:pPr>
+          <a:endParaRPr lang="sv-SE"/>
+        </a:p>
+      </c:txPr>
+    </c:legend>
+    <c:plotVisOnly val="1"/>
+    <c:dispBlanksAs val="gap"/>
+    <c:showDLblsOverMax val="1"/>
+  </c:chart>
+  <c:txPr>
+    <a:bodyPr/>
+    <a:lstStyle/>
+    <a:p>
+      <a:pPr>
+        <a:defRPr sz="1440"/>
+      </a:pPr>
+      <a:endParaRPr lang="en-US"/>
+    </a:p>
+  </c:txPr>
+  <c:externalData r:id="rId1">
+    <c:autoUpdate val="0"/>
+  </c:externalData>
+</c:chartSpace>
+</file>
+
+<file path=ppt/notesMasters/notesMaster1.xml><?xml version="1.0" encoding="utf-8"?>
+<p:notesMaster xmlns:a="http://schemas.openxmlformats.org/drawingml/2006/main" xmlns:r="http://schemas.openxmlformats.org/officeDocument/2006/relationships" xmlns:p="http://schemas.openxmlformats.org/presentationml/2006/main">
+  <p:cSld>
+    <p:bg>
+      <p:bgRef idx="1001">
+        <a:schemeClr val="bg1"/>
+      </p:bgRef>
+    </p:bg>
+    <p:spTree>
+      <p:nvGrpSpPr>
+        <p:cNvPr id="1" name=""/>
+        <p:cNvGrpSpPr/>
+        <p:nvPr/>
+      </p:nvGrpSpPr>
+      <p:grpSpPr>
+        <a:xfrm>
+          <a:off x="0" y="0"/>
+          <a:ext cx="0" cy="0"/>
+          <a:chOff x="0" y="0"/>
+          <a:chExt cx="0" cy="0"/>
+        </a:xfrm>
+      </p:grpSpPr>
+      <p:sp>
+        <p:nvSpPr>
+          <p:cNvPr id="2" name="Header Placeholder 1"/>
+          <p:cNvSpPr>
+            <a:spLocks noGrp="1"/>
+          </p:cNvSpPr>
+          <p:nvPr>
+            <p:ph type="hdr" sz="quarter"/>
+          </p:nvPr>
+        </p:nvSpPr>
+        <p:spPr>
+          <a:xfrm>
+            <a:off x="0" y="0"/>
+            <a:ext cx="2971800" cy="458788"/>
+          </a:xfrm>
+          <a:prstGeom prst="rect">
+            <a:avLst/>
+          </a:prstGeom>
+        </p:spPr>
+        <p:txBody>
+          <a:bodyPr vert="horz" lIns="91440" tIns="45720" rIns="91440" bIns="45720" rtlCol="0"/>
+          <a:lstStyle>
+            <a:lvl1pPr algn="l">
+              <a:defRPr sz="1200"/>
+            </a:lvl1pPr>
+          </a:lstStyle>
+          <a:p>
+            <a:endParaRPr lang="en-GB"/>
+          </a:p>
+        </p:txBody>
+      </p:sp>
+      <p:sp>
+        <p:nvSpPr>
+          <p:cNvPr id="3" name="Date Placeholder 2"/>
+          <p:cNvSpPr>
+            <a:spLocks noGrp="1"/>
+          </p:cNvSpPr>
+          <p:nvPr>
+            <p:ph type="dt" idx="1"/>
+          </p:nvPr>
+        </p:nvSpPr>
+        <p:spPr>
+          <a:xfrm>
+            <a:off x="3884613" y="0"/>
+            <a:ext cx="2971800" cy="458788"/>
+          </a:xfrm>
+          <a:prstGeom prst="rect">
+            <a:avLst/>
+          </a:prstGeom>
+        </p:spPr>
+        <p:txBody>
+          <a:bodyPr vert="horz" lIns="91440" tIns="45720" rIns="91440" bIns="45720" rtlCol="0"/>
+          <a:lstStyle>
+            <a:lvl1pPr algn="r">
+              <a:defRPr sz="1200"/>
+            </a:lvl1pPr>
+          </a:lstStyle>
+          <a:p>
+            <a:fld id="{29697395-2D59-4227-B53D-BB43A6595B5E}" type="datetimeFigureOut">
+              <a:rPr lang="en-GB" smtClean="0"/>
+              <a:t>09/06/2026</a:t>
+            </a:fld>
+            <a:endParaRPr lang="en-GB"/>
+          </a:p>
+        </p:txBody>
+      </p:sp>
+      <p:sp>
+        <p:nvSpPr>
+          <p:cNvPr id="4" name="Slide Image Placeholder 3"/>
+          <p:cNvSpPr>
+            <a:spLocks noGrp="1" noRot="1" noChangeAspect="1"/>
+          </p:cNvSpPr>
+          <p:nvPr>
+            <p:ph type="sldImg" idx="2"/>
+          </p:nvPr>
+        </p:nvSpPr>
+        <p:spPr>
+          <a:xfrm>
+            <a:off x="1371600" y="1143000"/>
+            <a:ext cx="4114800" cy="3086100"/>
+          </a:xfrm>
+          <a:prstGeom prst="rect">
+            <a:avLst/>
+          </a:prstGeom>
+          <a:noFill/>
+          <a:ln w="12700">
+            <a:solidFill>
+              <a:prstClr val="black"/>
+            </a:solidFill>
+          </a:ln>
+        </p:spPr>
+        <p:txBody>
+          <a:bodyPr vert="horz" lIns="91440" tIns="45720" rIns="91440" bIns="45720" rtlCol="0" anchor="ctr"/>
+          <a:lstStyle/>
+          <a:p>
+            <a:endParaRPr lang="en-GB"/>
+          </a:p>
+        </p:txBody>
+      </p:sp>
+      <p:sp>
+        <p:nvSpPr>
+          <p:cNvPr id="5" name="Notes Placeholder 4"/>
+          <p:cNvSpPr>
+            <a:spLocks noGrp="1"/>
+          </p:cNvSpPr>
+          <p:nvPr>
+            <p:ph type="body" sz="quarter" idx="3"/>
+          </p:nvPr>
+        </p:nvSpPr>
+        <p:spPr>
+          <a:xfrm>
+            <a:off x="685800" y="4400550"/>
+            <a:ext cx="5486400" cy="3600450"/>
+          </a:xfrm>
+          <a:prstGeom prst="rect">
+            <a:avLst/>
+          </a:prstGeom>
+        </p:spPr>
+        <p:txBody>
+          <a:bodyPr vert="horz" lIns="91440" tIns="45720" rIns="91440" bIns="45720" rtlCol="0"/>
+          <a:lstStyle/>
+          <a:p>
+            <a:pPr lvl="0"/>
+            <a:r>
+              <a:rPr lang="en-US"/>
+              <a:t>Click to edit Master text styles</a:t>
+            </a:r>
+          </a:p>
+          <a:p>
+            <a:pPr lvl="1"/>
+            <a:r>
+              <a:rPr lang="en-US"/>
+              <a:t>Second level</a:t>
+            </a:r>
+          </a:p>
+          <a:p>
+            <a:pPr lvl="2"/>
+            <a:r>
+              <a:rPr lang="en-US"/>
+              <a:t>Third level</a:t>
+            </a:r>
+          </a:p>
+          <a:p>
+            <a:pPr lvl="3"/>
+            <a:r>
+              <a:rPr lang="en-US"/>
+              <a:t>Fourth level</a:t>
+            </a:r>
+          </a:p>
+          <a:p>
+            <a:pPr lvl="4"/>
+            <a:r>
+              <a:rPr lang="en-US"/>
+              <a:t>Fifth level</a:t>
+            </a:r>
+            <a:endParaRPr lang="en-GB"/>
+          </a:p>
+        </p:txBody>
+      </p:sp>
+      <p:sp>
+        <p:nvSpPr>
+          <p:cNvPr id="6" name="Footer Placeholder 5"/>
+          <p:cNvSpPr>
+            <a:spLocks noGrp="1"/>
+          </p:cNvSpPr>
+          <p:nvPr>
+            <p:ph type="ftr" sz="quarter" idx="4"/>
+          </p:nvPr>
+        </p:nvSpPr>
+        <p:spPr>
+          <a:xfrm>
+            <a:off x="0" y="8685213"/>
+            <a:ext cx="2971800" cy="458787"/>
+          </a:xfrm>
+          <a:prstGeom prst="rect">
+            <a:avLst/>
+          </a:prstGeom>
+        </p:spPr>
+        <p:txBody>
+          <a:bodyPr vert="horz" lIns="91440" tIns="45720" rIns="91440" bIns="45720" rtlCol="0" anchor="b"/>
+          <a:lstStyle>
+            <a:lvl1pPr algn="l">
+              <a:defRPr sz="1200"/>
+            </a:lvl1pPr>
+          </a:lstStyle>
+          <a:p>
+            <a:endParaRPr lang="en-GB"/>
+          </a:p>
+        </p:txBody>
+      </p:sp>
+      <p:sp>
+        <p:nvSpPr>
+          <p:cNvPr id="7" name="Slide Number Placeholder 6"/>
+          <p:cNvSpPr>
+            <a:spLocks noGrp="1"/>
+          </p:cNvSpPr>
+          <p:nvPr>
+            <p:ph type="sldNum" sz="quarter" idx="5"/>
+          </p:nvPr>
+        </p:nvSpPr>
+        <p:spPr>
+          <a:xfrm>
+            <a:off x="3884613" y="8685213"/>
+            <a:ext cx="2971800" cy="458787"/>
+          </a:xfrm>
+          <a:prstGeom prst="rect">
+            <a:avLst/>
+          </a:prstGeom>
+        </p:spPr>
+        <p:txBody>
+          <a:bodyPr vert="horz" lIns="91440" tIns="45720" rIns="91440" bIns="45720" rtlCol="0" anchor="b"/>
+          <a:lstStyle>
+            <a:lvl1pPr algn="r">
+              <a:defRPr sz="1200"/>
+            </a:lvl1pPr>
+          </a:lstStyle>
+          <a:p>
+            <a:fld id="{1F8C4698-2B99-4D89-860A-947FB2745133}" type="slidenum">
+              <a:rPr lang="en-GB" smtClean="0"/>
+              <a:t>‹#›</a:t>
+            </a:fld>
+            <a:endParaRPr lang="en-GB"/>
+          </a:p>
+        </p:txBody>
+      </p:sp>
+    </p:spTree>
+    <p:extLst>
+      <p:ext uri="{BB962C8B-B14F-4D97-AF65-F5344CB8AC3E}">
+        <p14:creationId xmlns:p14="http://schemas.microsoft.com/office/powerpoint/2010/main" val="1559085769"/>
+      </p:ext>
+    </p:extLst>
+  </p:cSld>
+  <p:clrMap bg1="lt1" tx1="dk1" bg2="lt2" tx2="dk2" accent1="accent1" accent2="accent2" accent3="accent3" accent4="accent4" accent5="accent5" accent6="accent6" hlink="hlink" folHlink="folHlink"/>
+  <p:notesStyle>
+    <a:lvl1pPr marL="0" algn="l" defTabSz="914400" rtl="0" eaLnBrk="1" latinLnBrk="0" hangingPunct="1">
+      <a:defRPr sz="1200" kern="1200">
+        <a:solidFill>
+          <a:schemeClr val="tx1"/>
+        </a:solidFill>
+        <a:latin typeface="+mn-lt"/>
+        <a:ea typeface="+mn-ea"/>
+        <a:cs typeface="+mn-cs"/>
+      </a:defRPr>
+    </a:lvl1pPr>
+    <a:lvl2pPr marL="457200" algn="l" defTabSz="914400" rtl="0" eaLnBrk="1" latinLnBrk="0" hangingPunct="1">
+      <a:defRPr sz="1200" kern="1200">
+        <a:solidFill>
+          <a:schemeClr val="tx1"/>
+        </a:solidFill>
+        <a:latin typeface="+mn-lt"/>
+        <a:ea typeface="+mn-ea"/>
+        <a:cs typeface="+mn-cs"/>
+      </a:defRPr>
+    </a:lvl2pPr>
+    <a:lvl3pPr marL="914400" algn="l" defTabSz="914400" rtl="0" eaLnBrk="1" latinLnBrk="0" hangingPunct="1">
+      <a:defRPr sz="1200" kern="1200">
+        <a:solidFill>
+          <a:schemeClr val="tx1"/>
+        </a:solidFill>
+        <a:latin typeface="+mn-lt"/>
+        <a:ea typeface="+mn-ea"/>
+        <a:cs typeface="+mn-cs"/>
+      </a:defRPr>
+    </a:lvl3pPr>
+    <a:lvl4pPr marL="1371600" algn="l" defTabSz="914400" rtl="0" eaLnBrk="1" latinLnBrk="0" hangingPunct="1">
+      <a:defRPr sz="1200" kern="1200">
+        <a:solidFill>
+          <a:schemeClr val="tx1"/>
+        </a:solidFill>
+        <a:latin typeface="+mn-lt"/>
+        <a:ea typeface="+mn-ea"/>
+        <a:cs typeface="+mn-cs"/>
+      </a:defRPr>
+    </a:lvl4pPr>
+    <a:lvl5pPr marL="1828800" algn="l" defTabSz="914400" rtl="0" eaLnBrk="1" latinLnBrk="0" hangingPunct="1">
+      <a:defRPr sz="1200" kern="1200">
+        <a:solidFill>
+          <a:schemeClr val="tx1"/>
+        </a:solidFill>
+        <a:latin typeface="+mn-lt"/>
+        <a:ea typeface="+mn-ea"/>
+        <a:cs typeface="+mn-cs"/>
+      </a:defRPr>
+    </a:lvl5pPr>
+    <a:lvl6pPr marL="2286000" algn="l" defTabSz="914400" rtl="0" eaLnBrk="1" latinLnBrk="0" hangingPunct="1">
+      <a:defRPr sz="1200" kern="1200">
+        <a:solidFill>
+          <a:schemeClr val="tx1"/>
+        </a:solidFill>
+        <a:latin typeface="+mn-lt"/>
+        <a:ea typeface="+mn-ea"/>
+        <a:cs typeface="+mn-cs"/>
+      </a:defRPr>
+    </a:lvl6pPr>
+    <a:lvl7pPr marL="2743200" algn="l" defTabSz="914400" rtl="0" eaLnBrk="1" latinLnBrk="0" hangingPunct="1">
+      <a:defRPr sz="1200" kern="1200">
+        <a:solidFill>
+          <a:schemeClr val="tx1"/>
+        </a:solidFill>
+        <a:latin typeface="+mn-lt"/>
+        <a:ea typeface="+mn-ea"/>
+        <a:cs typeface="+mn-cs"/>
+      </a:defRPr>
+    </a:lvl7pPr>
+    <a:lvl8pPr marL="3200400" algn="l" defTabSz="914400" rtl="0" eaLnBrk="1" latinLnBrk="0" hangingPunct="1">
+      <a:defRPr sz="1200" kern="1200">
+        <a:solidFill>
+          <a:schemeClr val="tx1"/>
+        </a:solidFill>
+        <a:latin typeface="+mn-lt"/>
+        <a:ea typeface="+mn-ea"/>
+        <a:cs typeface="+mn-cs"/>
+      </a:defRPr>
+    </a:lvl8pPr>
+    <a:lvl9pPr marL="3657600" algn="l" defTabSz="914400" rtl="0" eaLnBrk="1" latinLnBrk="0" hangingPunct="1">
+      <a:defRPr sz="1200" kern="1200">
+        <a:solidFill>
+          <a:schemeClr val="tx1"/>
+        </a:solidFill>
+        <a:latin typeface="+mn-lt"/>
+        <a:ea typeface="+mn-ea"/>
+        <a:cs typeface="+mn-cs"/>
+      </a:defRPr>
+    </a:lvl9pPr>
+  </p:notesStyle>
+</p:notesMaster>
+</file>
+
+<file path=ppt/notesSlides/notesSlide1.xml><?xml version="1.0" encoding="utf-8"?>
+<p:notes xmlns:a="http://schemas.openxmlformats.org/drawingml/2006/main" xmlns:r="http://schemas.openxmlformats.org/officeDocument/2006/relationships" xmlns:p="http://schemas.openxmlformats.org/presentationml/2006/main">
+  <p:cSld>
+    <p:spTree>
+      <p:nvGrpSpPr>
+        <p:cNvPr id="1" name=""/>
+        <p:cNvGrpSpPr/>
+        <p:nvPr/>
+      </p:nvGrpSpPr>
+      <p:grpSpPr>
+        <a:xfrm>
+          <a:off x="0" y="0"/>
+          <a:ext cx="0" cy="0"/>
+          <a:chOff x="0" y="0"/>
+          <a:chExt cx="0" cy="0"/>
+        </a:xfrm>
+      </p:grpSpPr>
+      <p:sp>
+        <p:nvSpPr>
+          <p:cNvPr id="2" name="Slide Image Placeholder 1"/>
+          <p:cNvSpPr>
+            <a:spLocks noGrp="1" noRot="1" noChangeAspect="1"/>
+          </p:cNvSpPr>
+          <p:nvPr>
+            <p:ph type="sldImg"/>
+          </p:nvPr>
+        </p:nvSpPr>
+        <p:spPr/>
+      </p:sp>
+      <p:sp>
+        <p:nvSpPr>
+          <p:cNvPr id="3" name="Notes Placeholder 2"/>
+          <p:cNvSpPr>
+            <a:spLocks noGrp="1"/>
+          </p:cNvSpPr>
+          <p:nvPr>
+            <p:ph type="body" idx="1"/>
+          </p:nvPr>
+        </p:nvSpPr>
+        <p:spPr/>
+        <p:txBody>
+          <a:bodyPr/>
+          <a:lstStyle/>
+          <a:p>
+            <a:endParaRPr lang="en-GB" dirty="0"/>
+          </a:p>
+        </p:txBody>
+      </p:sp>
+      <p:sp>
+        <p:nvSpPr>
+          <p:cNvPr id="4" name="Slide Number Placeholder 3"/>
+          <p:cNvSpPr>
+            <a:spLocks noGrp="1"/>
+          </p:cNvSpPr>
+          <p:nvPr>
+            <p:ph type="sldNum" sz="quarter" idx="5"/>
+          </p:nvPr>
+        </p:nvSpPr>
+        <p:spPr/>
+        <p:txBody>
+          <a:bodyPr/>
+          <a:lstStyle/>
+          <a:p>
+            <a:fld id="{1F8C4698-2B99-4D89-860A-947FB2745133}" type="slidenum">
+              <a:rPr lang="en-GB" smtClean="0"/>
+              <a:t>1</a:t>
+            </a:fld>
+            <a:endParaRPr lang="en-GB"/>
+          </a:p>
+        </p:txBody>
+      </p:sp>
+    </p:spTree>
+    <p:extLst>
+      <p:ext uri="{BB962C8B-B14F-4D97-AF65-F5344CB8AC3E}">
+        <p14:creationId xmlns:p14="http://schemas.microsoft.com/office/powerpoint/2010/main" val="3018759546"/>
+      </p:ext>
+    </p:extLst>
+  </p:cSld>
+  <p:clrMapOvr>
+    <a:masterClrMapping/>
+  </p:clrMapOvr>
+</p:notes>
+</file>
+
 <file path=ppt/slideLayouts/slideLayout1.xml><?xml version="1.0" encoding="utf-8"?>
 <p:sldLayout xmlns:a="http://schemas.openxmlformats.org/drawingml/2006/main" xmlns:r="http://schemas.openxmlformats.org/officeDocument/2006/relationships" xmlns:p="http://schemas.openxmlformats.org/presentationml/2006/main" type="title" preserve="1">
   <p:cSld name="Title Slide">
@@ -4256,7 +4747,7 @@
           <p:nvPr/>
         </p:nvPicPr>
         <p:blipFill>
-          <a:blip r:embed="rId2"/>
+          <a:blip r:embed="rId3"/>
           <a:stretch>
             <a:fillRect/>
           </a:stretch>
@@ -4325,7 +4816,7 @@
         <p:spPr>
           <a:xfrm>
             <a:off x="438922" y="4632960"/>
-            <a:ext cx="8632151" cy="1950720"/>
+            <a:ext cx="8632151" cy="947182"/>
           </a:xfrm>
           <a:prstGeom prst="rect">
             <a:avLst/>
@@ -4347,14 +4838,20 @@
               </a:spcAft>
             </a:pPr>
             <a:r>
-              <a:rPr sz="3360" b="0" i="0" spc="-126">
+              <a:rPr lang="en-GB" sz="3360" spc="-126" dirty="0">
                 <a:solidFill>
                   <a:srgbClr val="FFFFFF"/>
                 </a:solidFill>
                 <a:latin typeface="Times New Roman"/>
               </a:rPr>
-              <a:t>Engaged Ownership as an Asset Class</a:t>
-            </a:r>
+              <a:t>Investor Presentation</a:t>
+            </a:r>
+            <a:endParaRPr sz="3360" b="0" i="0" spc="-126" dirty="0">
+              <a:solidFill>
+                <a:srgbClr val="FFFFFF"/>
+              </a:solidFill>
+              <a:latin typeface="Times New Roman"/>
+            </a:endParaRPr>
           </a:p>
           <a:p>
             <a:pPr algn="l">
@@ -4366,56 +4863,20 @@
               </a:spcAft>
             </a:pPr>
             <a:r>
-              <a:rPr sz="1920" b="0" i="1" spc="-72">
+              <a:rPr lang="en-GB" sz="1920" b="0" i="1" spc="-72" dirty="0">
                 <a:solidFill>
                   <a:srgbClr val="E2E5E9"/>
                 </a:solidFill>
                 <a:latin typeface="Times New Roman"/>
               </a:rPr>
-              <a:t>Why allocators should consider it — and why Athanase</a:t>
-            </a:r>
-          </a:p>
-        </p:txBody>
-      </p:sp>
-      <p:sp>
-        <p:nvSpPr>
-          <p:cNvPr id="6" name="TextBox 5"/>
-          <p:cNvSpPr txBox="1"/>
-          <p:nvPr/>
-        </p:nvSpPr>
-        <p:spPr>
-          <a:xfrm>
-            <a:off x="453553" y="6437376"/>
-            <a:ext cx="5852306" cy="487680"/>
-          </a:xfrm>
-          <a:prstGeom prst="rect">
-            <a:avLst/>
-          </a:prstGeom>
-          <a:noFill/>
-        </p:spPr>
-        <p:txBody>
-          <a:bodyPr wrap="square" lIns="0" tIns="0" rIns="0" bIns="0" anchor="t">
-            <a:spAutoFit/>
-          </a:bodyPr>
-          <a:lstStyle/>
-          <a:p>
-            <a:pPr algn="l">
-              <a:lnSpc>
-                <a:spcPct val="110000"/>
-              </a:lnSpc>
-              <a:spcAft>
-                <a:spcPts val="0"/>
-              </a:spcAft>
-            </a:pPr>
-            <a:r>
-              <a:rPr sz="1040" b="0" i="0">
-                <a:solidFill>
-                  <a:srgbClr val="556A83"/>
-                </a:solidFill>
-                <a:latin typeface="Arial"/>
-              </a:rPr>
-              <a:t>An endowment briefing  ·  Replacing part of global public equity  ·  June 2026</a:t>
-            </a:r>
+              <a:t>June 2026</a:t>
+            </a:r>
+            <a:endParaRPr sz="1920" b="0" i="1" spc="-72" dirty="0">
+              <a:solidFill>
+                <a:srgbClr val="E2E5E9"/>
+              </a:solidFill>
+              <a:latin typeface="Times New Roman"/>
+            </a:endParaRPr>
           </a:p>
         </p:txBody>
       </p:sp>
@@ -4721,7 +5182,7 @@
                 </a:solidFill>
                 <a:latin typeface="Arial"/>
               </a:rPr>
-              <a:t>Strictly confidential          10</a:t>
+              <a:t>Strictly confidential          9</a:t>
             </a:r>
           </a:p>
         </p:txBody>
@@ -11479,7 +11940,7 @@
               </a:spcAft>
             </a:pPr>
             <a:r>
-              <a:rPr sz="840" b="1" i="0">
+              <a:rPr sz="840" b="1" i="0" dirty="0">
                 <a:solidFill>
                   <a:srgbClr val="314359"/>
                 </a:solidFill>
@@ -26022,2171 +26483,6 @@
 </p:sld>
 </file>
 
-<file path=ppt/slides/slide6.xml><?xml version="1.0" encoding="utf-8"?>
-<p:sld xmlns:a="http://schemas.openxmlformats.org/drawingml/2006/main" xmlns:r="http://schemas.openxmlformats.org/officeDocument/2006/relationships" xmlns:p="http://schemas.openxmlformats.org/presentationml/2006/main">
-  <p:cSld>
-    <p:spTree>
-      <p:nvGrpSpPr>
-        <p:cNvPr id="1" name=""/>
-        <p:cNvGrpSpPr/>
-        <p:nvPr/>
-      </p:nvGrpSpPr>
-      <p:grpSpPr>
-        <a:xfrm>
-          <a:off x="0" y="0"/>
-          <a:ext cx="0" cy="0"/>
-          <a:chOff x="0" y="0"/>
-          <a:chExt cx="0" cy="0"/>
-        </a:xfrm>
-      </p:grpSpPr>
-      <p:sp>
-        <p:nvSpPr>
-          <p:cNvPr id="2" name="Rectangle 1"/>
-          <p:cNvSpPr/>
-          <p:nvPr/>
-        </p:nvSpPr>
-        <p:spPr>
-          <a:xfrm>
-            <a:off x="0" y="0"/>
-            <a:ext cx="9753600" cy="7315200"/>
-          </a:xfrm>
-          <a:prstGeom prst="rect">
-            <a:avLst/>
-          </a:prstGeom>
-          <a:solidFill>
-            <a:srgbClr val="FFFFFF"/>
-          </a:solidFill>
-          <a:ln>
-            <a:noFill/>
-          </a:ln>
-          <a:effectLst/>
-        </p:spPr>
-        <p:style>
-          <a:lnRef idx="1">
-            <a:schemeClr val="accent1"/>
-          </a:lnRef>
-          <a:fillRef idx="3">
-            <a:schemeClr val="accent1"/>
-          </a:fillRef>
-          <a:effectRef idx="2">
-            <a:schemeClr val="accent1"/>
-          </a:effectRef>
-          <a:fontRef idx="minor">
-            <a:schemeClr val="lt1"/>
-          </a:fontRef>
-        </p:style>
-        <p:txBody>
-          <a:bodyPr rtlCol="0" anchor="ctr"/>
-          <a:lstStyle/>
-          <a:p>
-            <a:pPr algn="ctr"/>
-            <a:endParaRPr/>
-          </a:p>
-        </p:txBody>
-      </p:sp>
-      <p:pic>
-        <p:nvPicPr>
-          <p:cNvPr id="3" name="Picture 2" descr="mark_dark.png"/>
-          <p:cNvPicPr>
-            <a:picLocks noChangeAspect="1"/>
-          </p:cNvPicPr>
-          <p:nvPr/>
-        </p:nvPicPr>
-        <p:blipFill>
-          <a:blip r:embed="rId2"/>
-          <a:stretch>
-            <a:fillRect/>
-          </a:stretch>
-        </p:blipFill>
-        <p:spPr>
-          <a:xfrm>
-            <a:off x="402346" y="234086"/>
-            <a:ext cx="224012" cy="190199"/>
-          </a:xfrm>
-          <a:prstGeom prst="rect">
-            <a:avLst/>
-          </a:prstGeom>
-        </p:spPr>
-      </p:pic>
-      <p:sp>
-        <p:nvSpPr>
-          <p:cNvPr id="4" name="TextBox 3"/>
-          <p:cNvSpPr txBox="1"/>
-          <p:nvPr/>
-        </p:nvSpPr>
-        <p:spPr>
-          <a:xfrm>
-            <a:off x="716907" y="263347"/>
-            <a:ext cx="5120768" cy="292608"/>
-          </a:xfrm>
-          <a:prstGeom prst="rect">
-            <a:avLst/>
-          </a:prstGeom>
-          <a:noFill/>
-        </p:spPr>
-        <p:txBody>
-          <a:bodyPr wrap="square" lIns="0" tIns="0" rIns="0" bIns="0" anchor="t">
-            <a:spAutoFit/>
-          </a:bodyPr>
-          <a:lstStyle/>
-          <a:p>
-            <a:pPr algn="l">
-              <a:lnSpc>
-                <a:spcPct val="110000"/>
-              </a:lnSpc>
-              <a:spcAft>
-                <a:spcPts val="0"/>
-              </a:spcAft>
-            </a:pPr>
-            <a:r>
-              <a:rPr sz="880" b="0" i="0">
-                <a:solidFill>
-                  <a:srgbClr val="556A83"/>
-                </a:solidFill>
-                <a:latin typeface="Arial"/>
-              </a:rPr>
-              <a:t>The Opportunity</a:t>
-            </a:r>
-          </a:p>
-        </p:txBody>
-      </p:sp>
-      <p:sp>
-        <p:nvSpPr>
-          <p:cNvPr id="5" name="TextBox 4"/>
-          <p:cNvSpPr txBox="1"/>
-          <p:nvPr/>
-        </p:nvSpPr>
-        <p:spPr>
-          <a:xfrm>
-            <a:off x="7242229" y="263347"/>
-            <a:ext cx="2084884" cy="292608"/>
-          </a:xfrm>
-          <a:prstGeom prst="rect">
-            <a:avLst/>
-          </a:prstGeom>
-          <a:noFill/>
-        </p:spPr>
-        <p:txBody>
-          <a:bodyPr wrap="square" lIns="0" tIns="0" rIns="0" bIns="0" anchor="t">
-            <a:spAutoFit/>
-          </a:bodyPr>
-          <a:lstStyle/>
-          <a:p>
-            <a:pPr algn="r">
-              <a:lnSpc>
-                <a:spcPct val="110000"/>
-              </a:lnSpc>
-              <a:spcAft>
-                <a:spcPts val="0"/>
-              </a:spcAft>
-            </a:pPr>
-            <a:r>
-              <a:rPr sz="880" b="1" i="0">
-                <a:solidFill>
-                  <a:srgbClr val="556A83"/>
-                </a:solidFill>
-                <a:latin typeface="Arial"/>
-              </a:rPr>
-              <a:t>Table 2</a:t>
-            </a:r>
-          </a:p>
-        </p:txBody>
-      </p:sp>
-      <p:sp>
-        <p:nvSpPr>
-          <p:cNvPr id="6" name="Rectangle 5"/>
-          <p:cNvSpPr/>
-          <p:nvPr/>
-        </p:nvSpPr>
-        <p:spPr>
-          <a:xfrm>
-            <a:off x="0" y="604723"/>
-            <a:ext cx="9753600" cy="1414272"/>
-          </a:xfrm>
-          <a:prstGeom prst="rect">
-            <a:avLst/>
-          </a:prstGeom>
-          <a:solidFill>
-            <a:srgbClr val="F6F7F9"/>
-          </a:solidFill>
-          <a:ln>
-            <a:noFill/>
-          </a:ln>
-          <a:effectLst/>
-        </p:spPr>
-        <p:style>
-          <a:lnRef idx="1">
-            <a:schemeClr val="accent1"/>
-          </a:lnRef>
-          <a:fillRef idx="3">
-            <a:schemeClr val="accent1"/>
-          </a:fillRef>
-          <a:effectRef idx="2">
-            <a:schemeClr val="accent1"/>
-          </a:effectRef>
-          <a:fontRef idx="minor">
-            <a:schemeClr val="lt1"/>
-          </a:fontRef>
-        </p:style>
-        <p:txBody>
-          <a:bodyPr rtlCol="0" anchor="ctr"/>
-          <a:lstStyle/>
-          <a:p>
-            <a:pPr algn="ctr"/>
-            <a:endParaRPr/>
-          </a:p>
-        </p:txBody>
-      </p:sp>
-      <p:sp>
-        <p:nvSpPr>
-          <p:cNvPr id="7" name="TextBox 6"/>
-          <p:cNvSpPr txBox="1"/>
-          <p:nvPr/>
-        </p:nvSpPr>
-        <p:spPr>
-          <a:xfrm>
-            <a:off x="438922" y="721766"/>
-            <a:ext cx="8851613" cy="829056"/>
-          </a:xfrm>
-          <a:prstGeom prst="rect">
-            <a:avLst/>
-          </a:prstGeom>
-          <a:noFill/>
-        </p:spPr>
-        <p:txBody>
-          <a:bodyPr wrap="square" lIns="0" tIns="0" rIns="0" bIns="0" anchor="t">
-            <a:spAutoFit/>
-          </a:bodyPr>
-          <a:lstStyle/>
-          <a:p>
-            <a:pPr algn="l">
-              <a:lnSpc>
-                <a:spcPct val="110000"/>
-              </a:lnSpc>
-              <a:spcAft>
-                <a:spcPts val="200"/>
-              </a:spcAft>
-            </a:pPr>
-            <a:r>
-              <a:rPr sz="2400" b="0" i="0" spc="-90">
-                <a:solidFill>
-                  <a:srgbClr val="314359"/>
-                </a:solidFill>
-                <a:latin typeface="Times New Roman"/>
-              </a:rPr>
-              <a:t>Why mid-market is the sweet spot</a:t>
-            </a:r>
-          </a:p>
-        </p:txBody>
-      </p:sp>
-      <p:sp>
-        <p:nvSpPr>
-          <p:cNvPr id="8" name="TextBox 7"/>
-          <p:cNvSpPr txBox="1"/>
-          <p:nvPr/>
-        </p:nvSpPr>
-        <p:spPr>
-          <a:xfrm>
-            <a:off x="453553" y="1511808"/>
-            <a:ext cx="8705305" cy="487680"/>
-          </a:xfrm>
-          <a:prstGeom prst="rect">
-            <a:avLst/>
-          </a:prstGeom>
-          <a:noFill/>
-        </p:spPr>
-        <p:txBody>
-          <a:bodyPr wrap="square" lIns="0" tIns="0" rIns="0" bIns="0" anchor="t">
-            <a:spAutoFit/>
-          </a:bodyPr>
-          <a:lstStyle/>
-          <a:p>
-            <a:pPr algn="l">
-              <a:lnSpc>
-                <a:spcPct val="110000"/>
-              </a:lnSpc>
-              <a:spcAft>
-                <a:spcPts val="0"/>
-              </a:spcAft>
-            </a:pPr>
-            <a:r>
-              <a:rPr sz="1040" b="0" i="1">
-                <a:solidFill>
-                  <a:srgbClr val="556A83"/>
-                </a:solidFill>
-                <a:latin typeface="Arial"/>
-              </a:rPr>
-              <a:t>Big enough to run well, small enough to change — and to grow. The engaged-ownership opportunity is richest in the middle.</a:t>
-            </a:r>
-          </a:p>
-        </p:txBody>
-      </p:sp>
-      <p:sp>
-        <p:nvSpPr>
-          <p:cNvPr id="9" name="TextBox 8"/>
-          <p:cNvSpPr txBox="1"/>
-          <p:nvPr/>
-        </p:nvSpPr>
-        <p:spPr>
-          <a:xfrm>
-            <a:off x="6583844" y="6876288"/>
-            <a:ext cx="2926153" cy="292608"/>
-          </a:xfrm>
-          <a:prstGeom prst="rect">
-            <a:avLst/>
-          </a:prstGeom>
-          <a:noFill/>
-        </p:spPr>
-        <p:txBody>
-          <a:bodyPr wrap="square" lIns="0" tIns="0" rIns="0" bIns="0" anchor="t">
-            <a:spAutoFit/>
-          </a:bodyPr>
-          <a:lstStyle/>
-          <a:p>
-            <a:pPr algn="r">
-              <a:lnSpc>
-                <a:spcPct val="110000"/>
-              </a:lnSpc>
-              <a:spcAft>
-                <a:spcPts val="0"/>
-              </a:spcAft>
-            </a:pPr>
-            <a:r>
-              <a:rPr sz="680" b="0" i="0">
-                <a:solidFill>
-                  <a:srgbClr val="556A83"/>
-                </a:solidFill>
-                <a:latin typeface="Arial"/>
-              </a:rPr>
-              <a:t>Strictly confidential          6</a:t>
-            </a:r>
-          </a:p>
-        </p:txBody>
-      </p:sp>
-      <p:sp>
-        <p:nvSpPr>
-          <p:cNvPr id="10" name="Rectangle 9"/>
-          <p:cNvSpPr/>
-          <p:nvPr/>
-        </p:nvSpPr>
-        <p:spPr>
-          <a:xfrm>
-            <a:off x="402346" y="2292096"/>
-            <a:ext cx="1828845" cy="390144"/>
-          </a:xfrm>
-          <a:prstGeom prst="rect">
-            <a:avLst/>
-          </a:prstGeom>
-          <a:solidFill>
-            <a:srgbClr val="FFFFFF"/>
-          </a:solidFill>
-          <a:ln>
-            <a:noFill/>
-          </a:ln>
-          <a:effectLst/>
-        </p:spPr>
-        <p:style>
-          <a:lnRef idx="1">
-            <a:schemeClr val="accent1"/>
-          </a:lnRef>
-          <a:fillRef idx="3">
-            <a:schemeClr val="accent1"/>
-          </a:fillRef>
-          <a:effectRef idx="2">
-            <a:schemeClr val="accent1"/>
-          </a:effectRef>
-          <a:fontRef idx="minor">
-            <a:schemeClr val="lt1"/>
-          </a:fontRef>
-        </p:style>
-        <p:txBody>
-          <a:bodyPr rtlCol="0" anchor="ctr"/>
-          <a:lstStyle/>
-          <a:p>
-            <a:pPr algn="ctr"/>
-            <a:endParaRPr/>
-          </a:p>
-        </p:txBody>
-      </p:sp>
-      <p:sp>
-        <p:nvSpPr>
-          <p:cNvPr id="11" name="TextBox 10"/>
-          <p:cNvSpPr txBox="1"/>
-          <p:nvPr/>
-        </p:nvSpPr>
-        <p:spPr>
-          <a:xfrm>
-            <a:off x="490130" y="2292096"/>
-            <a:ext cx="1682538" cy="390144"/>
-          </a:xfrm>
-          <a:prstGeom prst="rect">
-            <a:avLst/>
-          </a:prstGeom>
-          <a:noFill/>
-        </p:spPr>
-        <p:txBody>
-          <a:bodyPr wrap="square" lIns="0" tIns="0" rIns="0" bIns="0" anchor="ctr">
-            <a:spAutoFit/>
-          </a:bodyPr>
-          <a:lstStyle/>
-          <a:p>
-            <a:pPr algn="l">
-              <a:lnSpc>
-                <a:spcPct val="105000"/>
-              </a:lnSpc>
-              <a:spcAft>
-                <a:spcPts val="0"/>
-              </a:spcAft>
-            </a:pPr>
-            <a:endParaRPr/>
-          </a:p>
-        </p:txBody>
-      </p:sp>
-      <p:sp>
-        <p:nvSpPr>
-          <p:cNvPr id="12" name="Rectangle 11"/>
-          <p:cNvSpPr/>
-          <p:nvPr/>
-        </p:nvSpPr>
-        <p:spPr>
-          <a:xfrm>
-            <a:off x="2231191" y="2292096"/>
-            <a:ext cx="2377499" cy="390144"/>
-          </a:xfrm>
-          <a:prstGeom prst="rect">
-            <a:avLst/>
-          </a:prstGeom>
-          <a:solidFill>
-            <a:srgbClr val="314359"/>
-          </a:solidFill>
-          <a:ln>
-            <a:noFill/>
-          </a:ln>
-          <a:effectLst/>
-        </p:spPr>
-        <p:style>
-          <a:lnRef idx="1">
-            <a:schemeClr val="accent1"/>
-          </a:lnRef>
-          <a:fillRef idx="3">
-            <a:schemeClr val="accent1"/>
-          </a:fillRef>
-          <a:effectRef idx="2">
-            <a:schemeClr val="accent1"/>
-          </a:effectRef>
-          <a:fontRef idx="minor">
-            <a:schemeClr val="lt1"/>
-          </a:fontRef>
-        </p:style>
-        <p:txBody>
-          <a:bodyPr rtlCol="0" anchor="ctr"/>
-          <a:lstStyle/>
-          <a:p>
-            <a:pPr algn="ctr"/>
-            <a:endParaRPr/>
-          </a:p>
-        </p:txBody>
-      </p:sp>
-      <p:sp>
-        <p:nvSpPr>
-          <p:cNvPr id="13" name="TextBox 12"/>
-          <p:cNvSpPr txBox="1"/>
-          <p:nvPr/>
-        </p:nvSpPr>
-        <p:spPr>
-          <a:xfrm>
-            <a:off x="2318976" y="2292096"/>
-            <a:ext cx="2231191" cy="390144"/>
-          </a:xfrm>
-          <a:prstGeom prst="rect">
-            <a:avLst/>
-          </a:prstGeom>
-          <a:noFill/>
-        </p:spPr>
-        <p:txBody>
-          <a:bodyPr wrap="square" lIns="0" tIns="0" rIns="0" bIns="0" anchor="ctr">
-            <a:spAutoFit/>
-          </a:bodyPr>
-          <a:lstStyle/>
-          <a:p>
-            <a:pPr algn="l">
-              <a:lnSpc>
-                <a:spcPct val="105000"/>
-              </a:lnSpc>
-              <a:spcAft>
-                <a:spcPts val="0"/>
-              </a:spcAft>
-            </a:pPr>
-            <a:r>
-              <a:rPr sz="960" b="1" i="0">
-                <a:solidFill>
-                  <a:srgbClr val="FFFFFF"/>
-                </a:solidFill>
-                <a:latin typeface="Arial"/>
-              </a:rPr>
-              <a:t>Small-cap</a:t>
-            </a:r>
-          </a:p>
-        </p:txBody>
-      </p:sp>
-      <p:sp>
-        <p:nvSpPr>
-          <p:cNvPr id="14" name="Rectangle 13"/>
-          <p:cNvSpPr/>
-          <p:nvPr/>
-        </p:nvSpPr>
-        <p:spPr>
-          <a:xfrm>
-            <a:off x="4608691" y="2292096"/>
-            <a:ext cx="2560384" cy="390144"/>
-          </a:xfrm>
-          <a:prstGeom prst="rect">
-            <a:avLst/>
-          </a:prstGeom>
-          <a:solidFill>
-            <a:srgbClr val="152130"/>
-          </a:solidFill>
-          <a:ln>
-            <a:noFill/>
-          </a:ln>
-          <a:effectLst/>
-        </p:spPr>
-        <p:style>
-          <a:lnRef idx="1">
-            <a:schemeClr val="accent1"/>
-          </a:lnRef>
-          <a:fillRef idx="3">
-            <a:schemeClr val="accent1"/>
-          </a:fillRef>
-          <a:effectRef idx="2">
-            <a:schemeClr val="accent1"/>
-          </a:effectRef>
-          <a:fontRef idx="minor">
-            <a:schemeClr val="lt1"/>
-          </a:fontRef>
-        </p:style>
-        <p:txBody>
-          <a:bodyPr rtlCol="0" anchor="ctr"/>
-          <a:lstStyle/>
-          <a:p>
-            <a:pPr algn="ctr"/>
-            <a:endParaRPr/>
-          </a:p>
-        </p:txBody>
-      </p:sp>
-      <p:sp>
-        <p:nvSpPr>
-          <p:cNvPr id="15" name="TextBox 14"/>
-          <p:cNvSpPr txBox="1"/>
-          <p:nvPr/>
-        </p:nvSpPr>
-        <p:spPr>
-          <a:xfrm>
-            <a:off x="4696475" y="2292096"/>
-            <a:ext cx="2414076" cy="390144"/>
-          </a:xfrm>
-          <a:prstGeom prst="rect">
-            <a:avLst/>
-          </a:prstGeom>
-          <a:noFill/>
-        </p:spPr>
-        <p:txBody>
-          <a:bodyPr wrap="square" lIns="0" tIns="0" rIns="0" bIns="0" anchor="ctr">
-            <a:spAutoFit/>
-          </a:bodyPr>
-          <a:lstStyle/>
-          <a:p>
-            <a:pPr algn="l">
-              <a:lnSpc>
-                <a:spcPct val="105000"/>
-              </a:lnSpc>
-              <a:spcAft>
-                <a:spcPts val="0"/>
-              </a:spcAft>
-            </a:pPr>
-            <a:r>
-              <a:rPr sz="960" b="1" i="0">
-                <a:solidFill>
-                  <a:srgbClr val="FFFFFF"/>
-                </a:solidFill>
-                <a:latin typeface="Arial"/>
-              </a:rPr>
-              <a:t>Mid-market</a:t>
-            </a:r>
-          </a:p>
-        </p:txBody>
-      </p:sp>
-      <p:sp>
-        <p:nvSpPr>
-          <p:cNvPr id="16" name="Rectangle 15"/>
-          <p:cNvSpPr/>
-          <p:nvPr/>
-        </p:nvSpPr>
-        <p:spPr>
-          <a:xfrm>
-            <a:off x="7169075" y="2292096"/>
-            <a:ext cx="2121461" cy="390144"/>
-          </a:xfrm>
-          <a:prstGeom prst="rect">
-            <a:avLst/>
-          </a:prstGeom>
-          <a:solidFill>
-            <a:srgbClr val="314359"/>
-          </a:solidFill>
-          <a:ln>
-            <a:noFill/>
-          </a:ln>
-          <a:effectLst/>
-        </p:spPr>
-        <p:style>
-          <a:lnRef idx="1">
-            <a:schemeClr val="accent1"/>
-          </a:lnRef>
-          <a:fillRef idx="3">
-            <a:schemeClr val="accent1"/>
-          </a:fillRef>
-          <a:effectRef idx="2">
-            <a:schemeClr val="accent1"/>
-          </a:effectRef>
-          <a:fontRef idx="minor">
-            <a:schemeClr val="lt1"/>
-          </a:fontRef>
-        </p:style>
-        <p:txBody>
-          <a:bodyPr rtlCol="0" anchor="ctr"/>
-          <a:lstStyle/>
-          <a:p>
-            <a:pPr algn="ctr"/>
-            <a:endParaRPr/>
-          </a:p>
-        </p:txBody>
-      </p:sp>
-      <p:sp>
-        <p:nvSpPr>
-          <p:cNvPr id="17" name="TextBox 16"/>
-          <p:cNvSpPr txBox="1"/>
-          <p:nvPr/>
-        </p:nvSpPr>
-        <p:spPr>
-          <a:xfrm>
-            <a:off x="7256859" y="2292096"/>
-            <a:ext cx="1975153" cy="390144"/>
-          </a:xfrm>
-          <a:prstGeom prst="rect">
-            <a:avLst/>
-          </a:prstGeom>
-          <a:noFill/>
-        </p:spPr>
-        <p:txBody>
-          <a:bodyPr wrap="square" lIns="0" tIns="0" rIns="0" bIns="0" anchor="ctr">
-            <a:spAutoFit/>
-          </a:bodyPr>
-          <a:lstStyle/>
-          <a:p>
-            <a:pPr algn="l">
-              <a:lnSpc>
-                <a:spcPct val="105000"/>
-              </a:lnSpc>
-              <a:spcAft>
-                <a:spcPts val="0"/>
-              </a:spcAft>
-            </a:pPr>
-            <a:r>
-              <a:rPr sz="960" b="1" i="0">
-                <a:solidFill>
-                  <a:srgbClr val="FFFFFF"/>
-                </a:solidFill>
-                <a:latin typeface="Arial"/>
-              </a:rPr>
-              <a:t>Large-cap</a:t>
-            </a:r>
-          </a:p>
-        </p:txBody>
-      </p:sp>
-      <p:sp>
-        <p:nvSpPr>
-          <p:cNvPr id="18" name="Rectangle 17"/>
-          <p:cNvSpPr/>
-          <p:nvPr/>
-        </p:nvSpPr>
-        <p:spPr>
-          <a:xfrm>
-            <a:off x="402346" y="2682240"/>
-            <a:ext cx="1828845" cy="760780"/>
-          </a:xfrm>
-          <a:prstGeom prst="rect">
-            <a:avLst/>
-          </a:prstGeom>
-          <a:solidFill>
-            <a:srgbClr val="FFFFFF"/>
-          </a:solidFill>
-          <a:ln>
-            <a:noFill/>
-          </a:ln>
-          <a:effectLst/>
-        </p:spPr>
-        <p:style>
-          <a:lnRef idx="1">
-            <a:schemeClr val="accent1"/>
-          </a:lnRef>
-          <a:fillRef idx="3">
-            <a:schemeClr val="accent1"/>
-          </a:fillRef>
-          <a:effectRef idx="2">
-            <a:schemeClr val="accent1"/>
-          </a:effectRef>
-          <a:fontRef idx="minor">
-            <a:schemeClr val="lt1"/>
-          </a:fontRef>
-        </p:style>
-        <p:txBody>
-          <a:bodyPr rtlCol="0" anchor="ctr"/>
-          <a:lstStyle/>
-          <a:p>
-            <a:pPr algn="ctr"/>
-            <a:endParaRPr/>
-          </a:p>
-        </p:txBody>
-      </p:sp>
-      <p:sp>
-        <p:nvSpPr>
-          <p:cNvPr id="19" name="TextBox 18"/>
-          <p:cNvSpPr txBox="1"/>
-          <p:nvPr/>
-        </p:nvSpPr>
-        <p:spPr>
-          <a:xfrm>
-            <a:off x="490130" y="2682240"/>
-            <a:ext cx="1682538" cy="760780"/>
-          </a:xfrm>
-          <a:prstGeom prst="rect">
-            <a:avLst/>
-          </a:prstGeom>
-          <a:noFill/>
-        </p:spPr>
-        <p:txBody>
-          <a:bodyPr wrap="square" lIns="0" tIns="0" rIns="0" bIns="0" anchor="ctr">
-            <a:spAutoFit/>
-          </a:bodyPr>
-          <a:lstStyle/>
-          <a:p>
-            <a:pPr algn="l">
-              <a:lnSpc>
-                <a:spcPct val="105000"/>
-              </a:lnSpc>
-              <a:spcAft>
-                <a:spcPts val="0"/>
-              </a:spcAft>
-            </a:pPr>
-            <a:r>
-              <a:rPr sz="880" b="1" i="0">
-                <a:solidFill>
-                  <a:srgbClr val="314359"/>
-                </a:solidFill>
-                <a:latin typeface="Arial"/>
-              </a:rPr>
-              <a:t>Organisational depth</a:t>
-            </a:r>
-          </a:p>
-        </p:txBody>
-      </p:sp>
-      <p:sp>
-        <p:nvSpPr>
-          <p:cNvPr id="20" name="Rectangle 19"/>
-          <p:cNvSpPr/>
-          <p:nvPr/>
-        </p:nvSpPr>
-        <p:spPr>
-          <a:xfrm>
-            <a:off x="2231191" y="2682240"/>
-            <a:ext cx="2377499" cy="760780"/>
-          </a:xfrm>
-          <a:prstGeom prst="rect">
-            <a:avLst/>
-          </a:prstGeom>
-          <a:solidFill>
-            <a:srgbClr val="FFFFFF"/>
-          </a:solidFill>
-          <a:ln>
-            <a:noFill/>
-          </a:ln>
-          <a:effectLst/>
-        </p:spPr>
-        <p:style>
-          <a:lnRef idx="1">
-            <a:schemeClr val="accent1"/>
-          </a:lnRef>
-          <a:fillRef idx="3">
-            <a:schemeClr val="accent1"/>
-          </a:fillRef>
-          <a:effectRef idx="2">
-            <a:schemeClr val="accent1"/>
-          </a:effectRef>
-          <a:fontRef idx="minor">
-            <a:schemeClr val="lt1"/>
-          </a:fontRef>
-        </p:style>
-        <p:txBody>
-          <a:bodyPr rtlCol="0" anchor="ctr"/>
-          <a:lstStyle/>
-          <a:p>
-            <a:pPr algn="ctr"/>
-            <a:endParaRPr/>
-          </a:p>
-        </p:txBody>
-      </p:sp>
-      <p:sp>
-        <p:nvSpPr>
-          <p:cNvPr id="21" name="TextBox 20"/>
-          <p:cNvSpPr txBox="1"/>
-          <p:nvPr/>
-        </p:nvSpPr>
-        <p:spPr>
-          <a:xfrm>
-            <a:off x="2318976" y="2682240"/>
-            <a:ext cx="2231191" cy="760780"/>
-          </a:xfrm>
-          <a:prstGeom prst="rect">
-            <a:avLst/>
-          </a:prstGeom>
-          <a:noFill/>
-        </p:spPr>
-        <p:txBody>
-          <a:bodyPr wrap="square" lIns="0" tIns="0" rIns="0" bIns="0" anchor="ctr">
-            <a:spAutoFit/>
-          </a:bodyPr>
-          <a:lstStyle/>
-          <a:p>
-            <a:pPr algn="l">
-              <a:lnSpc>
-                <a:spcPct val="105000"/>
-              </a:lnSpc>
-              <a:spcAft>
-                <a:spcPts val="0"/>
-              </a:spcAft>
-            </a:pPr>
-            <a:r>
-              <a:rPr sz="880" b="0" i="0">
-                <a:solidFill>
-                  <a:srgbClr val="556A83"/>
-                </a:solidFill>
-                <a:latin typeface="Arial"/>
-              </a:rPr>
-              <a:t>Often too thin to support a capable team</a:t>
-            </a:r>
-          </a:p>
-        </p:txBody>
-      </p:sp>
-      <p:sp>
-        <p:nvSpPr>
-          <p:cNvPr id="22" name="Rectangle 21"/>
-          <p:cNvSpPr/>
-          <p:nvPr/>
-        </p:nvSpPr>
-        <p:spPr>
-          <a:xfrm>
-            <a:off x="4608691" y="2682240"/>
-            <a:ext cx="2560384" cy="760780"/>
-          </a:xfrm>
-          <a:prstGeom prst="rect">
-            <a:avLst/>
-          </a:prstGeom>
-          <a:solidFill>
-            <a:srgbClr val="F6F7F9"/>
-          </a:solidFill>
-          <a:ln>
-            <a:noFill/>
-          </a:ln>
-          <a:effectLst/>
-        </p:spPr>
-        <p:style>
-          <a:lnRef idx="1">
-            <a:schemeClr val="accent1"/>
-          </a:lnRef>
-          <a:fillRef idx="3">
-            <a:schemeClr val="accent1"/>
-          </a:fillRef>
-          <a:effectRef idx="2">
-            <a:schemeClr val="accent1"/>
-          </a:effectRef>
-          <a:fontRef idx="minor">
-            <a:schemeClr val="lt1"/>
-          </a:fontRef>
-        </p:style>
-        <p:txBody>
-          <a:bodyPr rtlCol="0" anchor="ctr"/>
-          <a:lstStyle/>
-          <a:p>
-            <a:pPr algn="ctr"/>
-            <a:endParaRPr/>
-          </a:p>
-        </p:txBody>
-      </p:sp>
-      <p:sp>
-        <p:nvSpPr>
-          <p:cNvPr id="23" name="TextBox 22"/>
-          <p:cNvSpPr txBox="1"/>
-          <p:nvPr/>
-        </p:nvSpPr>
-        <p:spPr>
-          <a:xfrm>
-            <a:off x="4696475" y="2682240"/>
-            <a:ext cx="2414076" cy="760780"/>
-          </a:xfrm>
-          <a:prstGeom prst="rect">
-            <a:avLst/>
-          </a:prstGeom>
-          <a:noFill/>
-        </p:spPr>
-        <p:txBody>
-          <a:bodyPr wrap="square" lIns="0" tIns="0" rIns="0" bIns="0" anchor="ctr">
-            <a:spAutoFit/>
-          </a:bodyPr>
-          <a:lstStyle/>
-          <a:p>
-            <a:pPr algn="l">
-              <a:lnSpc>
-                <a:spcPct val="105000"/>
-              </a:lnSpc>
-              <a:spcAft>
-                <a:spcPts val="0"/>
-              </a:spcAft>
-            </a:pPr>
-            <a:r>
-              <a:rPr sz="880" b="1" i="0">
-                <a:solidFill>
-                  <a:srgbClr val="314359"/>
-                </a:solidFill>
-                <a:latin typeface="Arial"/>
-              </a:rPr>
-              <a:t>Enough structure for a real management team and processes</a:t>
-            </a:r>
-          </a:p>
-        </p:txBody>
-      </p:sp>
-      <p:sp>
-        <p:nvSpPr>
-          <p:cNvPr id="24" name="Rectangle 23"/>
-          <p:cNvSpPr/>
-          <p:nvPr/>
-        </p:nvSpPr>
-        <p:spPr>
-          <a:xfrm>
-            <a:off x="7169075" y="2682240"/>
-            <a:ext cx="2121461" cy="760780"/>
-          </a:xfrm>
-          <a:prstGeom prst="rect">
-            <a:avLst/>
-          </a:prstGeom>
-          <a:solidFill>
-            <a:srgbClr val="FFFFFF"/>
-          </a:solidFill>
-          <a:ln>
-            <a:noFill/>
-          </a:ln>
-          <a:effectLst/>
-        </p:spPr>
-        <p:style>
-          <a:lnRef idx="1">
-            <a:schemeClr val="accent1"/>
-          </a:lnRef>
-          <a:fillRef idx="3">
-            <a:schemeClr val="accent1"/>
-          </a:fillRef>
-          <a:effectRef idx="2">
-            <a:schemeClr val="accent1"/>
-          </a:effectRef>
-          <a:fontRef idx="minor">
-            <a:schemeClr val="lt1"/>
-          </a:fontRef>
-        </p:style>
-        <p:txBody>
-          <a:bodyPr rtlCol="0" anchor="ctr"/>
-          <a:lstStyle/>
-          <a:p>
-            <a:pPr algn="ctr"/>
-            <a:endParaRPr/>
-          </a:p>
-        </p:txBody>
-      </p:sp>
-      <p:sp>
-        <p:nvSpPr>
-          <p:cNvPr id="25" name="TextBox 24"/>
-          <p:cNvSpPr txBox="1"/>
-          <p:nvPr/>
-        </p:nvSpPr>
-        <p:spPr>
-          <a:xfrm>
-            <a:off x="7256859" y="2682240"/>
-            <a:ext cx="1975153" cy="760780"/>
-          </a:xfrm>
-          <a:prstGeom prst="rect">
-            <a:avLst/>
-          </a:prstGeom>
-          <a:noFill/>
-        </p:spPr>
-        <p:txBody>
-          <a:bodyPr wrap="square" lIns="0" tIns="0" rIns="0" bIns="0" anchor="ctr">
-            <a:spAutoFit/>
-          </a:bodyPr>
-          <a:lstStyle/>
-          <a:p>
-            <a:pPr algn="l">
-              <a:lnSpc>
-                <a:spcPct val="105000"/>
-              </a:lnSpc>
-              <a:spcAft>
-                <a:spcPts val="0"/>
-              </a:spcAft>
-            </a:pPr>
-            <a:r>
-              <a:rPr sz="880" b="0" i="0">
-                <a:solidFill>
-                  <a:srgbClr val="556A83"/>
-                </a:solidFill>
-                <a:latin typeface="Arial"/>
-              </a:rPr>
-              <a:t>Deep, but layered and slow</a:t>
-            </a:r>
-          </a:p>
-        </p:txBody>
-      </p:sp>
-      <p:sp>
-        <p:nvSpPr>
-          <p:cNvPr id="26" name="Rectangle 25"/>
-          <p:cNvSpPr/>
-          <p:nvPr/>
-        </p:nvSpPr>
-        <p:spPr>
-          <a:xfrm>
-            <a:off x="402346" y="3443020"/>
-            <a:ext cx="1828845" cy="760780"/>
-          </a:xfrm>
-          <a:prstGeom prst="rect">
-            <a:avLst/>
-          </a:prstGeom>
-          <a:solidFill>
-            <a:srgbClr val="F6F7F9"/>
-          </a:solidFill>
-          <a:ln>
-            <a:noFill/>
-          </a:ln>
-          <a:effectLst/>
-        </p:spPr>
-        <p:style>
-          <a:lnRef idx="1">
-            <a:schemeClr val="accent1"/>
-          </a:lnRef>
-          <a:fillRef idx="3">
-            <a:schemeClr val="accent1"/>
-          </a:fillRef>
-          <a:effectRef idx="2">
-            <a:schemeClr val="accent1"/>
-          </a:effectRef>
-          <a:fontRef idx="minor">
-            <a:schemeClr val="lt1"/>
-          </a:fontRef>
-        </p:style>
-        <p:txBody>
-          <a:bodyPr rtlCol="0" anchor="ctr"/>
-          <a:lstStyle/>
-          <a:p>
-            <a:pPr algn="ctr"/>
-            <a:endParaRPr/>
-          </a:p>
-        </p:txBody>
-      </p:sp>
-      <p:sp>
-        <p:nvSpPr>
-          <p:cNvPr id="27" name="TextBox 26"/>
-          <p:cNvSpPr txBox="1"/>
-          <p:nvPr/>
-        </p:nvSpPr>
-        <p:spPr>
-          <a:xfrm>
-            <a:off x="490130" y="3443020"/>
-            <a:ext cx="1682538" cy="760780"/>
-          </a:xfrm>
-          <a:prstGeom prst="rect">
-            <a:avLst/>
-          </a:prstGeom>
-          <a:noFill/>
-        </p:spPr>
-        <p:txBody>
-          <a:bodyPr wrap="square" lIns="0" tIns="0" rIns="0" bIns="0" anchor="ctr">
-            <a:spAutoFit/>
-          </a:bodyPr>
-          <a:lstStyle/>
-          <a:p>
-            <a:pPr algn="l">
-              <a:lnSpc>
-                <a:spcPct val="105000"/>
-              </a:lnSpc>
-              <a:spcAft>
-                <a:spcPts val="0"/>
-              </a:spcAft>
-            </a:pPr>
-            <a:r>
-              <a:rPr sz="880" b="1" i="0">
-                <a:solidFill>
-                  <a:srgbClr val="314359"/>
-                </a:solidFill>
-                <a:latin typeface="Arial"/>
-              </a:rPr>
-              <a:t>Growth runway</a:t>
-            </a:r>
-          </a:p>
-        </p:txBody>
-      </p:sp>
-      <p:sp>
-        <p:nvSpPr>
-          <p:cNvPr id="28" name="Rectangle 27"/>
-          <p:cNvSpPr/>
-          <p:nvPr/>
-        </p:nvSpPr>
-        <p:spPr>
-          <a:xfrm>
-            <a:off x="2231191" y="3443020"/>
-            <a:ext cx="2377499" cy="760780"/>
-          </a:xfrm>
-          <a:prstGeom prst="rect">
-            <a:avLst/>
-          </a:prstGeom>
-          <a:solidFill>
-            <a:srgbClr val="F6F7F9"/>
-          </a:solidFill>
-          <a:ln>
-            <a:noFill/>
-          </a:ln>
-          <a:effectLst/>
-        </p:spPr>
-        <p:style>
-          <a:lnRef idx="1">
-            <a:schemeClr val="accent1"/>
-          </a:lnRef>
-          <a:fillRef idx="3">
-            <a:schemeClr val="accent1"/>
-          </a:fillRef>
-          <a:effectRef idx="2">
-            <a:schemeClr val="accent1"/>
-          </a:effectRef>
-          <a:fontRef idx="minor">
-            <a:schemeClr val="lt1"/>
-          </a:fontRef>
-        </p:style>
-        <p:txBody>
-          <a:bodyPr rtlCol="0" anchor="ctr"/>
-          <a:lstStyle/>
-          <a:p>
-            <a:pPr algn="ctr"/>
-            <a:endParaRPr/>
-          </a:p>
-        </p:txBody>
-      </p:sp>
-      <p:sp>
-        <p:nvSpPr>
-          <p:cNvPr id="29" name="TextBox 28"/>
-          <p:cNvSpPr txBox="1"/>
-          <p:nvPr/>
-        </p:nvSpPr>
-        <p:spPr>
-          <a:xfrm>
-            <a:off x="2318976" y="3443020"/>
-            <a:ext cx="2231191" cy="760780"/>
-          </a:xfrm>
-          <a:prstGeom prst="rect">
-            <a:avLst/>
-          </a:prstGeom>
-          <a:noFill/>
-        </p:spPr>
-        <p:txBody>
-          <a:bodyPr wrap="square" lIns="0" tIns="0" rIns="0" bIns="0" anchor="ctr">
-            <a:spAutoFit/>
-          </a:bodyPr>
-          <a:lstStyle/>
-          <a:p>
-            <a:pPr algn="l">
-              <a:lnSpc>
-                <a:spcPct val="105000"/>
-              </a:lnSpc>
-              <a:spcAft>
-                <a:spcPts val="0"/>
-              </a:spcAft>
-            </a:pPr>
-            <a:r>
-              <a:rPr sz="880" b="0" i="0">
-                <a:solidFill>
-                  <a:srgbClr val="556A83"/>
-                </a:solidFill>
-                <a:latin typeface="Arial"/>
-              </a:rPr>
-              <a:t>Long, but fragile and under-resourced</a:t>
-            </a:r>
-          </a:p>
-        </p:txBody>
-      </p:sp>
-      <p:sp>
-        <p:nvSpPr>
-          <p:cNvPr id="30" name="Rectangle 29"/>
-          <p:cNvSpPr/>
-          <p:nvPr/>
-        </p:nvSpPr>
-        <p:spPr>
-          <a:xfrm>
-            <a:off x="4608691" y="3443020"/>
-            <a:ext cx="2560384" cy="760780"/>
-          </a:xfrm>
-          <a:prstGeom prst="rect">
-            <a:avLst/>
-          </a:prstGeom>
-          <a:solidFill>
-            <a:srgbClr val="E2E5E9"/>
-          </a:solidFill>
-          <a:ln>
-            <a:noFill/>
-          </a:ln>
-          <a:effectLst/>
-        </p:spPr>
-        <p:style>
-          <a:lnRef idx="1">
-            <a:schemeClr val="accent1"/>
-          </a:lnRef>
-          <a:fillRef idx="3">
-            <a:schemeClr val="accent1"/>
-          </a:fillRef>
-          <a:effectRef idx="2">
-            <a:schemeClr val="accent1"/>
-          </a:effectRef>
-          <a:fontRef idx="minor">
-            <a:schemeClr val="lt1"/>
-          </a:fontRef>
-        </p:style>
-        <p:txBody>
-          <a:bodyPr rtlCol="0" anchor="ctr"/>
-          <a:lstStyle/>
-          <a:p>
-            <a:pPr algn="ctr"/>
-            <a:endParaRPr/>
-          </a:p>
-        </p:txBody>
-      </p:sp>
-      <p:sp>
-        <p:nvSpPr>
-          <p:cNvPr id="31" name="TextBox 30"/>
-          <p:cNvSpPr txBox="1"/>
-          <p:nvPr/>
-        </p:nvSpPr>
-        <p:spPr>
-          <a:xfrm>
-            <a:off x="4696475" y="3443020"/>
-            <a:ext cx="2414076" cy="760780"/>
-          </a:xfrm>
-          <a:prstGeom prst="rect">
-            <a:avLst/>
-          </a:prstGeom>
-          <a:noFill/>
-        </p:spPr>
-        <p:txBody>
-          <a:bodyPr wrap="square" lIns="0" tIns="0" rIns="0" bIns="0" anchor="ctr">
-            <a:spAutoFit/>
-          </a:bodyPr>
-          <a:lstStyle/>
-          <a:p>
-            <a:pPr algn="l">
-              <a:lnSpc>
-                <a:spcPct val="105000"/>
-              </a:lnSpc>
-              <a:spcAft>
-                <a:spcPts val="0"/>
-              </a:spcAft>
-            </a:pPr>
-            <a:r>
-              <a:rPr sz="880" b="1" i="0">
-                <a:solidFill>
-                  <a:srgbClr val="314359"/>
-                </a:solidFill>
-                <a:latin typeface="Arial"/>
-              </a:rPr>
-              <a:t>Still long — small enough to compound for years</a:t>
-            </a:r>
-          </a:p>
-        </p:txBody>
-      </p:sp>
-      <p:sp>
-        <p:nvSpPr>
-          <p:cNvPr id="32" name="Rectangle 31"/>
-          <p:cNvSpPr/>
-          <p:nvPr/>
-        </p:nvSpPr>
-        <p:spPr>
-          <a:xfrm>
-            <a:off x="7169075" y="3443020"/>
-            <a:ext cx="2121461" cy="760780"/>
-          </a:xfrm>
-          <a:prstGeom prst="rect">
-            <a:avLst/>
-          </a:prstGeom>
-          <a:solidFill>
-            <a:srgbClr val="F6F7F9"/>
-          </a:solidFill>
-          <a:ln>
-            <a:noFill/>
-          </a:ln>
-          <a:effectLst/>
-        </p:spPr>
-        <p:style>
-          <a:lnRef idx="1">
-            <a:schemeClr val="accent1"/>
-          </a:lnRef>
-          <a:fillRef idx="3">
-            <a:schemeClr val="accent1"/>
-          </a:fillRef>
-          <a:effectRef idx="2">
-            <a:schemeClr val="accent1"/>
-          </a:effectRef>
-          <a:fontRef idx="minor">
-            <a:schemeClr val="lt1"/>
-          </a:fontRef>
-        </p:style>
-        <p:txBody>
-          <a:bodyPr rtlCol="0" anchor="ctr"/>
-          <a:lstStyle/>
-          <a:p>
-            <a:pPr algn="ctr"/>
-            <a:endParaRPr/>
-          </a:p>
-        </p:txBody>
-      </p:sp>
-      <p:sp>
-        <p:nvSpPr>
-          <p:cNvPr id="33" name="TextBox 32"/>
-          <p:cNvSpPr txBox="1"/>
-          <p:nvPr/>
-        </p:nvSpPr>
-        <p:spPr>
-          <a:xfrm>
-            <a:off x="7256859" y="3443020"/>
-            <a:ext cx="1975153" cy="760780"/>
-          </a:xfrm>
-          <a:prstGeom prst="rect">
-            <a:avLst/>
-          </a:prstGeom>
-          <a:noFill/>
-        </p:spPr>
-        <p:txBody>
-          <a:bodyPr wrap="square" lIns="0" tIns="0" rIns="0" bIns="0" anchor="ctr">
-            <a:spAutoFit/>
-          </a:bodyPr>
-          <a:lstStyle/>
-          <a:p>
-            <a:pPr algn="l">
-              <a:lnSpc>
-                <a:spcPct val="105000"/>
-              </a:lnSpc>
-              <a:spcAft>
-                <a:spcPts val="0"/>
-              </a:spcAft>
-            </a:pPr>
-            <a:r>
-              <a:rPr sz="880" b="0" i="0">
-                <a:solidFill>
-                  <a:srgbClr val="556A83"/>
-                </a:solidFill>
-                <a:latin typeface="Arial"/>
-              </a:rPr>
-              <a:t>Largely played out; growth is incremental</a:t>
-            </a:r>
-          </a:p>
-        </p:txBody>
-      </p:sp>
-      <p:sp>
-        <p:nvSpPr>
-          <p:cNvPr id="34" name="Rectangle 33"/>
-          <p:cNvSpPr/>
-          <p:nvPr/>
-        </p:nvSpPr>
-        <p:spPr>
-          <a:xfrm>
-            <a:off x="402346" y="4203801"/>
-            <a:ext cx="1828845" cy="760780"/>
-          </a:xfrm>
-          <a:prstGeom prst="rect">
-            <a:avLst/>
-          </a:prstGeom>
-          <a:solidFill>
-            <a:srgbClr val="FFFFFF"/>
-          </a:solidFill>
-          <a:ln>
-            <a:noFill/>
-          </a:ln>
-          <a:effectLst/>
-        </p:spPr>
-        <p:style>
-          <a:lnRef idx="1">
-            <a:schemeClr val="accent1"/>
-          </a:lnRef>
-          <a:fillRef idx="3">
-            <a:schemeClr val="accent1"/>
-          </a:fillRef>
-          <a:effectRef idx="2">
-            <a:schemeClr val="accent1"/>
-          </a:effectRef>
-          <a:fontRef idx="minor">
-            <a:schemeClr val="lt1"/>
-          </a:fontRef>
-        </p:style>
-        <p:txBody>
-          <a:bodyPr rtlCol="0" anchor="ctr"/>
-          <a:lstStyle/>
-          <a:p>
-            <a:pPr algn="ctr"/>
-            <a:endParaRPr/>
-          </a:p>
-        </p:txBody>
-      </p:sp>
-      <p:sp>
-        <p:nvSpPr>
-          <p:cNvPr id="35" name="TextBox 34"/>
-          <p:cNvSpPr txBox="1"/>
-          <p:nvPr/>
-        </p:nvSpPr>
-        <p:spPr>
-          <a:xfrm>
-            <a:off x="490130" y="4203801"/>
-            <a:ext cx="1682538" cy="760780"/>
-          </a:xfrm>
-          <a:prstGeom prst="rect">
-            <a:avLst/>
-          </a:prstGeom>
-          <a:noFill/>
-        </p:spPr>
-        <p:txBody>
-          <a:bodyPr wrap="square" lIns="0" tIns="0" rIns="0" bIns="0" anchor="ctr">
-            <a:spAutoFit/>
-          </a:bodyPr>
-          <a:lstStyle/>
-          <a:p>
-            <a:pPr algn="l">
-              <a:lnSpc>
-                <a:spcPct val="105000"/>
-              </a:lnSpc>
-              <a:spcAft>
-                <a:spcPts val="0"/>
-              </a:spcAft>
-            </a:pPr>
-            <a:r>
-              <a:rPr sz="880" b="1" i="0">
-                <a:solidFill>
-                  <a:srgbClr val="314359"/>
-                </a:solidFill>
-                <a:latin typeface="Arial"/>
-              </a:rPr>
-              <a:t>Speed of change</a:t>
-            </a:r>
-          </a:p>
-        </p:txBody>
-      </p:sp>
-      <p:sp>
-        <p:nvSpPr>
-          <p:cNvPr id="36" name="Rectangle 35"/>
-          <p:cNvSpPr/>
-          <p:nvPr/>
-        </p:nvSpPr>
-        <p:spPr>
-          <a:xfrm>
-            <a:off x="2231191" y="4203801"/>
-            <a:ext cx="2377499" cy="760780"/>
-          </a:xfrm>
-          <a:prstGeom prst="rect">
-            <a:avLst/>
-          </a:prstGeom>
-          <a:solidFill>
-            <a:srgbClr val="FFFFFF"/>
-          </a:solidFill>
-          <a:ln>
-            <a:noFill/>
-          </a:ln>
-          <a:effectLst/>
-        </p:spPr>
-        <p:style>
-          <a:lnRef idx="1">
-            <a:schemeClr val="accent1"/>
-          </a:lnRef>
-          <a:fillRef idx="3">
-            <a:schemeClr val="accent1"/>
-          </a:fillRef>
-          <a:effectRef idx="2">
-            <a:schemeClr val="accent1"/>
-          </a:effectRef>
-          <a:fontRef idx="minor">
-            <a:schemeClr val="lt1"/>
-          </a:fontRef>
-        </p:style>
-        <p:txBody>
-          <a:bodyPr rtlCol="0" anchor="ctr"/>
-          <a:lstStyle/>
-          <a:p>
-            <a:pPr algn="ctr"/>
-            <a:endParaRPr/>
-          </a:p>
-        </p:txBody>
-      </p:sp>
-      <p:sp>
-        <p:nvSpPr>
-          <p:cNvPr id="37" name="TextBox 36"/>
-          <p:cNvSpPr txBox="1"/>
-          <p:nvPr/>
-        </p:nvSpPr>
-        <p:spPr>
-          <a:xfrm>
-            <a:off x="2318976" y="4203801"/>
-            <a:ext cx="2231191" cy="760780"/>
-          </a:xfrm>
-          <a:prstGeom prst="rect">
-            <a:avLst/>
-          </a:prstGeom>
-          <a:noFill/>
-        </p:spPr>
-        <p:txBody>
-          <a:bodyPr wrap="square" lIns="0" tIns="0" rIns="0" bIns="0" anchor="ctr">
-            <a:spAutoFit/>
-          </a:bodyPr>
-          <a:lstStyle/>
-          <a:p>
-            <a:pPr algn="l">
-              <a:lnSpc>
-                <a:spcPct val="105000"/>
-              </a:lnSpc>
-              <a:spcAft>
-                <a:spcPts val="0"/>
-              </a:spcAft>
-            </a:pPr>
-            <a:r>
-              <a:rPr sz="880" b="0" i="0">
-                <a:solidFill>
-                  <a:srgbClr val="556A83"/>
-                </a:solidFill>
-                <a:latin typeface="Arial"/>
-              </a:rPr>
-              <a:t>Fast, but limited resources to execute</a:t>
-            </a:r>
-          </a:p>
-        </p:txBody>
-      </p:sp>
-      <p:sp>
-        <p:nvSpPr>
-          <p:cNvPr id="38" name="Rectangle 37"/>
-          <p:cNvSpPr/>
-          <p:nvPr/>
-        </p:nvSpPr>
-        <p:spPr>
-          <a:xfrm>
-            <a:off x="4608691" y="4203801"/>
-            <a:ext cx="2560384" cy="760780"/>
-          </a:xfrm>
-          <a:prstGeom prst="rect">
-            <a:avLst/>
-          </a:prstGeom>
-          <a:solidFill>
-            <a:srgbClr val="F6F7F9"/>
-          </a:solidFill>
-          <a:ln>
-            <a:noFill/>
-          </a:ln>
-          <a:effectLst/>
-        </p:spPr>
-        <p:style>
-          <a:lnRef idx="1">
-            <a:schemeClr val="accent1"/>
-          </a:lnRef>
-          <a:fillRef idx="3">
-            <a:schemeClr val="accent1"/>
-          </a:fillRef>
-          <a:effectRef idx="2">
-            <a:schemeClr val="accent1"/>
-          </a:effectRef>
-          <a:fontRef idx="minor">
-            <a:schemeClr val="lt1"/>
-          </a:fontRef>
-        </p:style>
-        <p:txBody>
-          <a:bodyPr rtlCol="0" anchor="ctr"/>
-          <a:lstStyle/>
-          <a:p>
-            <a:pPr algn="ctr"/>
-            <a:endParaRPr/>
-          </a:p>
-        </p:txBody>
-      </p:sp>
-      <p:sp>
-        <p:nvSpPr>
-          <p:cNvPr id="39" name="TextBox 38"/>
-          <p:cNvSpPr txBox="1"/>
-          <p:nvPr/>
-        </p:nvSpPr>
-        <p:spPr>
-          <a:xfrm>
-            <a:off x="4696475" y="4203801"/>
-            <a:ext cx="2414076" cy="760780"/>
-          </a:xfrm>
-          <a:prstGeom prst="rect">
-            <a:avLst/>
-          </a:prstGeom>
-          <a:noFill/>
-        </p:spPr>
-        <p:txBody>
-          <a:bodyPr wrap="square" lIns="0" tIns="0" rIns="0" bIns="0" anchor="ctr">
-            <a:spAutoFit/>
-          </a:bodyPr>
-          <a:lstStyle/>
-          <a:p>
-            <a:pPr algn="l">
-              <a:lnSpc>
-                <a:spcPct val="105000"/>
-              </a:lnSpc>
-              <a:spcAft>
-                <a:spcPts val="0"/>
-              </a:spcAft>
-            </a:pPr>
-            <a:r>
-              <a:rPr sz="880" b="1" i="0">
-                <a:solidFill>
-                  <a:srgbClr val="314359"/>
-                </a:solidFill>
-                <a:latin typeface="Arial"/>
-              </a:rPr>
-              <a:t>Operational change lands within ~1.5 years</a:t>
-            </a:r>
-          </a:p>
-        </p:txBody>
-      </p:sp>
-      <p:sp>
-        <p:nvSpPr>
-          <p:cNvPr id="40" name="Rectangle 39"/>
-          <p:cNvSpPr/>
-          <p:nvPr/>
-        </p:nvSpPr>
-        <p:spPr>
-          <a:xfrm>
-            <a:off x="7169075" y="4203801"/>
-            <a:ext cx="2121461" cy="760780"/>
-          </a:xfrm>
-          <a:prstGeom prst="rect">
-            <a:avLst/>
-          </a:prstGeom>
-          <a:solidFill>
-            <a:srgbClr val="FFFFFF"/>
-          </a:solidFill>
-          <a:ln>
-            <a:noFill/>
-          </a:ln>
-          <a:effectLst/>
-        </p:spPr>
-        <p:style>
-          <a:lnRef idx="1">
-            <a:schemeClr val="accent1"/>
-          </a:lnRef>
-          <a:fillRef idx="3">
-            <a:schemeClr val="accent1"/>
-          </a:fillRef>
-          <a:effectRef idx="2">
-            <a:schemeClr val="accent1"/>
-          </a:effectRef>
-          <a:fontRef idx="minor">
-            <a:schemeClr val="lt1"/>
-          </a:fontRef>
-        </p:style>
-        <p:txBody>
-          <a:bodyPr rtlCol="0" anchor="ctr"/>
-          <a:lstStyle/>
-          <a:p>
-            <a:pPr algn="ctr"/>
-            <a:endParaRPr/>
-          </a:p>
-        </p:txBody>
-      </p:sp>
-      <p:sp>
-        <p:nvSpPr>
-          <p:cNvPr id="41" name="TextBox 40"/>
-          <p:cNvSpPr txBox="1"/>
-          <p:nvPr/>
-        </p:nvSpPr>
-        <p:spPr>
-          <a:xfrm>
-            <a:off x="7256859" y="4203801"/>
-            <a:ext cx="1975153" cy="760780"/>
-          </a:xfrm>
-          <a:prstGeom prst="rect">
-            <a:avLst/>
-          </a:prstGeom>
-          <a:noFill/>
-        </p:spPr>
-        <p:txBody>
-          <a:bodyPr wrap="square" lIns="0" tIns="0" rIns="0" bIns="0" anchor="ctr">
-            <a:spAutoFit/>
-          </a:bodyPr>
-          <a:lstStyle/>
-          <a:p>
-            <a:pPr algn="l">
-              <a:lnSpc>
-                <a:spcPct val="105000"/>
-              </a:lnSpc>
-              <a:spcAft>
-                <a:spcPts val="0"/>
-              </a:spcAft>
-            </a:pPr>
-            <a:r>
-              <a:rPr sz="880" b="0" i="0">
-                <a:solidFill>
-                  <a:srgbClr val="556A83"/>
-                </a:solidFill>
-                <a:latin typeface="Arial"/>
-              </a:rPr>
-              <a:t>Years to turn; entrenched complexity</a:t>
-            </a:r>
-          </a:p>
-        </p:txBody>
-      </p:sp>
-      <p:sp>
-        <p:nvSpPr>
-          <p:cNvPr id="42" name="Rectangle 41"/>
-          <p:cNvSpPr/>
-          <p:nvPr/>
-        </p:nvSpPr>
-        <p:spPr>
-          <a:xfrm>
-            <a:off x="402346" y="4964582"/>
-            <a:ext cx="1828845" cy="760780"/>
-          </a:xfrm>
-          <a:prstGeom prst="rect">
-            <a:avLst/>
-          </a:prstGeom>
-          <a:solidFill>
-            <a:srgbClr val="F6F7F9"/>
-          </a:solidFill>
-          <a:ln>
-            <a:noFill/>
-          </a:ln>
-          <a:effectLst/>
-        </p:spPr>
-        <p:style>
-          <a:lnRef idx="1">
-            <a:schemeClr val="accent1"/>
-          </a:lnRef>
-          <a:fillRef idx="3">
-            <a:schemeClr val="accent1"/>
-          </a:fillRef>
-          <a:effectRef idx="2">
-            <a:schemeClr val="accent1"/>
-          </a:effectRef>
-          <a:fontRef idx="minor">
-            <a:schemeClr val="lt1"/>
-          </a:fontRef>
-        </p:style>
-        <p:txBody>
-          <a:bodyPr rtlCol="0" anchor="ctr"/>
-          <a:lstStyle/>
-          <a:p>
-            <a:pPr algn="ctr"/>
-            <a:endParaRPr/>
-          </a:p>
-        </p:txBody>
-      </p:sp>
-      <p:sp>
-        <p:nvSpPr>
-          <p:cNvPr id="43" name="TextBox 42"/>
-          <p:cNvSpPr txBox="1"/>
-          <p:nvPr/>
-        </p:nvSpPr>
-        <p:spPr>
-          <a:xfrm>
-            <a:off x="490130" y="4964582"/>
-            <a:ext cx="1682538" cy="760780"/>
-          </a:xfrm>
-          <a:prstGeom prst="rect">
-            <a:avLst/>
-          </a:prstGeom>
-          <a:noFill/>
-        </p:spPr>
-        <p:txBody>
-          <a:bodyPr wrap="square" lIns="0" tIns="0" rIns="0" bIns="0" anchor="ctr">
-            <a:spAutoFit/>
-          </a:bodyPr>
-          <a:lstStyle/>
-          <a:p>
-            <a:pPr algn="l">
-              <a:lnSpc>
-                <a:spcPct val="105000"/>
-              </a:lnSpc>
-              <a:spcAft>
-                <a:spcPts val="0"/>
-              </a:spcAft>
-            </a:pPr>
-            <a:r>
-              <a:rPr sz="880" b="1" i="0">
-                <a:solidFill>
-                  <a:srgbClr val="314359"/>
-                </a:solidFill>
-                <a:latin typeface="Arial"/>
-              </a:rPr>
-              <a:t>Owner influence</a:t>
-            </a:r>
-          </a:p>
-        </p:txBody>
-      </p:sp>
-      <p:sp>
-        <p:nvSpPr>
-          <p:cNvPr id="44" name="Rectangle 43"/>
-          <p:cNvSpPr/>
-          <p:nvPr/>
-        </p:nvSpPr>
-        <p:spPr>
-          <a:xfrm>
-            <a:off x="2231191" y="4964582"/>
-            <a:ext cx="2377499" cy="760780"/>
-          </a:xfrm>
-          <a:prstGeom prst="rect">
-            <a:avLst/>
-          </a:prstGeom>
-          <a:solidFill>
-            <a:srgbClr val="F6F7F9"/>
-          </a:solidFill>
-          <a:ln>
-            <a:noFill/>
-          </a:ln>
-          <a:effectLst/>
-        </p:spPr>
-        <p:style>
-          <a:lnRef idx="1">
-            <a:schemeClr val="accent1"/>
-          </a:lnRef>
-          <a:fillRef idx="3">
-            <a:schemeClr val="accent1"/>
-          </a:fillRef>
-          <a:effectRef idx="2">
-            <a:schemeClr val="accent1"/>
-          </a:effectRef>
-          <a:fontRef idx="minor">
-            <a:schemeClr val="lt1"/>
-          </a:fontRef>
-        </p:style>
-        <p:txBody>
-          <a:bodyPr rtlCol="0" anchor="ctr"/>
-          <a:lstStyle/>
-          <a:p>
-            <a:pPr algn="ctr"/>
-            <a:endParaRPr/>
-          </a:p>
-        </p:txBody>
-      </p:sp>
-      <p:sp>
-        <p:nvSpPr>
-          <p:cNvPr id="45" name="TextBox 44"/>
-          <p:cNvSpPr txBox="1"/>
-          <p:nvPr/>
-        </p:nvSpPr>
-        <p:spPr>
-          <a:xfrm>
-            <a:off x="2318976" y="4964582"/>
-            <a:ext cx="2231191" cy="760780"/>
-          </a:xfrm>
-          <a:prstGeom prst="rect">
-            <a:avLst/>
-          </a:prstGeom>
-          <a:noFill/>
-        </p:spPr>
-        <p:txBody>
-          <a:bodyPr wrap="square" lIns="0" tIns="0" rIns="0" bIns="0" anchor="ctr">
-            <a:spAutoFit/>
-          </a:bodyPr>
-          <a:lstStyle/>
-          <a:p>
-            <a:pPr algn="l">
-              <a:lnSpc>
-                <a:spcPct val="105000"/>
-              </a:lnSpc>
-              <a:spcAft>
-                <a:spcPts val="0"/>
-              </a:spcAft>
-            </a:pPr>
-            <a:r>
-              <a:rPr sz="880" b="0" i="0">
-                <a:solidFill>
-                  <a:srgbClr val="556A83"/>
-                </a:solidFill>
-                <a:latin typeface="Arial"/>
-              </a:rPr>
-              <a:t>High, but little to work with</a:t>
-            </a:r>
-          </a:p>
-        </p:txBody>
-      </p:sp>
-      <p:sp>
-        <p:nvSpPr>
-          <p:cNvPr id="46" name="Rectangle 45"/>
-          <p:cNvSpPr/>
-          <p:nvPr/>
-        </p:nvSpPr>
-        <p:spPr>
-          <a:xfrm>
-            <a:off x="4608691" y="4964582"/>
-            <a:ext cx="2560384" cy="760780"/>
-          </a:xfrm>
-          <a:prstGeom prst="rect">
-            <a:avLst/>
-          </a:prstGeom>
-          <a:solidFill>
-            <a:srgbClr val="E2E5E9"/>
-          </a:solidFill>
-          <a:ln>
-            <a:noFill/>
-          </a:ln>
-          <a:effectLst/>
-        </p:spPr>
-        <p:style>
-          <a:lnRef idx="1">
-            <a:schemeClr val="accent1"/>
-          </a:lnRef>
-          <a:fillRef idx="3">
-            <a:schemeClr val="accent1"/>
-          </a:fillRef>
-          <a:effectRef idx="2">
-            <a:schemeClr val="accent1"/>
-          </a:effectRef>
-          <a:fontRef idx="minor">
-            <a:schemeClr val="lt1"/>
-          </a:fontRef>
-        </p:style>
-        <p:txBody>
-          <a:bodyPr rtlCol="0" anchor="ctr"/>
-          <a:lstStyle/>
-          <a:p>
-            <a:pPr algn="ctr"/>
-            <a:endParaRPr/>
-          </a:p>
-        </p:txBody>
-      </p:sp>
-      <p:sp>
-        <p:nvSpPr>
-          <p:cNvPr id="47" name="TextBox 46"/>
-          <p:cNvSpPr txBox="1"/>
-          <p:nvPr/>
-        </p:nvSpPr>
-        <p:spPr>
-          <a:xfrm>
-            <a:off x="4696475" y="4964582"/>
-            <a:ext cx="2414076" cy="760780"/>
-          </a:xfrm>
-          <a:prstGeom prst="rect">
-            <a:avLst/>
-          </a:prstGeom>
-          <a:noFill/>
-        </p:spPr>
-        <p:txBody>
-          <a:bodyPr wrap="square" lIns="0" tIns="0" rIns="0" bIns="0" anchor="ctr">
-            <a:spAutoFit/>
-          </a:bodyPr>
-          <a:lstStyle/>
-          <a:p>
-            <a:pPr algn="l">
-              <a:lnSpc>
-                <a:spcPct val="105000"/>
-              </a:lnSpc>
-              <a:spcAft>
-                <a:spcPts val="0"/>
-              </a:spcAft>
-            </a:pPr>
-            <a:r>
-              <a:rPr sz="880" b="1" i="0">
-                <a:solidFill>
-                  <a:srgbClr val="314359"/>
-                </a:solidFill>
-                <a:latin typeface="Arial"/>
-              </a:rPr>
-              <a:t>A board seat genuinely moves the outcome</a:t>
-            </a:r>
-          </a:p>
-        </p:txBody>
-      </p:sp>
-      <p:sp>
-        <p:nvSpPr>
-          <p:cNvPr id="48" name="Rectangle 47"/>
-          <p:cNvSpPr/>
-          <p:nvPr/>
-        </p:nvSpPr>
-        <p:spPr>
-          <a:xfrm>
-            <a:off x="7169075" y="4964582"/>
-            <a:ext cx="2121461" cy="760780"/>
-          </a:xfrm>
-          <a:prstGeom prst="rect">
-            <a:avLst/>
-          </a:prstGeom>
-          <a:solidFill>
-            <a:srgbClr val="F6F7F9"/>
-          </a:solidFill>
-          <a:ln>
-            <a:noFill/>
-          </a:ln>
-          <a:effectLst/>
-        </p:spPr>
-        <p:style>
-          <a:lnRef idx="1">
-            <a:schemeClr val="accent1"/>
-          </a:lnRef>
-          <a:fillRef idx="3">
-            <a:schemeClr val="accent1"/>
-          </a:fillRef>
-          <a:effectRef idx="2">
-            <a:schemeClr val="accent1"/>
-          </a:effectRef>
-          <a:fontRef idx="minor">
-            <a:schemeClr val="lt1"/>
-          </a:fontRef>
-        </p:style>
-        <p:txBody>
-          <a:bodyPr rtlCol="0" anchor="ctr"/>
-          <a:lstStyle/>
-          <a:p>
-            <a:pPr algn="ctr"/>
-            <a:endParaRPr/>
-          </a:p>
-        </p:txBody>
-      </p:sp>
-      <p:sp>
-        <p:nvSpPr>
-          <p:cNvPr id="49" name="TextBox 48"/>
-          <p:cNvSpPr txBox="1"/>
-          <p:nvPr/>
-        </p:nvSpPr>
-        <p:spPr>
-          <a:xfrm>
-            <a:off x="7256859" y="4964582"/>
-            <a:ext cx="1975153" cy="760780"/>
-          </a:xfrm>
-          <a:prstGeom prst="rect">
-            <a:avLst/>
-          </a:prstGeom>
-          <a:noFill/>
-        </p:spPr>
-        <p:txBody>
-          <a:bodyPr wrap="square" lIns="0" tIns="0" rIns="0" bIns="0" anchor="ctr">
-            <a:spAutoFit/>
-          </a:bodyPr>
-          <a:lstStyle/>
-          <a:p>
-            <a:pPr algn="l">
-              <a:lnSpc>
-                <a:spcPct val="105000"/>
-              </a:lnSpc>
-              <a:spcAft>
-                <a:spcPts val="0"/>
-              </a:spcAft>
-            </a:pPr>
-            <a:r>
-              <a:rPr sz="880" b="0" i="0">
-                <a:solidFill>
-                  <a:srgbClr val="556A83"/>
-                </a:solidFill>
-                <a:latin typeface="Arial"/>
-              </a:rPr>
-              <a:t>Diluted; one owner rarely shifts the agenda</a:t>
-            </a:r>
-          </a:p>
-        </p:txBody>
-      </p:sp>
-      <p:sp>
-        <p:nvSpPr>
-          <p:cNvPr id="50" name="TextBox 49"/>
-          <p:cNvSpPr txBox="1"/>
-          <p:nvPr/>
-        </p:nvSpPr>
-        <p:spPr>
-          <a:xfrm>
-            <a:off x="402346" y="5861913"/>
-            <a:ext cx="8924767" cy="409651"/>
-          </a:xfrm>
-          <a:prstGeom prst="rect">
-            <a:avLst/>
-          </a:prstGeom>
-          <a:noFill/>
-        </p:spPr>
-        <p:txBody>
-          <a:bodyPr wrap="square" lIns="0" tIns="0" rIns="0" bIns="0" anchor="t">
-            <a:spAutoFit/>
-          </a:bodyPr>
-          <a:lstStyle/>
-          <a:p>
-            <a:pPr algn="l">
-              <a:lnSpc>
-                <a:spcPct val="110000"/>
-              </a:lnSpc>
-              <a:spcAft>
-                <a:spcPts val="0"/>
-              </a:spcAft>
-            </a:pPr>
-            <a:r>
-              <a:rPr sz="1040" b="0" i="1">
-                <a:solidFill>
-                  <a:srgbClr val="314359"/>
-                </a:solidFill>
-                <a:latin typeface="Arial"/>
-              </a:rPr>
-              <a:t>Mid-market companies are run well enough to be worth owning, yet small enough that an engaged owner can still change — and grow — them.</a:t>
-            </a:r>
-          </a:p>
-        </p:txBody>
-      </p:sp>
-      <p:sp>
-        <p:nvSpPr>
-          <p:cNvPr id="51" name="TextBox 50"/>
-          <p:cNvSpPr txBox="1"/>
-          <p:nvPr/>
-        </p:nvSpPr>
-        <p:spPr>
-          <a:xfrm>
-            <a:off x="402346" y="6369100"/>
-            <a:ext cx="8924767" cy="585216"/>
-          </a:xfrm>
-          <a:prstGeom prst="rect">
-            <a:avLst/>
-          </a:prstGeom>
-          <a:noFill/>
-        </p:spPr>
-        <p:txBody>
-          <a:bodyPr wrap="square" lIns="0" tIns="0" rIns="0" bIns="0" anchor="t">
-            <a:spAutoFit/>
-          </a:bodyPr>
-          <a:lstStyle/>
-          <a:p>
-            <a:pPr algn="l">
-              <a:lnSpc>
-                <a:spcPct val="116000"/>
-              </a:lnSpc>
-              <a:spcAft>
-                <a:spcPts val="0"/>
-              </a:spcAft>
-            </a:pPr>
-            <a:r>
-              <a:rPr sz="760" b="0" i="0">
-                <a:solidFill>
-                  <a:srgbClr val="556A83"/>
-                </a:solidFill>
-                <a:latin typeface="Arial"/>
-              </a:rPr>
-              <a:t>And the opportunity set is deep and global: ~50,000 listed companies worldwide (World Federation of Exchanges, 2024); the investable MSCI ACWI IMI spans ~8,800 large-, mid- and small-cap names across 23 developed and 24 emerging markets — about 1,600 of them mid-caps (MSCI, 2024). Our €50m–€3bn target band, in markets with a stable legal system, is a large subset.</a:t>
-            </a:r>
-          </a:p>
-        </p:txBody>
-      </p:sp>
-    </p:spTree>
-  </p:cSld>
-  <p:clrMapOvr>
-    <a:masterClrMapping/>
-  </p:clrMapOvr>
-</p:sld>
-</file>
-
 <file path=ppt/slides/slide7.xml><?xml version="1.0" encoding="utf-8"?>
 <p:sld xmlns:a="http://schemas.openxmlformats.org/drawingml/2006/main" xmlns:r="http://schemas.openxmlformats.org/officeDocument/2006/relationships" xmlns:p="http://schemas.openxmlformats.org/presentationml/2006/main">
   <p:cSld>
@@ -28523,7 +26819,7 @@
                 </a:solidFill>
                 <a:latin typeface="Arial"/>
               </a:rPr>
-              <a:t>Strictly confidential          7</a:t>
+              <a:t>Strictly confidential          6</a:t>
             </a:r>
           </a:p>
         </p:txBody>
@@ -30396,7 +28692,7 @@
                 </a:solidFill>
                 <a:latin typeface="Arial"/>
               </a:rPr>
-              <a:t>Strictly confidential          8</a:t>
+              <a:t>Strictly confidential          7</a:t>
             </a:r>
           </a:p>
         </p:txBody>
@@ -31352,7 +29648,7 @@
                 </a:solidFill>
                 <a:latin typeface="Arial"/>
               </a:rPr>
-              <a:t>Strictly confidential          9</a:t>
+              <a:t>Strictly confidential          8</a:t>
             </a:r>
           </a:p>
         </p:txBody>
@@ -32030,7 +30326,7 @@
         <p:spPr>
           <a:xfrm>
             <a:off x="585230" y="5101132"/>
-            <a:ext cx="4023460" cy="1502054"/>
+            <a:ext cx="4023460" cy="811632"/>
           </a:xfrm>
           <a:prstGeom prst="rect">
             <a:avLst/>
@@ -32052,7 +30348,7 @@
               </a:spcAft>
             </a:pPr>
             <a:r>
-              <a:rPr sz="720" b="1">
+              <a:rPr sz="720" b="1" dirty="0">
                 <a:solidFill>
                   <a:srgbClr val="556A83"/>
                 </a:solidFill>
@@ -32061,7 +30357,7 @@
               <a:t>›  </a:t>
             </a:r>
             <a:r>
-              <a:rPr sz="720" b="1">
+              <a:rPr sz="720" b="1" dirty="0">
                 <a:solidFill>
                   <a:srgbClr val="314359"/>
                 </a:solidFill>
@@ -32070,7 +30366,7 @@
               <a:t>The mid-market sweet spot</a:t>
             </a:r>
             <a:r>
-              <a:rPr sz="720">
+              <a:rPr sz="720" dirty="0">
                 <a:solidFill>
                   <a:srgbClr val="0E1620"/>
                 </a:solidFill>
@@ -32089,7 +30385,7 @@
               </a:spcAft>
             </a:pPr>
             <a:r>
-              <a:rPr sz="720" b="1">
+              <a:rPr sz="720" b="1" dirty="0">
                 <a:solidFill>
                   <a:srgbClr val="556A83"/>
                 </a:solidFill>
@@ -32098,7 +30394,7 @@
               <a:t>›  </a:t>
             </a:r>
             <a:r>
-              <a:rPr sz="720" b="1">
+              <a:rPr sz="720" b="1" dirty="0">
                 <a:solidFill>
                   <a:srgbClr val="314359"/>
                 </a:solidFill>
@@ -32107,13 +30403,31 @@
               <a:t>Uncontested by the giants</a:t>
             </a:r>
             <a:r>
-              <a:rPr sz="720">
+              <a:rPr sz="720" dirty="0">
                 <a:solidFill>
                   <a:srgbClr val="0E1620"/>
                 </a:solidFill>
                 <a:latin typeface="Arial"/>
               </a:rPr>
-              <a:t> — megacap activists left it behind as they scaled: high return, low competition.</a:t>
+              <a:t> — mega</a:t>
+            </a:r>
+            <a:r>
+              <a:rPr lang="en-GB" sz="720" dirty="0">
+                <a:solidFill>
+                  <a:srgbClr val="0E1620"/>
+                </a:solidFill>
+                <a:latin typeface="Arial"/>
+              </a:rPr>
+              <a:t>-</a:t>
+            </a:r>
+            <a:r>
+              <a:rPr sz="720" dirty="0">
+                <a:solidFill>
+                  <a:srgbClr val="0E1620"/>
+                </a:solidFill>
+                <a:latin typeface="Arial"/>
+              </a:rPr>
+              <a:t>cap activists left it behind as they scaled: high return, low competition.</a:t>
             </a:r>
           </a:p>
           <a:p>
@@ -32126,7 +30440,7 @@
               </a:spcAft>
             </a:pPr>
             <a:r>
-              <a:rPr sz="720" b="1">
+              <a:rPr sz="720" b="1" dirty="0">
                 <a:solidFill>
                   <a:srgbClr val="556A83"/>
                 </a:solidFill>
@@ -32135,7 +30449,7 @@
               <a:t>›  </a:t>
             </a:r>
             <a:r>
-              <a:rPr sz="720" b="1">
+              <a:rPr sz="720" b="1" dirty="0">
                 <a:solidFill>
                   <a:srgbClr val="314359"/>
                 </a:solidFill>
@@ -32144,14 +30458,29 @@
               <a:t>Control by agreement</a:t>
             </a:r>
             <a:r>
-              <a:rPr sz="720">
+              <a:rPr sz="720" dirty="0">
                 <a:solidFill>
                   <a:srgbClr val="0E1620"/>
                 </a:solidFill>
                 <a:latin typeface="Arial"/>
               </a:rPr>
-              <a:t> — a Nordic nomination-committee model wins seats constructively, not by proxy war.</a:t>
-            </a:r>
+              <a:t> — a </a:t>
+            </a:r>
+            <a:r>
+              <a:rPr lang="en-GB" sz="720" dirty="0">
+                <a:solidFill>
+                  <a:srgbClr val="0E1620"/>
+                </a:solidFill>
+                <a:latin typeface="Arial"/>
+              </a:rPr>
+              <a:t>we invest after we have agreed on board engagement with the other shareholders</a:t>
+            </a:r>
+            <a:endParaRPr sz="720" dirty="0">
+              <a:solidFill>
+                <a:srgbClr val="0E1620"/>
+              </a:solidFill>
+              <a:latin typeface="Arial"/>
+            </a:endParaRPr>
           </a:p>
         </p:txBody>
       </p:sp>
@@ -32296,7 +30625,7 @@
         <p:spPr>
           <a:xfrm>
             <a:off x="5003721" y="5101132"/>
-            <a:ext cx="4023460" cy="1502054"/>
+            <a:ext cx="4023460" cy="743280"/>
           </a:xfrm>
           <a:prstGeom prst="rect">
             <a:avLst/>
@@ -32318,7 +30647,7 @@
               </a:spcAft>
             </a:pPr>
             <a:r>
-              <a:rPr sz="720" b="1">
+              <a:rPr sz="720" b="1" dirty="0">
                 <a:solidFill>
                   <a:srgbClr val="556A83"/>
                 </a:solidFill>
@@ -32327,16 +30656,51 @@
               <a:t>›  </a:t>
             </a:r>
             <a:r>
-              <a:rPr sz="720" b="1">
+              <a:rPr sz="720" b="1" dirty="0">
                 <a:solidFill>
                   <a:srgbClr val="314359"/>
                 </a:solidFill>
                 <a:latin typeface="Arial"/>
               </a:rPr>
-              <a:t>16.3% net p.a., capital grown 18×</a:t>
-            </a:r>
-            <a:r>
-              <a:rPr sz="720">
+              <a:t>1</a:t>
+            </a:r>
+            <a:r>
+              <a:rPr lang="en-GB" sz="720" b="1" dirty="0">
+                <a:solidFill>
+                  <a:srgbClr val="314359"/>
+                </a:solidFill>
+                <a:latin typeface="Arial"/>
+              </a:rPr>
+              <a:t>9</a:t>
+            </a:r>
+            <a:r>
+              <a:rPr sz="720" b="1" dirty="0">
+                <a:solidFill>
+                  <a:srgbClr val="314359"/>
+                </a:solidFill>
+                <a:latin typeface="Arial"/>
+              </a:rPr>
+              <a:t>% net p.a., capital grown 18×</a:t>
+            </a:r>
+            <a:r>
+              <a:rPr lang="en-GB" sz="720" b="1" dirty="0">
+                <a:solidFill>
+                  <a:srgbClr val="314359"/>
+                </a:solidFill>
+                <a:latin typeface="Arial"/>
+              </a:rPr>
+              <a:t>, </a:t>
+            </a:r>
+            <a:r>
+              <a:rPr lang="en-US" sz="700" b="1" dirty="0">
+                <a:solidFill>
+                  <a:srgbClr val="314359"/>
+                </a:solidFill>
+              </a:rPr>
+              <a:t>7% worst-entry record</a:t>
+            </a:r>
+            <a:r>
+              <a:rPr sz="720" dirty="0">
                 <a:solidFill>
                   <a:srgbClr val="0E1620"/>
                 </a:solidFill>
@@ -32355,7 +30719,7 @@
               </a:spcAft>
             </a:pPr>
             <a:r>
-              <a:rPr sz="720" b="1">
+              <a:rPr sz="720" b="1" dirty="0">
                 <a:solidFill>
                   <a:srgbClr val="556A83"/>
                 </a:solidFill>
@@ -32364,7 +30728,7 @@
               <a:t>›  </a:t>
             </a:r>
             <a:r>
-              <a:rPr sz="720" b="1">
+              <a:rPr sz="720" b="1" dirty="0">
                 <a:solidFill>
                   <a:srgbClr val="314359"/>
                 </a:solidFill>
@@ -32373,7 +30737,7 @@
               <a:t>92% deal-level hit rate (35 of 38)</a:t>
             </a:r>
             <a:r>
-              <a:rPr sz="720">
+              <a:rPr sz="720" dirty="0">
                 <a:solidFill>
                   <a:srgbClr val="0E1620"/>
                 </a:solidFill>
@@ -32392,7 +30756,7 @@
               </a:spcAft>
             </a:pPr>
             <a:r>
-              <a:rPr sz="720" b="1">
+              <a:rPr sz="720" b="1" dirty="0">
                 <a:solidFill>
                   <a:srgbClr val="556A83"/>
                 </a:solidFill>
@@ -32401,7 +30765,7 @@
               <a:t>›  </a:t>
             </a:r>
             <a:r>
-              <a:rPr sz="720" b="1">
+              <a:rPr sz="720" b="1" dirty="0">
                 <a:solidFill>
                   <a:srgbClr val="314359"/>
                 </a:solidFill>
@@ -32410,13 +30774,2450 @@
               <a:t>93% up / 43% down capture</a:t>
             </a:r>
             <a:r>
-              <a:rPr sz="720">
+              <a:rPr sz="720" dirty="0">
                 <a:solidFill>
                   <a:srgbClr val="0E1620"/>
                 </a:solidFill>
                 <a:latin typeface="Arial"/>
               </a:rPr>
               <a:t> — we harvest the inefficiency and protect the downside.</a:t>
+            </a:r>
+            <a:endParaRPr lang="en-GB" sz="720" dirty="0">
+              <a:solidFill>
+                <a:srgbClr val="0E1620"/>
+              </a:solidFill>
+              <a:latin typeface="Arial"/>
+            </a:endParaRPr>
+          </a:p>
+          <a:p>
+            <a:pPr marL="118875" indent="-118875">
+              <a:lnSpc>
+                <a:spcPct val="108000"/>
+              </a:lnSpc>
+              <a:spcAft>
+                <a:spcPts val="400"/>
+              </a:spcAft>
+            </a:pPr>
+            <a:endParaRPr sz="720" dirty="0">
+              <a:solidFill>
+                <a:srgbClr val="0E1620"/>
+              </a:solidFill>
+              <a:latin typeface="Arial"/>
+            </a:endParaRPr>
+          </a:p>
+        </p:txBody>
+      </p:sp>
+    </p:spTree>
+  </p:cSld>
+  <p:clrMapOvr>
+    <a:masterClrMapping/>
+  </p:clrMapOvr>
+</p:sld>
+</file>
+
+<file path=ppt/slides/slide900.xml><?xml version="1.0" encoding="utf-8"?>
+<p:sld xmlns:a="http://schemas.openxmlformats.org/drawingml/2006/main" xmlns:p="http://schemas.openxmlformats.org/presentationml/2006/main" xmlns:r="http://schemas.openxmlformats.org/officeDocument/2006/relationships">
+  <p:cSld>
+    <p:spTree>
+      <p:nvGrpSpPr>
+        <p:cNvPr id="1" name=""/>
+        <p:cNvGrpSpPr/>
+        <p:nvPr/>
+      </p:nvGrpSpPr>
+      <p:grpSpPr/>
+      <p:sp>
+        <p:nvSpPr>
+          <p:cNvPr id="2" name="Rectangle 1"/>
+          <p:cNvSpPr/>
+          <p:nvPr/>
+        </p:nvSpPr>
+        <p:spPr>
+          <a:xfrm>
+            <a:off x="0" y="0"/>
+            <a:ext cx="9753600" cy="7315200"/>
+          </a:xfrm>
+          <a:prstGeom prst="rect">
+            <a:avLst/>
+          </a:prstGeom>
+          <a:solidFill>
+            <a:srgbClr val="FFFFFF"/>
+          </a:solidFill>
+          <a:ln>
+            <a:noFill/>
+          </a:ln>
+          <a:effectLst/>
+        </p:spPr>
+        <p:style>
+          <a:lnRef idx="1">
+            <a:schemeClr val="accent1"/>
+          </a:lnRef>
+          <a:fillRef idx="3">
+            <a:schemeClr val="accent1"/>
+          </a:fillRef>
+          <a:effectRef idx="2">
+            <a:schemeClr val="accent1"/>
+          </a:effectRef>
+          <a:fontRef idx="minor">
+            <a:schemeClr val="lt1"/>
+          </a:fontRef>
+        </p:style>
+        <p:txBody>
+          <a:bodyPr rtlCol="0" anchor="ctr"/>
+          <a:lstStyle/>
+          <a:p>
+            <a:pPr algn="ctr"/>
+            <a:endParaRPr/>
+          </a:p>
+        </p:txBody>
+      </p:sp>
+      <p:pic>
+        <p:nvPicPr>
+          <p:cNvPr id="3" name="Picture 2" descr="mark_dark.png"/>
+          <p:cNvPicPr>
+            <a:picLocks noChangeAspect="1"/>
+          </p:cNvPicPr>
+          <p:nvPr/>
+        </p:nvPicPr>
+        <p:blipFill>
+          <a:blip r:embed="rId2"/>
+          <a:stretch>
+            <a:fillRect/>
+          </a:stretch>
+        </p:blipFill>
+        <p:spPr>
+          <a:xfrm>
+            <a:off x="402346" y="234086"/>
+            <a:ext cx="224012" cy="190199"/>
+          </a:xfrm>
+          <a:prstGeom prst="rect">
+            <a:avLst/>
+          </a:prstGeom>
+        </p:spPr>
+      </p:pic>
+      <p:sp>
+        <p:nvSpPr>
+          <p:cNvPr id="4" name="TextBox 3"/>
+          <p:cNvSpPr txBox="1"/>
+          <p:nvPr/>
+        </p:nvSpPr>
+        <p:spPr>
+          <a:xfrm>
+            <a:off x="716907" y="263347"/>
+            <a:ext cx="5120768" cy="292608"/>
+          </a:xfrm>
+          <a:prstGeom prst="rect">
+            <a:avLst/>
+          </a:prstGeom>
+          <a:noFill/>
+        </p:spPr>
+        <p:txBody>
+          <a:bodyPr wrap="square" lIns="0" tIns="0" rIns="0" bIns="0" anchor="t">
+            <a:spAutoFit/>
+          </a:bodyPr>
+          <a:lstStyle/>
+          <a:p>
+            <a:pPr algn="l">
+              <a:lnSpc>
+                <a:spcPct val="110000"/>
+              </a:lnSpc>
+              <a:spcAft>
+                <a:spcPts val="0"/>
+              </a:spcAft>
+            </a:pPr>
+            <a:r>
+              <a:rPr sz="880" b="0" i="0">
+                <a:solidFill>
+                  <a:srgbClr val="556A83"/>
+                </a:solidFill>
+                <a:latin typeface="Arial"/>
+              </a:rPr>
+              <a:t>Experience</a:t>
+            </a:r>
+          </a:p>
+        </p:txBody>
+      </p:sp>
+      <p:sp>
+        <p:nvSpPr>
+          <p:cNvPr id="5" name="Rectangle 4"/>
+          <p:cNvSpPr/>
+          <p:nvPr/>
+        </p:nvSpPr>
+        <p:spPr>
+          <a:xfrm>
+            <a:off x="0" y="604723"/>
+            <a:ext cx="9753600" cy="1414272"/>
+          </a:xfrm>
+          <a:prstGeom prst="rect">
+            <a:avLst/>
+          </a:prstGeom>
+          <a:solidFill>
+            <a:srgbClr val="F6F7F9"/>
+          </a:solidFill>
+          <a:ln>
+            <a:noFill/>
+          </a:ln>
+          <a:effectLst/>
+        </p:spPr>
+        <p:style>
+          <a:lnRef idx="1">
+            <a:schemeClr val="accent1"/>
+          </a:lnRef>
+          <a:fillRef idx="3">
+            <a:schemeClr val="accent1"/>
+          </a:fillRef>
+          <a:effectRef idx="2">
+            <a:schemeClr val="accent1"/>
+          </a:effectRef>
+          <a:fontRef idx="minor">
+            <a:schemeClr val="lt1"/>
+          </a:fontRef>
+        </p:style>
+        <p:txBody>
+          <a:bodyPr rtlCol="0" anchor="ctr"/>
+          <a:lstStyle/>
+          <a:p>
+            <a:pPr algn="ctr"/>
+            <a:endParaRPr/>
+          </a:p>
+        </p:txBody>
+      </p:sp>
+      <p:sp>
+        <p:nvSpPr>
+          <p:cNvPr id="6" name="TextBox 5"/>
+          <p:cNvSpPr txBox="1"/>
+          <p:nvPr/>
+        </p:nvSpPr>
+        <p:spPr>
+          <a:xfrm>
+            <a:off x="438922" y="721766"/>
+            <a:ext cx="8851613" cy="829056"/>
+          </a:xfrm>
+          <a:prstGeom prst="rect">
+            <a:avLst/>
+          </a:prstGeom>
+          <a:noFill/>
+        </p:spPr>
+        <p:txBody>
+          <a:bodyPr wrap="square" lIns="0" tIns="0" rIns="0" bIns="0" anchor="t">
+            <a:spAutoFit/>
+          </a:bodyPr>
+          <a:lstStyle/>
+          <a:p>
+            <a:pPr algn="l">
+              <a:lnSpc>
+                <a:spcPct val="110000"/>
+              </a:lnSpc>
+              <a:spcAft>
+                <a:spcPts val="200"/>
+              </a:spcAft>
+            </a:pPr>
+            <a:r>
+              <a:rPr sz="2400" b="0" i="0" spc="-90">
+                <a:solidFill>
+                  <a:srgbClr val="314359"/>
+                </a:solidFill>
+                <a:latin typeface="Times New Roman"/>
+              </a:rPr>
+              <a:t>The people behind the track record</a:t>
+            </a:r>
+          </a:p>
+        </p:txBody>
+      </p:sp>
+      <p:sp>
+        <p:nvSpPr>
+          <p:cNvPr id="7" name="TextBox 6"/>
+          <p:cNvSpPr txBox="1"/>
+          <p:nvPr/>
+        </p:nvSpPr>
+        <p:spPr>
+          <a:xfrm>
+            <a:off x="453553" y="1511808"/>
+            <a:ext cx="8705305" cy="487680"/>
+          </a:xfrm>
+          <a:prstGeom prst="rect">
+            <a:avLst/>
+          </a:prstGeom>
+          <a:noFill/>
+        </p:spPr>
+        <p:txBody>
+          <a:bodyPr wrap="square" lIns="0" tIns="0" rIns="0" bIns="0" anchor="t">
+            <a:spAutoFit/>
+          </a:bodyPr>
+          <a:lstStyle/>
+          <a:p>
+            <a:pPr algn="l">
+              <a:lnSpc>
+                <a:spcPct val="110000"/>
+              </a:lnSpc>
+              <a:spcAft>
+                <a:spcPts val="0"/>
+              </a:spcAft>
+            </a:pPr>
+            <a:r>
+              <a:rPr sz="1040" b="0" i="1">
+                <a:solidFill>
+                  <a:srgbClr val="556A83"/>
+                </a:solidFill>
+                <a:latin typeface="Arial"/>
+              </a:rPr>
+              <a:t>An integrated investment team — and an independent operations, finance and control function that safeguards investor capital.</a:t>
+            </a:r>
+          </a:p>
+        </p:txBody>
+      </p:sp>
+      <p:sp>
+        <p:nvSpPr>
+          <p:cNvPr id="8" name="TextBox 7"/>
+          <p:cNvSpPr txBox="1"/>
+          <p:nvPr/>
+        </p:nvSpPr>
+        <p:spPr>
+          <a:xfrm>
+            <a:off x="6583844" y="6876288"/>
+            <a:ext cx="2926153" cy="292608"/>
+          </a:xfrm>
+          <a:prstGeom prst="rect">
+            <a:avLst/>
+          </a:prstGeom>
+          <a:noFill/>
+        </p:spPr>
+        <p:txBody>
+          <a:bodyPr wrap="square" lIns="0" tIns="0" rIns="0" bIns="0" anchor="t">
+            <a:spAutoFit/>
+          </a:bodyPr>
+          <a:lstStyle/>
+          <a:p>
+            <a:pPr algn="r">
+              <a:lnSpc>
+                <a:spcPct val="110000"/>
+              </a:lnSpc>
+              <a:spcAft>
+                <a:spcPts val="0"/>
+              </a:spcAft>
+            </a:pPr>
+            <a:r>
+              <a:rPr sz="680" b="0" i="0">
+                <a:solidFill>
+                  <a:srgbClr val="556A83"/>
+                </a:solidFill>
+                <a:latin typeface="Arial"/>
+              </a:rPr>
+              <a:t>Strictly confidential          10</a:t>
+            </a:r>
+          </a:p>
+        </p:txBody>
+      </p:sp>
+      <p:sp>
+        <p:nvSpPr>
+          <p:cNvPr id="9" name="TextBox 8"/>
+          <p:cNvSpPr txBox="1"/>
+          <p:nvPr/>
+        </p:nvSpPr>
+        <p:spPr>
+          <a:xfrm>
+            <a:off x="438922" y="2126284"/>
+            <a:ext cx="5852306" cy="292608"/>
+          </a:xfrm>
+          <a:prstGeom prst="rect">
+            <a:avLst/>
+          </a:prstGeom>
+          <a:noFill/>
+        </p:spPr>
+        <p:txBody>
+          <a:bodyPr wrap="square" lIns="0" tIns="0" rIns="0" bIns="0" anchor="t">
+            <a:spAutoFit/>
+          </a:bodyPr>
+          <a:lstStyle/>
+          <a:p>
+            <a:pPr algn="l">
+              <a:lnSpc>
+                <a:spcPct val="110000"/>
+              </a:lnSpc>
+              <a:spcAft>
+                <a:spcPts val="0"/>
+              </a:spcAft>
+            </a:pPr>
+            <a:r>
+              <a:rPr sz="880" b="1" i="0">
+                <a:solidFill>
+                  <a:srgbClr val="314359"/>
+                </a:solidFill>
+                <a:latin typeface="Arial"/>
+              </a:rPr>
+              <a:t>INVESTMENT TEAM</a:t>
+            </a:r>
+          </a:p>
+        </p:txBody>
+      </p:sp>
+      <p:sp>
+        <p:nvSpPr>
+          <p:cNvPr id="10" name="Rectangle 9"/>
+          <p:cNvSpPr/>
+          <p:nvPr/>
+        </p:nvSpPr>
+        <p:spPr>
+          <a:xfrm>
+            <a:off x="438922" y="2438400"/>
+            <a:ext cx="1704484" cy="1463040"/>
+          </a:xfrm>
+          <a:prstGeom prst="rect">
+            <a:avLst/>
+          </a:prstGeom>
+          <a:solidFill>
+            <a:srgbClr val="F6F7F9"/>
+          </a:solidFill>
+          <a:ln>
+            <a:noFill/>
+          </a:ln>
+          <a:effectLst/>
+        </p:spPr>
+        <p:style>
+          <a:lnRef idx="1">
+            <a:schemeClr val="accent1"/>
+          </a:lnRef>
+          <a:fillRef idx="3">
+            <a:schemeClr val="accent1"/>
+          </a:fillRef>
+          <a:effectRef idx="2">
+            <a:schemeClr val="accent1"/>
+          </a:effectRef>
+          <a:fontRef idx="minor">
+            <a:schemeClr val="lt1"/>
+          </a:fontRef>
+        </p:style>
+        <p:txBody>
+          <a:bodyPr rtlCol="0" anchor="ctr"/>
+          <a:lstStyle/>
+          <a:p>
+            <a:pPr algn="ctr"/>
+            <a:endParaRPr/>
+          </a:p>
+        </p:txBody>
+      </p:sp>
+      <p:sp>
+        <p:nvSpPr>
+          <p:cNvPr id="11" name="Rectangle 10"/>
+          <p:cNvSpPr/>
+          <p:nvPr/>
+        </p:nvSpPr>
+        <p:spPr>
+          <a:xfrm>
+            <a:off x="438922" y="2438400"/>
+            <a:ext cx="43892" cy="1463040"/>
+          </a:xfrm>
+          <a:prstGeom prst="rect">
+            <a:avLst/>
+          </a:prstGeom>
+          <a:solidFill>
+            <a:srgbClr val="152130"/>
+          </a:solidFill>
+          <a:ln>
+            <a:noFill/>
+          </a:ln>
+          <a:effectLst/>
+        </p:spPr>
+        <p:style>
+          <a:lnRef idx="1">
+            <a:schemeClr val="accent1"/>
+          </a:lnRef>
+          <a:fillRef idx="3">
+            <a:schemeClr val="accent1"/>
+          </a:fillRef>
+          <a:effectRef idx="2">
+            <a:schemeClr val="accent1"/>
+          </a:effectRef>
+          <a:fontRef idx="minor">
+            <a:schemeClr val="lt1"/>
+          </a:fontRef>
+        </p:style>
+        <p:txBody>
+          <a:bodyPr rtlCol="0" anchor="ctr"/>
+          <a:lstStyle/>
+          <a:p>
+            <a:pPr algn="ctr"/>
+            <a:endParaRPr/>
+          </a:p>
+        </p:txBody>
+      </p:sp>
+      <p:sp>
+        <p:nvSpPr>
+          <p:cNvPr id="12" name="TextBox 11"/>
+          <p:cNvSpPr txBox="1"/>
+          <p:nvPr/>
+        </p:nvSpPr>
+        <p:spPr>
+          <a:xfrm>
+            <a:off x="585230" y="2565196"/>
+            <a:ext cx="1470391" cy="292608"/>
+          </a:xfrm>
+          <a:prstGeom prst="rect">
+            <a:avLst/>
+          </a:prstGeom>
+          <a:noFill/>
+        </p:spPr>
+        <p:txBody>
+          <a:bodyPr wrap="square" lIns="0" tIns="0" rIns="0" bIns="0" anchor="t">
+            <a:spAutoFit/>
+          </a:bodyPr>
+          <a:lstStyle/>
+          <a:p>
+            <a:pPr algn="l">
+              <a:lnSpc>
+                <a:spcPct val="110000"/>
+              </a:lnSpc>
+              <a:spcAft>
+                <a:spcPts val="0"/>
+              </a:spcAft>
+            </a:pPr>
+            <a:r>
+              <a:rPr sz="1000" b="1" i="0">
+                <a:solidFill>
+                  <a:srgbClr val="314359"/>
+                </a:solidFill>
+                <a:latin typeface="Times New Roman"/>
+              </a:rPr>
+              <a:t>Stefan Charette</a:t>
+            </a:r>
+          </a:p>
+        </p:txBody>
+      </p:sp>
+      <p:sp>
+        <p:nvSpPr>
+          <p:cNvPr id="13" name="TextBox 12"/>
+          <p:cNvSpPr txBox="1"/>
+          <p:nvPr/>
+        </p:nvSpPr>
+        <p:spPr>
+          <a:xfrm>
+            <a:off x="585230" y="2848051"/>
+            <a:ext cx="1470391" cy="234086"/>
+          </a:xfrm>
+          <a:prstGeom prst="rect">
+            <a:avLst/>
+          </a:prstGeom>
+          <a:noFill/>
+        </p:spPr>
+        <p:txBody>
+          <a:bodyPr wrap="square" lIns="0" tIns="0" rIns="0" bIns="0" anchor="t">
+            <a:spAutoFit/>
+          </a:bodyPr>
+          <a:lstStyle/>
+          <a:p>
+            <a:pPr algn="l">
+              <a:lnSpc>
+                <a:spcPct val="110000"/>
+              </a:lnSpc>
+              <a:spcAft>
+                <a:spcPts val="0"/>
+              </a:spcAft>
+            </a:pPr>
+            <a:r>
+              <a:rPr sz="680" b="1" i="0">
+                <a:solidFill>
+                  <a:srgbClr val="314359"/>
+                </a:solidFill>
+                <a:latin typeface="Arial"/>
+              </a:rPr>
+              <a:t>CIO &amp; PARTNER</a:t>
+            </a:r>
+          </a:p>
+        </p:txBody>
+      </p:sp>
+      <p:sp>
+        <p:nvSpPr>
+          <p:cNvPr id="14" name="TextBox 13"/>
+          <p:cNvSpPr txBox="1"/>
+          <p:nvPr/>
+        </p:nvSpPr>
+        <p:spPr>
+          <a:xfrm>
+            <a:off x="585230" y="3101644"/>
+            <a:ext cx="1455761" cy="682752"/>
+          </a:xfrm>
+          <a:prstGeom prst="rect">
+            <a:avLst/>
+          </a:prstGeom>
+          <a:noFill/>
+        </p:spPr>
+        <p:txBody>
+          <a:bodyPr wrap="square" lIns="0" tIns="0" rIns="0" bIns="0" anchor="t">
+            <a:spAutoFit/>
+          </a:bodyPr>
+          <a:lstStyle/>
+          <a:p>
+            <a:pPr algn="l">
+              <a:lnSpc>
+                <a:spcPct val="110000"/>
+              </a:lnSpc>
+              <a:spcAft>
+                <a:spcPts val="0"/>
+              </a:spcAft>
+            </a:pPr>
+            <a:r>
+              <a:rPr sz="720" b="0" i="0">
+                <a:solidFill>
+                  <a:srgbClr val="0E1620"/>
+                </a:solidFill>
+                <a:latin typeface="Arial"/>
+              </a:rPr>
+              <a:t>CEO/CIO of Custos, Investment AB Öresund and Creades; CEO of Brokk; investment banker at Lehman Brothers and Salomon Smith Barney.</a:t>
+            </a:r>
+          </a:p>
+        </p:txBody>
+      </p:sp>
+      <p:sp>
+        <p:nvSpPr>
+          <p:cNvPr id="15" name="Rectangle 14"/>
+          <p:cNvSpPr/>
+          <p:nvPr/>
+        </p:nvSpPr>
+        <p:spPr>
+          <a:xfrm>
+            <a:off x="2231191" y="2438400"/>
+            <a:ext cx="1704484" cy="1463040"/>
+          </a:xfrm>
+          <a:prstGeom prst="rect">
+            <a:avLst/>
+          </a:prstGeom>
+          <a:solidFill>
+            <a:srgbClr val="F6F7F9"/>
+          </a:solidFill>
+          <a:ln>
+            <a:noFill/>
+          </a:ln>
+          <a:effectLst/>
+        </p:spPr>
+        <p:style>
+          <a:lnRef idx="1">
+            <a:schemeClr val="accent1"/>
+          </a:lnRef>
+          <a:fillRef idx="3">
+            <a:schemeClr val="accent1"/>
+          </a:fillRef>
+          <a:effectRef idx="2">
+            <a:schemeClr val="accent1"/>
+          </a:effectRef>
+          <a:fontRef idx="minor">
+            <a:schemeClr val="lt1"/>
+          </a:fontRef>
+        </p:style>
+        <p:txBody>
+          <a:bodyPr rtlCol="0" anchor="ctr"/>
+          <a:lstStyle/>
+          <a:p>
+            <a:pPr algn="ctr"/>
+            <a:endParaRPr/>
+          </a:p>
+        </p:txBody>
+      </p:sp>
+      <p:sp>
+        <p:nvSpPr>
+          <p:cNvPr id="16" name="Rectangle 15"/>
+          <p:cNvSpPr/>
+          <p:nvPr/>
+        </p:nvSpPr>
+        <p:spPr>
+          <a:xfrm>
+            <a:off x="2231191" y="2438400"/>
+            <a:ext cx="43892" cy="1463040"/>
+          </a:xfrm>
+          <a:prstGeom prst="rect">
+            <a:avLst/>
+          </a:prstGeom>
+          <a:solidFill>
+            <a:srgbClr val="152130"/>
+          </a:solidFill>
+          <a:ln>
+            <a:noFill/>
+          </a:ln>
+          <a:effectLst/>
+        </p:spPr>
+        <p:style>
+          <a:lnRef idx="1">
+            <a:schemeClr val="accent1"/>
+          </a:lnRef>
+          <a:fillRef idx="3">
+            <a:schemeClr val="accent1"/>
+          </a:fillRef>
+          <a:effectRef idx="2">
+            <a:schemeClr val="accent1"/>
+          </a:effectRef>
+          <a:fontRef idx="minor">
+            <a:schemeClr val="lt1"/>
+          </a:fontRef>
+        </p:style>
+        <p:txBody>
+          <a:bodyPr rtlCol="0" anchor="ctr"/>
+          <a:lstStyle/>
+          <a:p>
+            <a:pPr algn="ctr"/>
+            <a:endParaRPr/>
+          </a:p>
+        </p:txBody>
+      </p:sp>
+      <p:sp>
+        <p:nvSpPr>
+          <p:cNvPr id="17" name="TextBox 16"/>
+          <p:cNvSpPr txBox="1"/>
+          <p:nvPr/>
+        </p:nvSpPr>
+        <p:spPr>
+          <a:xfrm>
+            <a:off x="2377499" y="2565196"/>
+            <a:ext cx="1470391" cy="292608"/>
+          </a:xfrm>
+          <a:prstGeom prst="rect">
+            <a:avLst/>
+          </a:prstGeom>
+          <a:noFill/>
+        </p:spPr>
+        <p:txBody>
+          <a:bodyPr wrap="square" lIns="0" tIns="0" rIns="0" bIns="0" anchor="t">
+            <a:spAutoFit/>
+          </a:bodyPr>
+          <a:lstStyle/>
+          <a:p>
+            <a:pPr algn="l">
+              <a:lnSpc>
+                <a:spcPct val="110000"/>
+              </a:lnSpc>
+              <a:spcAft>
+                <a:spcPts val="0"/>
+              </a:spcAft>
+            </a:pPr>
+            <a:r>
+              <a:rPr sz="1000" b="1" i="0">
+                <a:solidFill>
+                  <a:srgbClr val="314359"/>
+                </a:solidFill>
+                <a:latin typeface="Times New Roman"/>
+              </a:rPr>
+              <a:t>Kenth Eriksson</a:t>
+            </a:r>
+          </a:p>
+        </p:txBody>
+      </p:sp>
+      <p:sp>
+        <p:nvSpPr>
+          <p:cNvPr id="18" name="TextBox 17"/>
+          <p:cNvSpPr txBox="1"/>
+          <p:nvPr/>
+        </p:nvSpPr>
+        <p:spPr>
+          <a:xfrm>
+            <a:off x="2377499" y="2848051"/>
+            <a:ext cx="1470391" cy="234086"/>
+          </a:xfrm>
+          <a:prstGeom prst="rect">
+            <a:avLst/>
+          </a:prstGeom>
+          <a:noFill/>
+        </p:spPr>
+        <p:txBody>
+          <a:bodyPr wrap="square" lIns="0" tIns="0" rIns="0" bIns="0" anchor="t">
+            <a:spAutoFit/>
+          </a:bodyPr>
+          <a:lstStyle/>
+          <a:p>
+            <a:pPr algn="l">
+              <a:lnSpc>
+                <a:spcPct val="110000"/>
+              </a:lnSpc>
+              <a:spcAft>
+                <a:spcPts val="0"/>
+              </a:spcAft>
+            </a:pPr>
+            <a:r>
+              <a:rPr sz="680" b="1" i="0">
+                <a:solidFill>
+                  <a:srgbClr val="314359"/>
+                </a:solidFill>
+                <a:latin typeface="Arial"/>
+              </a:rPr>
+              <a:t>SENIOR PM &amp; PARTNER</a:t>
+            </a:r>
+          </a:p>
+        </p:txBody>
+      </p:sp>
+      <p:sp>
+        <p:nvSpPr>
+          <p:cNvPr id="19" name="TextBox 18"/>
+          <p:cNvSpPr txBox="1"/>
+          <p:nvPr/>
+        </p:nvSpPr>
+        <p:spPr>
+          <a:xfrm>
+            <a:off x="2377499" y="3101644"/>
+            <a:ext cx="1455761" cy="682752"/>
+          </a:xfrm>
+          <a:prstGeom prst="rect">
+            <a:avLst/>
+          </a:prstGeom>
+          <a:noFill/>
+        </p:spPr>
+        <p:txBody>
+          <a:bodyPr wrap="square" lIns="0" tIns="0" rIns="0" bIns="0" anchor="t">
+            <a:spAutoFit/>
+          </a:bodyPr>
+          <a:lstStyle/>
+          <a:p>
+            <a:pPr algn="l">
+              <a:lnSpc>
+                <a:spcPct val="110000"/>
+              </a:lnSpc>
+              <a:spcAft>
+                <a:spcPts val="0"/>
+              </a:spcAft>
+            </a:pPr>
+            <a:r>
+              <a:rPr sz="720" b="0" i="0">
+                <a:solidFill>
+                  <a:srgbClr val="0E1620"/>
+                </a:solidFill>
+                <a:latin typeface="Arial"/>
+              </a:rPr>
+              <a:t>Ex-CEO of Tradimus; Senior VP, Electrolux; tech owner-operator.</a:t>
+            </a:r>
+          </a:p>
+        </p:txBody>
+      </p:sp>
+      <p:sp>
+        <p:nvSpPr>
+          <p:cNvPr id="20" name="Rectangle 19"/>
+          <p:cNvSpPr/>
+          <p:nvPr/>
+        </p:nvSpPr>
+        <p:spPr>
+          <a:xfrm>
+            <a:off x="4023460" y="2438400"/>
+            <a:ext cx="1704484" cy="1463040"/>
+          </a:xfrm>
+          <a:prstGeom prst="rect">
+            <a:avLst/>
+          </a:prstGeom>
+          <a:solidFill>
+            <a:srgbClr val="F6F7F9"/>
+          </a:solidFill>
+          <a:ln>
+            <a:noFill/>
+          </a:ln>
+          <a:effectLst/>
+        </p:spPr>
+        <p:style>
+          <a:lnRef idx="1">
+            <a:schemeClr val="accent1"/>
+          </a:lnRef>
+          <a:fillRef idx="3">
+            <a:schemeClr val="accent1"/>
+          </a:fillRef>
+          <a:effectRef idx="2">
+            <a:schemeClr val="accent1"/>
+          </a:effectRef>
+          <a:fontRef idx="minor">
+            <a:schemeClr val="lt1"/>
+          </a:fontRef>
+        </p:style>
+        <p:txBody>
+          <a:bodyPr rtlCol="0" anchor="ctr"/>
+          <a:lstStyle/>
+          <a:p>
+            <a:pPr algn="ctr"/>
+            <a:endParaRPr/>
+          </a:p>
+        </p:txBody>
+      </p:sp>
+      <p:sp>
+        <p:nvSpPr>
+          <p:cNvPr id="21" name="Rectangle 20"/>
+          <p:cNvSpPr/>
+          <p:nvPr/>
+        </p:nvSpPr>
+        <p:spPr>
+          <a:xfrm>
+            <a:off x="4023460" y="2438400"/>
+            <a:ext cx="43892" cy="1463040"/>
+          </a:xfrm>
+          <a:prstGeom prst="rect">
+            <a:avLst/>
+          </a:prstGeom>
+          <a:solidFill>
+            <a:srgbClr val="152130"/>
+          </a:solidFill>
+          <a:ln>
+            <a:noFill/>
+          </a:ln>
+          <a:effectLst/>
+        </p:spPr>
+        <p:style>
+          <a:lnRef idx="1">
+            <a:schemeClr val="accent1"/>
+          </a:lnRef>
+          <a:fillRef idx="3">
+            <a:schemeClr val="accent1"/>
+          </a:fillRef>
+          <a:effectRef idx="2">
+            <a:schemeClr val="accent1"/>
+          </a:effectRef>
+          <a:fontRef idx="minor">
+            <a:schemeClr val="lt1"/>
+          </a:fontRef>
+        </p:style>
+        <p:txBody>
+          <a:bodyPr rtlCol="0" anchor="ctr"/>
+          <a:lstStyle/>
+          <a:p>
+            <a:pPr algn="ctr"/>
+            <a:endParaRPr/>
+          </a:p>
+        </p:txBody>
+      </p:sp>
+      <p:sp>
+        <p:nvSpPr>
+          <p:cNvPr id="22" name="TextBox 21"/>
+          <p:cNvSpPr txBox="1"/>
+          <p:nvPr/>
+        </p:nvSpPr>
+        <p:spPr>
+          <a:xfrm>
+            <a:off x="4169768" y="2565196"/>
+            <a:ext cx="1470391" cy="292608"/>
+          </a:xfrm>
+          <a:prstGeom prst="rect">
+            <a:avLst/>
+          </a:prstGeom>
+          <a:noFill/>
+        </p:spPr>
+        <p:txBody>
+          <a:bodyPr wrap="square" lIns="0" tIns="0" rIns="0" bIns="0" anchor="t">
+            <a:spAutoFit/>
+          </a:bodyPr>
+          <a:lstStyle/>
+          <a:p>
+            <a:pPr algn="l">
+              <a:lnSpc>
+                <a:spcPct val="110000"/>
+              </a:lnSpc>
+              <a:spcAft>
+                <a:spcPts val="0"/>
+              </a:spcAft>
+            </a:pPr>
+            <a:r>
+              <a:rPr sz="1000" b="1" i="0">
+                <a:solidFill>
+                  <a:srgbClr val="314359"/>
+                </a:solidFill>
+                <a:latin typeface="Times New Roman"/>
+              </a:rPr>
+              <a:t>Sven Thorén</a:t>
+            </a:r>
+          </a:p>
+        </p:txBody>
+      </p:sp>
+      <p:sp>
+        <p:nvSpPr>
+          <p:cNvPr id="23" name="TextBox 22"/>
+          <p:cNvSpPr txBox="1"/>
+          <p:nvPr/>
+        </p:nvSpPr>
+        <p:spPr>
+          <a:xfrm>
+            <a:off x="4169768" y="2848051"/>
+            <a:ext cx="1470391" cy="234086"/>
+          </a:xfrm>
+          <a:prstGeom prst="rect">
+            <a:avLst/>
+          </a:prstGeom>
+          <a:noFill/>
+        </p:spPr>
+        <p:txBody>
+          <a:bodyPr wrap="square" lIns="0" tIns="0" rIns="0" bIns="0" anchor="t">
+            <a:spAutoFit/>
+          </a:bodyPr>
+          <a:lstStyle/>
+          <a:p>
+            <a:pPr algn="l">
+              <a:lnSpc>
+                <a:spcPct val="110000"/>
+              </a:lnSpc>
+              <a:spcAft>
+                <a:spcPts val="0"/>
+              </a:spcAft>
+            </a:pPr>
+            <a:r>
+              <a:rPr sz="680" b="1" i="0">
+                <a:solidFill>
+                  <a:srgbClr val="314359"/>
+                </a:solidFill>
+                <a:latin typeface="Arial"/>
+              </a:rPr>
+              <a:t>PM &amp; PARTNER</a:t>
+            </a:r>
+          </a:p>
+        </p:txBody>
+      </p:sp>
+      <p:sp>
+        <p:nvSpPr>
+          <p:cNvPr id="24" name="TextBox 23"/>
+          <p:cNvSpPr txBox="1"/>
+          <p:nvPr/>
+        </p:nvSpPr>
+        <p:spPr>
+          <a:xfrm>
+            <a:off x="4169768" y="3101644"/>
+            <a:ext cx="1455761" cy="682752"/>
+          </a:xfrm>
+          <a:prstGeom prst="rect">
+            <a:avLst/>
+          </a:prstGeom>
+          <a:noFill/>
+        </p:spPr>
+        <p:txBody>
+          <a:bodyPr wrap="square" lIns="0" tIns="0" rIns="0" bIns="0" anchor="t">
+            <a:spAutoFit/>
+          </a:bodyPr>
+          <a:lstStyle/>
+          <a:p>
+            <a:pPr algn="l">
+              <a:lnSpc>
+                <a:spcPct val="110000"/>
+              </a:lnSpc>
+              <a:spcAft>
+                <a:spcPts val="0"/>
+              </a:spcAft>
+            </a:pPr>
+            <a:r>
+              <a:rPr sz="720" b="0" i="0">
+                <a:solidFill>
+                  <a:srgbClr val="0E1620"/>
+                </a:solidFill>
+                <a:latin typeface="Arial"/>
+              </a:rPr>
+              <a:t>Ex-PM at Adrigo, Catella, Pan Capital and Nordea.</a:t>
+            </a:r>
+          </a:p>
+        </p:txBody>
+      </p:sp>
+      <p:sp>
+        <p:nvSpPr>
+          <p:cNvPr id="25" name="Rectangle 24"/>
+          <p:cNvSpPr/>
+          <p:nvPr/>
+        </p:nvSpPr>
+        <p:spPr>
+          <a:xfrm>
+            <a:off x="5815729" y="2438400"/>
+            <a:ext cx="1704484" cy="1463040"/>
+          </a:xfrm>
+          <a:prstGeom prst="rect">
+            <a:avLst/>
+          </a:prstGeom>
+          <a:solidFill>
+            <a:srgbClr val="F6F7F9"/>
+          </a:solidFill>
+          <a:ln>
+            <a:noFill/>
+          </a:ln>
+          <a:effectLst/>
+        </p:spPr>
+        <p:style>
+          <a:lnRef idx="1">
+            <a:schemeClr val="accent1"/>
+          </a:lnRef>
+          <a:fillRef idx="3">
+            <a:schemeClr val="accent1"/>
+          </a:fillRef>
+          <a:effectRef idx="2">
+            <a:schemeClr val="accent1"/>
+          </a:effectRef>
+          <a:fontRef idx="minor">
+            <a:schemeClr val="lt1"/>
+          </a:fontRef>
+        </p:style>
+        <p:txBody>
+          <a:bodyPr rtlCol="0" anchor="ctr"/>
+          <a:lstStyle/>
+          <a:p>
+            <a:pPr algn="ctr"/>
+            <a:endParaRPr/>
+          </a:p>
+        </p:txBody>
+      </p:sp>
+      <p:sp>
+        <p:nvSpPr>
+          <p:cNvPr id="26" name="Rectangle 25"/>
+          <p:cNvSpPr/>
+          <p:nvPr/>
+        </p:nvSpPr>
+        <p:spPr>
+          <a:xfrm>
+            <a:off x="5815729" y="2438400"/>
+            <a:ext cx="43892" cy="1463040"/>
+          </a:xfrm>
+          <a:prstGeom prst="rect">
+            <a:avLst/>
+          </a:prstGeom>
+          <a:solidFill>
+            <a:srgbClr val="152130"/>
+          </a:solidFill>
+          <a:ln>
+            <a:noFill/>
+          </a:ln>
+          <a:effectLst/>
+        </p:spPr>
+        <p:style>
+          <a:lnRef idx="1">
+            <a:schemeClr val="accent1"/>
+          </a:lnRef>
+          <a:fillRef idx="3">
+            <a:schemeClr val="accent1"/>
+          </a:fillRef>
+          <a:effectRef idx="2">
+            <a:schemeClr val="accent1"/>
+          </a:effectRef>
+          <a:fontRef idx="minor">
+            <a:schemeClr val="lt1"/>
+          </a:fontRef>
+        </p:style>
+        <p:txBody>
+          <a:bodyPr rtlCol="0" anchor="ctr"/>
+          <a:lstStyle/>
+          <a:p>
+            <a:pPr algn="ctr"/>
+            <a:endParaRPr/>
+          </a:p>
+        </p:txBody>
+      </p:sp>
+      <p:sp>
+        <p:nvSpPr>
+          <p:cNvPr id="27" name="TextBox 26"/>
+          <p:cNvSpPr txBox="1"/>
+          <p:nvPr/>
+        </p:nvSpPr>
+        <p:spPr>
+          <a:xfrm>
+            <a:off x="5962037" y="2565196"/>
+            <a:ext cx="1470391" cy="292608"/>
+          </a:xfrm>
+          <a:prstGeom prst="rect">
+            <a:avLst/>
+          </a:prstGeom>
+          <a:noFill/>
+        </p:spPr>
+        <p:txBody>
+          <a:bodyPr wrap="square" lIns="0" tIns="0" rIns="0" bIns="0" anchor="t">
+            <a:spAutoFit/>
+          </a:bodyPr>
+          <a:lstStyle/>
+          <a:p>
+            <a:pPr algn="l">
+              <a:lnSpc>
+                <a:spcPct val="110000"/>
+              </a:lnSpc>
+              <a:spcAft>
+                <a:spcPts val="0"/>
+              </a:spcAft>
+            </a:pPr>
+            <a:r>
+              <a:rPr sz="1000" b="1" i="0">
+                <a:solidFill>
+                  <a:srgbClr val="314359"/>
+                </a:solidFill>
+                <a:latin typeface="Times New Roman"/>
+              </a:rPr>
+              <a:t>Anders Elsell</a:t>
+            </a:r>
+          </a:p>
+        </p:txBody>
+      </p:sp>
+      <p:sp>
+        <p:nvSpPr>
+          <p:cNvPr id="28" name="TextBox 27"/>
+          <p:cNvSpPr txBox="1"/>
+          <p:nvPr/>
+        </p:nvSpPr>
+        <p:spPr>
+          <a:xfrm>
+            <a:off x="5962037" y="2848051"/>
+            <a:ext cx="1470391" cy="234086"/>
+          </a:xfrm>
+          <a:prstGeom prst="rect">
+            <a:avLst/>
+          </a:prstGeom>
+          <a:noFill/>
+        </p:spPr>
+        <p:txBody>
+          <a:bodyPr wrap="square" lIns="0" tIns="0" rIns="0" bIns="0" anchor="t">
+            <a:spAutoFit/>
+          </a:bodyPr>
+          <a:lstStyle/>
+          <a:p>
+            <a:pPr algn="l">
+              <a:lnSpc>
+                <a:spcPct val="110000"/>
+              </a:lnSpc>
+              <a:spcAft>
+                <a:spcPts val="0"/>
+              </a:spcAft>
+            </a:pPr>
+            <a:r>
+              <a:rPr sz="680" b="1" i="0">
+                <a:solidFill>
+                  <a:srgbClr val="314359"/>
+                </a:solidFill>
+                <a:latin typeface="Arial"/>
+              </a:rPr>
+              <a:t>SENIOR PM</a:t>
+            </a:r>
+          </a:p>
+        </p:txBody>
+      </p:sp>
+      <p:sp>
+        <p:nvSpPr>
+          <p:cNvPr id="29" name="TextBox 28"/>
+          <p:cNvSpPr txBox="1"/>
+          <p:nvPr/>
+        </p:nvSpPr>
+        <p:spPr>
+          <a:xfrm>
+            <a:off x="5962037" y="3101644"/>
+            <a:ext cx="1455761" cy="682752"/>
+          </a:xfrm>
+          <a:prstGeom prst="rect">
+            <a:avLst/>
+          </a:prstGeom>
+          <a:noFill/>
+        </p:spPr>
+        <p:txBody>
+          <a:bodyPr wrap="square" lIns="0" tIns="0" rIns="0" bIns="0" anchor="t">
+            <a:spAutoFit/>
+          </a:bodyPr>
+          <a:lstStyle/>
+          <a:p>
+            <a:pPr algn="l">
+              <a:lnSpc>
+                <a:spcPct val="110000"/>
+              </a:lnSpc>
+              <a:spcAft>
+                <a:spcPts val="0"/>
+              </a:spcAft>
+            </a:pPr>
+            <a:r>
+              <a:rPr sz="720" b="0" i="0">
+                <a:solidFill>
+                  <a:srgbClr val="0E1620"/>
+                </a:solidFill>
+                <a:latin typeface="Arial"/>
+              </a:rPr>
+              <a:t>On the team since 1996; ex-CEO/CIO of HQ Fonder; Carnegie.</a:t>
+            </a:r>
+          </a:p>
+        </p:txBody>
+      </p:sp>
+      <p:sp>
+        <p:nvSpPr>
+          <p:cNvPr id="30" name="Rectangle 29"/>
+          <p:cNvSpPr/>
+          <p:nvPr/>
+        </p:nvSpPr>
+        <p:spPr>
+          <a:xfrm>
+            <a:off x="7607998" y="2438400"/>
+            <a:ext cx="1704484" cy="1463040"/>
+          </a:xfrm>
+          <a:prstGeom prst="rect">
+            <a:avLst/>
+          </a:prstGeom>
+          <a:solidFill>
+            <a:srgbClr val="F6F7F9"/>
+          </a:solidFill>
+          <a:ln>
+            <a:noFill/>
+          </a:ln>
+          <a:effectLst/>
+        </p:spPr>
+        <p:style>
+          <a:lnRef idx="1">
+            <a:schemeClr val="accent1"/>
+          </a:lnRef>
+          <a:fillRef idx="3">
+            <a:schemeClr val="accent1"/>
+          </a:fillRef>
+          <a:effectRef idx="2">
+            <a:schemeClr val="accent1"/>
+          </a:effectRef>
+          <a:fontRef idx="minor">
+            <a:schemeClr val="lt1"/>
+          </a:fontRef>
+        </p:style>
+        <p:txBody>
+          <a:bodyPr rtlCol="0" anchor="ctr"/>
+          <a:lstStyle/>
+          <a:p>
+            <a:pPr algn="ctr"/>
+            <a:endParaRPr/>
+          </a:p>
+        </p:txBody>
+      </p:sp>
+      <p:sp>
+        <p:nvSpPr>
+          <p:cNvPr id="31" name="Rectangle 30"/>
+          <p:cNvSpPr/>
+          <p:nvPr/>
+        </p:nvSpPr>
+        <p:spPr>
+          <a:xfrm>
+            <a:off x="7607998" y="2438400"/>
+            <a:ext cx="43892" cy="1463040"/>
+          </a:xfrm>
+          <a:prstGeom prst="rect">
+            <a:avLst/>
+          </a:prstGeom>
+          <a:solidFill>
+            <a:srgbClr val="152130"/>
+          </a:solidFill>
+          <a:ln>
+            <a:noFill/>
+          </a:ln>
+          <a:effectLst/>
+        </p:spPr>
+        <p:style>
+          <a:lnRef idx="1">
+            <a:schemeClr val="accent1"/>
+          </a:lnRef>
+          <a:fillRef idx="3">
+            <a:schemeClr val="accent1"/>
+          </a:fillRef>
+          <a:effectRef idx="2">
+            <a:schemeClr val="accent1"/>
+          </a:effectRef>
+          <a:fontRef idx="minor">
+            <a:schemeClr val="lt1"/>
+          </a:fontRef>
+        </p:style>
+        <p:txBody>
+          <a:bodyPr rtlCol="0" anchor="ctr"/>
+          <a:lstStyle/>
+          <a:p>
+            <a:pPr algn="ctr"/>
+            <a:endParaRPr/>
+          </a:p>
+        </p:txBody>
+      </p:sp>
+      <p:sp>
+        <p:nvSpPr>
+          <p:cNvPr id="32" name="TextBox 31"/>
+          <p:cNvSpPr txBox="1"/>
+          <p:nvPr/>
+        </p:nvSpPr>
+        <p:spPr>
+          <a:xfrm>
+            <a:off x="7754305" y="2565196"/>
+            <a:ext cx="1470391" cy="292608"/>
+          </a:xfrm>
+          <a:prstGeom prst="rect">
+            <a:avLst/>
+          </a:prstGeom>
+          <a:noFill/>
+        </p:spPr>
+        <p:txBody>
+          <a:bodyPr wrap="square" lIns="0" tIns="0" rIns="0" bIns="0" anchor="t">
+            <a:spAutoFit/>
+          </a:bodyPr>
+          <a:lstStyle/>
+          <a:p>
+            <a:pPr algn="l">
+              <a:lnSpc>
+                <a:spcPct val="110000"/>
+              </a:lnSpc>
+              <a:spcAft>
+                <a:spcPts val="0"/>
+              </a:spcAft>
+            </a:pPr>
+            <a:r>
+              <a:rPr sz="1000" b="1" i="0">
+                <a:solidFill>
+                  <a:srgbClr val="314359"/>
+                </a:solidFill>
+                <a:latin typeface="Times New Roman"/>
+              </a:rPr>
+              <a:t>Daniel Nyhrén</a:t>
+            </a:r>
+          </a:p>
+        </p:txBody>
+      </p:sp>
+      <p:sp>
+        <p:nvSpPr>
+          <p:cNvPr id="33" name="TextBox 32"/>
+          <p:cNvSpPr txBox="1"/>
+          <p:nvPr/>
+        </p:nvSpPr>
+        <p:spPr>
+          <a:xfrm>
+            <a:off x="7754305" y="2848051"/>
+            <a:ext cx="1470391" cy="234086"/>
+          </a:xfrm>
+          <a:prstGeom prst="rect">
+            <a:avLst/>
+          </a:prstGeom>
+          <a:noFill/>
+        </p:spPr>
+        <p:txBody>
+          <a:bodyPr wrap="square" lIns="0" tIns="0" rIns="0" bIns="0" anchor="t">
+            <a:spAutoFit/>
+          </a:bodyPr>
+          <a:lstStyle/>
+          <a:p>
+            <a:pPr algn="l">
+              <a:lnSpc>
+                <a:spcPct val="110000"/>
+              </a:lnSpc>
+              <a:spcAft>
+                <a:spcPts val="0"/>
+              </a:spcAft>
+            </a:pPr>
+            <a:r>
+              <a:rPr sz="680" b="1" i="0">
+                <a:solidFill>
+                  <a:srgbClr val="314359"/>
+                </a:solidFill>
+                <a:latin typeface="Arial"/>
+              </a:rPr>
+              <a:t>PARTNER</a:t>
+            </a:r>
+          </a:p>
+        </p:txBody>
+      </p:sp>
+      <p:sp>
+        <p:nvSpPr>
+          <p:cNvPr id="34" name="TextBox 33"/>
+          <p:cNvSpPr txBox="1"/>
+          <p:nvPr/>
+        </p:nvSpPr>
+        <p:spPr>
+          <a:xfrm>
+            <a:off x="7754305" y="3101644"/>
+            <a:ext cx="1455761" cy="682752"/>
+          </a:xfrm>
+          <a:prstGeom prst="rect">
+            <a:avLst/>
+          </a:prstGeom>
+          <a:noFill/>
+        </p:spPr>
+        <p:txBody>
+          <a:bodyPr wrap="square" lIns="0" tIns="0" rIns="0" bIns="0" anchor="t">
+            <a:spAutoFit/>
+          </a:bodyPr>
+          <a:lstStyle/>
+          <a:p>
+            <a:pPr algn="l">
+              <a:lnSpc>
+                <a:spcPct val="110000"/>
+              </a:lnSpc>
+              <a:spcAft>
+                <a:spcPts val="0"/>
+              </a:spcAft>
+            </a:pPr>
+            <a:r>
+              <a:rPr sz="720" b="0" i="0">
+                <a:solidFill>
+                  <a:srgbClr val="0E1620"/>
+                </a:solidFill>
+                <a:latin typeface="Arial"/>
+              </a:rPr>
+              <a:t>On the team since 2006; ex-CFO of Global Batterier.</a:t>
+            </a:r>
+          </a:p>
+        </p:txBody>
+      </p:sp>
+      <p:sp>
+        <p:nvSpPr>
+          <p:cNvPr id="35" name="TextBox 34"/>
+          <p:cNvSpPr txBox="1"/>
+          <p:nvPr/>
+        </p:nvSpPr>
+        <p:spPr>
+          <a:xfrm>
+            <a:off x="438922" y="4096512"/>
+            <a:ext cx="6583844" cy="292608"/>
+          </a:xfrm>
+          <a:prstGeom prst="rect">
+            <a:avLst/>
+          </a:prstGeom>
+          <a:noFill/>
+        </p:spPr>
+        <p:txBody>
+          <a:bodyPr wrap="square" lIns="0" tIns="0" rIns="0" bIns="0" anchor="t">
+            <a:spAutoFit/>
+          </a:bodyPr>
+          <a:lstStyle/>
+          <a:p>
+            <a:pPr algn="l">
+              <a:lnSpc>
+                <a:spcPct val="110000"/>
+              </a:lnSpc>
+              <a:spcAft>
+                <a:spcPts val="0"/>
+              </a:spcAft>
+            </a:pPr>
+            <a:r>
+              <a:rPr sz="880" b="1" i="0">
+                <a:solidFill>
+                  <a:srgbClr val="314359"/>
+                </a:solidFill>
+                <a:latin typeface="Arial"/>
+              </a:rPr>
+              <a:t>OPERATIONS, FINANCE &amp; CONTROL — INDEPENDENT OF THE INVESTMENT TEAM</a:t>
+            </a:r>
+          </a:p>
+        </p:txBody>
+      </p:sp>
+      <p:sp>
+        <p:nvSpPr>
+          <p:cNvPr id="36" name="Rectangle 35"/>
+          <p:cNvSpPr/>
+          <p:nvPr/>
+        </p:nvSpPr>
+        <p:spPr>
+          <a:xfrm>
+            <a:off x="438922" y="4408626"/>
+            <a:ext cx="2165353" cy="1414272"/>
+          </a:xfrm>
+          <a:prstGeom prst="rect">
+            <a:avLst/>
+          </a:prstGeom>
+          <a:solidFill>
+            <a:srgbClr val="F6F7F9"/>
+          </a:solidFill>
+          <a:ln>
+            <a:noFill/>
+          </a:ln>
+          <a:effectLst/>
+        </p:spPr>
+        <p:style>
+          <a:lnRef idx="1">
+            <a:schemeClr val="accent1"/>
+          </a:lnRef>
+          <a:fillRef idx="3">
+            <a:schemeClr val="accent1"/>
+          </a:fillRef>
+          <a:effectRef idx="2">
+            <a:schemeClr val="accent1"/>
+          </a:effectRef>
+          <a:fontRef idx="minor">
+            <a:schemeClr val="lt1"/>
+          </a:fontRef>
+        </p:style>
+        <p:txBody>
+          <a:bodyPr rtlCol="0" anchor="ctr"/>
+          <a:lstStyle/>
+          <a:p>
+            <a:pPr algn="ctr"/>
+            <a:endParaRPr/>
+          </a:p>
+        </p:txBody>
+      </p:sp>
+      <p:sp>
+        <p:nvSpPr>
+          <p:cNvPr id="37" name="Rectangle 36"/>
+          <p:cNvSpPr/>
+          <p:nvPr/>
+        </p:nvSpPr>
+        <p:spPr>
+          <a:xfrm>
+            <a:off x="438922" y="4408626"/>
+            <a:ext cx="43892" cy="1414272"/>
+          </a:xfrm>
+          <a:prstGeom prst="rect">
+            <a:avLst/>
+          </a:prstGeom>
+          <a:solidFill>
+            <a:srgbClr val="152130"/>
+          </a:solidFill>
+          <a:ln>
+            <a:noFill/>
+          </a:ln>
+          <a:effectLst/>
+        </p:spPr>
+        <p:style>
+          <a:lnRef idx="1">
+            <a:schemeClr val="accent1"/>
+          </a:lnRef>
+          <a:fillRef idx="3">
+            <a:schemeClr val="accent1"/>
+          </a:fillRef>
+          <a:effectRef idx="2">
+            <a:schemeClr val="accent1"/>
+          </a:effectRef>
+          <a:fontRef idx="minor">
+            <a:schemeClr val="lt1"/>
+          </a:fontRef>
+        </p:style>
+        <p:txBody>
+          <a:bodyPr rtlCol="0" anchor="ctr"/>
+          <a:lstStyle/>
+          <a:p>
+            <a:pPr algn="ctr"/>
+            <a:endParaRPr/>
+          </a:p>
+        </p:txBody>
+      </p:sp>
+      <p:sp>
+        <p:nvSpPr>
+          <p:cNvPr id="38" name="TextBox 37"/>
+          <p:cNvSpPr txBox="1"/>
+          <p:nvPr/>
+        </p:nvSpPr>
+        <p:spPr>
+          <a:xfrm>
+            <a:off x="585230" y="4535422"/>
+            <a:ext cx="1931261" cy="292608"/>
+          </a:xfrm>
+          <a:prstGeom prst="rect">
+            <a:avLst/>
+          </a:prstGeom>
+          <a:noFill/>
+        </p:spPr>
+        <p:txBody>
+          <a:bodyPr wrap="square" lIns="0" tIns="0" rIns="0" bIns="0" anchor="t">
+            <a:spAutoFit/>
+          </a:bodyPr>
+          <a:lstStyle/>
+          <a:p>
+            <a:pPr algn="l">
+              <a:lnSpc>
+                <a:spcPct val="110000"/>
+              </a:lnSpc>
+              <a:spcAft>
+                <a:spcPts val="0"/>
+              </a:spcAft>
+            </a:pPr>
+            <a:r>
+              <a:rPr sz="1000" b="1" i="0">
+                <a:solidFill>
+                  <a:srgbClr val="314359"/>
+                </a:solidFill>
+                <a:latin typeface="Times New Roman"/>
+              </a:rPr>
+              <a:t>Malin Norrman</a:t>
+            </a:r>
+          </a:p>
+        </p:txBody>
+      </p:sp>
+      <p:sp>
+        <p:nvSpPr>
+          <p:cNvPr id="39" name="TextBox 38"/>
+          <p:cNvSpPr txBox="1"/>
+          <p:nvPr/>
+        </p:nvSpPr>
+        <p:spPr>
+          <a:xfrm>
+            <a:off x="585230" y="4818277"/>
+            <a:ext cx="1931261" cy="234086"/>
+          </a:xfrm>
+          <a:prstGeom prst="rect">
+            <a:avLst/>
+          </a:prstGeom>
+          <a:noFill/>
+        </p:spPr>
+        <p:txBody>
+          <a:bodyPr wrap="square" lIns="0" tIns="0" rIns="0" bIns="0" anchor="t">
+            <a:spAutoFit/>
+          </a:bodyPr>
+          <a:lstStyle/>
+          <a:p>
+            <a:pPr algn="l">
+              <a:lnSpc>
+                <a:spcPct val="110000"/>
+              </a:lnSpc>
+              <a:spcAft>
+                <a:spcPts val="0"/>
+              </a:spcAft>
+            </a:pPr>
+            <a:r>
+              <a:rPr sz="680" b="1" i="0">
+                <a:solidFill>
+                  <a:srgbClr val="314359"/>
+                </a:solidFill>
+                <a:latin typeface="Arial"/>
+              </a:rPr>
+              <a:t>CFO</a:t>
+            </a:r>
+          </a:p>
+        </p:txBody>
+      </p:sp>
+      <p:sp>
+        <p:nvSpPr>
+          <p:cNvPr id="40" name="TextBox 39"/>
+          <p:cNvSpPr txBox="1"/>
+          <p:nvPr/>
+        </p:nvSpPr>
+        <p:spPr>
+          <a:xfrm>
+            <a:off x="585230" y="5071870"/>
+            <a:ext cx="1916630" cy="682752"/>
+          </a:xfrm>
+          <a:prstGeom prst="rect">
+            <a:avLst/>
+          </a:prstGeom>
+          <a:noFill/>
+        </p:spPr>
+        <p:txBody>
+          <a:bodyPr wrap="square" lIns="0" tIns="0" rIns="0" bIns="0" anchor="t">
+            <a:spAutoFit/>
+          </a:bodyPr>
+          <a:lstStyle/>
+          <a:p>
+            <a:pPr algn="l">
+              <a:lnSpc>
+                <a:spcPct val="110000"/>
+              </a:lnSpc>
+              <a:spcAft>
+                <a:spcPts val="0"/>
+              </a:spcAft>
+            </a:pPr>
+            <a:r>
+              <a:rPr sz="720" b="0" i="0">
+                <a:solidFill>
+                  <a:srgbClr val="0E1620"/>
+                </a:solidFill>
+                <a:latin typeface="Arial"/>
+              </a:rPr>
+              <a:t>Ex-COO/CFO of Captor Fund Mgmt; risk manager at Carnegie and AB Industrivärden.</a:t>
+            </a:r>
+          </a:p>
+        </p:txBody>
+      </p:sp>
+      <p:sp>
+        <p:nvSpPr>
+          <p:cNvPr id="41" name="Rectangle 40"/>
+          <p:cNvSpPr/>
+          <p:nvPr/>
+        </p:nvSpPr>
+        <p:spPr>
+          <a:xfrm>
+            <a:off x="2699376" y="4408626"/>
+            <a:ext cx="2165353" cy="1414272"/>
+          </a:xfrm>
+          <a:prstGeom prst="rect">
+            <a:avLst/>
+          </a:prstGeom>
+          <a:solidFill>
+            <a:srgbClr val="F6F7F9"/>
+          </a:solidFill>
+          <a:ln>
+            <a:noFill/>
+          </a:ln>
+          <a:effectLst/>
+        </p:spPr>
+        <p:style>
+          <a:lnRef idx="1">
+            <a:schemeClr val="accent1"/>
+          </a:lnRef>
+          <a:fillRef idx="3">
+            <a:schemeClr val="accent1"/>
+          </a:fillRef>
+          <a:effectRef idx="2">
+            <a:schemeClr val="accent1"/>
+          </a:effectRef>
+          <a:fontRef idx="minor">
+            <a:schemeClr val="lt1"/>
+          </a:fontRef>
+        </p:style>
+        <p:txBody>
+          <a:bodyPr rtlCol="0" anchor="ctr"/>
+          <a:lstStyle/>
+          <a:p>
+            <a:pPr algn="ctr"/>
+            <a:endParaRPr/>
+          </a:p>
+        </p:txBody>
+      </p:sp>
+      <p:sp>
+        <p:nvSpPr>
+          <p:cNvPr id="42" name="Rectangle 41"/>
+          <p:cNvSpPr/>
+          <p:nvPr/>
+        </p:nvSpPr>
+        <p:spPr>
+          <a:xfrm>
+            <a:off x="2699376" y="4408626"/>
+            <a:ext cx="43892" cy="1414272"/>
+          </a:xfrm>
+          <a:prstGeom prst="rect">
+            <a:avLst/>
+          </a:prstGeom>
+          <a:solidFill>
+            <a:srgbClr val="152130"/>
+          </a:solidFill>
+          <a:ln>
+            <a:noFill/>
+          </a:ln>
+          <a:effectLst/>
+        </p:spPr>
+        <p:style>
+          <a:lnRef idx="1">
+            <a:schemeClr val="accent1"/>
+          </a:lnRef>
+          <a:fillRef idx="3">
+            <a:schemeClr val="accent1"/>
+          </a:fillRef>
+          <a:effectRef idx="2">
+            <a:schemeClr val="accent1"/>
+          </a:effectRef>
+          <a:fontRef idx="minor">
+            <a:schemeClr val="lt1"/>
+          </a:fontRef>
+        </p:style>
+        <p:txBody>
+          <a:bodyPr rtlCol="0" anchor="ctr"/>
+          <a:lstStyle/>
+          <a:p>
+            <a:pPr algn="ctr"/>
+            <a:endParaRPr/>
+          </a:p>
+        </p:txBody>
+      </p:sp>
+      <p:sp>
+        <p:nvSpPr>
+          <p:cNvPr id="43" name="TextBox 42"/>
+          <p:cNvSpPr txBox="1"/>
+          <p:nvPr/>
+        </p:nvSpPr>
+        <p:spPr>
+          <a:xfrm>
+            <a:off x="2845683" y="4535422"/>
+            <a:ext cx="1931261" cy="292608"/>
+          </a:xfrm>
+          <a:prstGeom prst="rect">
+            <a:avLst/>
+          </a:prstGeom>
+          <a:noFill/>
+        </p:spPr>
+        <p:txBody>
+          <a:bodyPr wrap="square" lIns="0" tIns="0" rIns="0" bIns="0" anchor="t">
+            <a:spAutoFit/>
+          </a:bodyPr>
+          <a:lstStyle/>
+          <a:p>
+            <a:pPr algn="l">
+              <a:lnSpc>
+                <a:spcPct val="110000"/>
+              </a:lnSpc>
+              <a:spcAft>
+                <a:spcPts val="0"/>
+              </a:spcAft>
+            </a:pPr>
+            <a:r>
+              <a:rPr sz="1000" b="1" i="0">
+                <a:solidFill>
+                  <a:srgbClr val="314359"/>
+                </a:solidFill>
+                <a:latin typeface="Times New Roman"/>
+              </a:rPr>
+              <a:t>Grant Loon</a:t>
+            </a:r>
+          </a:p>
+        </p:txBody>
+      </p:sp>
+      <p:sp>
+        <p:nvSpPr>
+          <p:cNvPr id="44" name="TextBox 43"/>
+          <p:cNvSpPr txBox="1"/>
+          <p:nvPr/>
+        </p:nvSpPr>
+        <p:spPr>
+          <a:xfrm>
+            <a:off x="2845683" y="4818277"/>
+            <a:ext cx="1931261" cy="234086"/>
+          </a:xfrm>
+          <a:prstGeom prst="rect">
+            <a:avLst/>
+          </a:prstGeom>
+          <a:noFill/>
+        </p:spPr>
+        <p:txBody>
+          <a:bodyPr wrap="square" lIns="0" tIns="0" rIns="0" bIns="0" anchor="t">
+            <a:spAutoFit/>
+          </a:bodyPr>
+          <a:lstStyle/>
+          <a:p>
+            <a:pPr algn="l">
+              <a:lnSpc>
+                <a:spcPct val="110000"/>
+              </a:lnSpc>
+              <a:spcAft>
+                <a:spcPts val="0"/>
+              </a:spcAft>
+            </a:pPr>
+            <a:r>
+              <a:rPr sz="680" b="1" i="0">
+                <a:solidFill>
+                  <a:srgbClr val="314359"/>
+                </a:solidFill>
+                <a:latin typeface="Arial"/>
+              </a:rPr>
+              <a:t>HEAD OF FUND OPERATIONS</a:t>
+            </a:r>
+          </a:p>
+        </p:txBody>
+      </p:sp>
+      <p:sp>
+        <p:nvSpPr>
+          <p:cNvPr id="45" name="TextBox 44"/>
+          <p:cNvSpPr txBox="1"/>
+          <p:nvPr/>
+        </p:nvSpPr>
+        <p:spPr>
+          <a:xfrm>
+            <a:off x="2845683" y="5071870"/>
+            <a:ext cx="1916630" cy="682752"/>
+          </a:xfrm>
+          <a:prstGeom prst="rect">
+            <a:avLst/>
+          </a:prstGeom>
+          <a:noFill/>
+        </p:spPr>
+        <p:txBody>
+          <a:bodyPr wrap="square" lIns="0" tIns="0" rIns="0" bIns="0" anchor="t">
+            <a:spAutoFit/>
+          </a:bodyPr>
+          <a:lstStyle/>
+          <a:p>
+            <a:pPr algn="l">
+              <a:lnSpc>
+                <a:spcPct val="110000"/>
+              </a:lnSpc>
+              <a:spcAft>
+                <a:spcPts val="0"/>
+              </a:spcAft>
+            </a:pPr>
+            <a:r>
+              <a:rPr sz="720" b="0" i="0">
+                <a:solidFill>
+                  <a:srgbClr val="0E1620"/>
+                </a:solidFill>
+                <a:latin typeface="Arial"/>
+              </a:rPr>
+              <a:t>Ex-COO of Madrague Capital and Port Capital; Soros, Commerzbank, Morgan Stanley.</a:t>
+            </a:r>
+          </a:p>
+        </p:txBody>
+      </p:sp>
+      <p:sp>
+        <p:nvSpPr>
+          <p:cNvPr id="46" name="Rectangle 45"/>
+          <p:cNvSpPr/>
+          <p:nvPr/>
+        </p:nvSpPr>
+        <p:spPr>
+          <a:xfrm>
+            <a:off x="4959829" y="4408626"/>
+            <a:ext cx="2165353" cy="1414272"/>
+          </a:xfrm>
+          <a:prstGeom prst="rect">
+            <a:avLst/>
+          </a:prstGeom>
+          <a:solidFill>
+            <a:srgbClr val="F6F7F9"/>
+          </a:solidFill>
+          <a:ln>
+            <a:noFill/>
+          </a:ln>
+          <a:effectLst/>
+        </p:spPr>
+        <p:style>
+          <a:lnRef idx="1">
+            <a:schemeClr val="accent1"/>
+          </a:lnRef>
+          <a:fillRef idx="3">
+            <a:schemeClr val="accent1"/>
+          </a:fillRef>
+          <a:effectRef idx="2">
+            <a:schemeClr val="accent1"/>
+          </a:effectRef>
+          <a:fontRef idx="minor">
+            <a:schemeClr val="lt1"/>
+          </a:fontRef>
+        </p:style>
+        <p:txBody>
+          <a:bodyPr rtlCol="0" anchor="ctr"/>
+          <a:lstStyle/>
+          <a:p>
+            <a:pPr algn="ctr"/>
+            <a:endParaRPr/>
+          </a:p>
+        </p:txBody>
+      </p:sp>
+      <p:sp>
+        <p:nvSpPr>
+          <p:cNvPr id="47" name="Rectangle 46"/>
+          <p:cNvSpPr/>
+          <p:nvPr/>
+        </p:nvSpPr>
+        <p:spPr>
+          <a:xfrm>
+            <a:off x="4959829" y="4408626"/>
+            <a:ext cx="43892" cy="1414272"/>
+          </a:xfrm>
+          <a:prstGeom prst="rect">
+            <a:avLst/>
+          </a:prstGeom>
+          <a:solidFill>
+            <a:srgbClr val="152130"/>
+          </a:solidFill>
+          <a:ln>
+            <a:noFill/>
+          </a:ln>
+          <a:effectLst/>
+        </p:spPr>
+        <p:style>
+          <a:lnRef idx="1">
+            <a:schemeClr val="accent1"/>
+          </a:lnRef>
+          <a:fillRef idx="3">
+            <a:schemeClr val="accent1"/>
+          </a:fillRef>
+          <a:effectRef idx="2">
+            <a:schemeClr val="accent1"/>
+          </a:effectRef>
+          <a:fontRef idx="minor">
+            <a:schemeClr val="lt1"/>
+          </a:fontRef>
+        </p:style>
+        <p:txBody>
+          <a:bodyPr rtlCol="0" anchor="ctr"/>
+          <a:lstStyle/>
+          <a:p>
+            <a:pPr algn="ctr"/>
+            <a:endParaRPr/>
+          </a:p>
+        </p:txBody>
+      </p:sp>
+      <p:sp>
+        <p:nvSpPr>
+          <p:cNvPr id="48" name="TextBox 47"/>
+          <p:cNvSpPr txBox="1"/>
+          <p:nvPr/>
+        </p:nvSpPr>
+        <p:spPr>
+          <a:xfrm>
+            <a:off x="5106137" y="4535422"/>
+            <a:ext cx="1931261" cy="292608"/>
+          </a:xfrm>
+          <a:prstGeom prst="rect">
+            <a:avLst/>
+          </a:prstGeom>
+          <a:noFill/>
+        </p:spPr>
+        <p:txBody>
+          <a:bodyPr wrap="square" lIns="0" tIns="0" rIns="0" bIns="0" anchor="t">
+            <a:spAutoFit/>
+          </a:bodyPr>
+          <a:lstStyle/>
+          <a:p>
+            <a:pPr algn="l">
+              <a:lnSpc>
+                <a:spcPct val="110000"/>
+              </a:lnSpc>
+              <a:spcAft>
+                <a:spcPts val="0"/>
+              </a:spcAft>
+            </a:pPr>
+            <a:r>
+              <a:rPr sz="1000" b="1" i="0">
+                <a:solidFill>
+                  <a:srgbClr val="314359"/>
+                </a:solidFill>
+                <a:latin typeface="Times New Roman"/>
+              </a:rPr>
+              <a:t>Eva Andersson</a:t>
+            </a:r>
+          </a:p>
+        </p:txBody>
+      </p:sp>
+      <p:sp>
+        <p:nvSpPr>
+          <p:cNvPr id="49" name="TextBox 48"/>
+          <p:cNvSpPr txBox="1"/>
+          <p:nvPr/>
+        </p:nvSpPr>
+        <p:spPr>
+          <a:xfrm>
+            <a:off x="5106137" y="4818277"/>
+            <a:ext cx="1931261" cy="234086"/>
+          </a:xfrm>
+          <a:prstGeom prst="rect">
+            <a:avLst/>
+          </a:prstGeom>
+          <a:noFill/>
+        </p:spPr>
+        <p:txBody>
+          <a:bodyPr wrap="square" lIns="0" tIns="0" rIns="0" bIns="0" anchor="t">
+            <a:spAutoFit/>
+          </a:bodyPr>
+          <a:lstStyle/>
+          <a:p>
+            <a:pPr algn="l">
+              <a:lnSpc>
+                <a:spcPct val="110000"/>
+              </a:lnSpc>
+              <a:spcAft>
+                <a:spcPts val="0"/>
+              </a:spcAft>
+            </a:pPr>
+            <a:r>
+              <a:rPr sz="680" b="1" i="0">
+                <a:solidFill>
+                  <a:srgbClr val="314359"/>
+                </a:solidFill>
+                <a:latin typeface="Arial"/>
+              </a:rPr>
+              <a:t>FUND OPERATIONS</a:t>
+            </a:r>
+          </a:p>
+        </p:txBody>
+      </p:sp>
+      <p:sp>
+        <p:nvSpPr>
+          <p:cNvPr id="50" name="TextBox 49"/>
+          <p:cNvSpPr txBox="1"/>
+          <p:nvPr/>
+        </p:nvSpPr>
+        <p:spPr>
+          <a:xfrm>
+            <a:off x="5106137" y="5071870"/>
+            <a:ext cx="1916630" cy="682752"/>
+          </a:xfrm>
+          <a:prstGeom prst="rect">
+            <a:avLst/>
+          </a:prstGeom>
+          <a:noFill/>
+        </p:spPr>
+        <p:txBody>
+          <a:bodyPr wrap="square" lIns="0" tIns="0" rIns="0" bIns="0" anchor="t">
+            <a:spAutoFit/>
+          </a:bodyPr>
+          <a:lstStyle/>
+          <a:p>
+            <a:pPr algn="l">
+              <a:lnSpc>
+                <a:spcPct val="110000"/>
+              </a:lnSpc>
+              <a:spcAft>
+                <a:spcPts val="0"/>
+              </a:spcAft>
+            </a:pPr>
+            <a:r>
+              <a:rPr sz="720" b="0" i="0">
+                <a:solidFill>
+                  <a:srgbClr val="0E1620"/>
+                </a:solidFill>
+                <a:latin typeface="Arial"/>
+              </a:rPr>
+              <a:t>MBA, Business School London; sales-executive background.</a:t>
+            </a:r>
+          </a:p>
+        </p:txBody>
+      </p:sp>
+      <p:sp>
+        <p:nvSpPr>
+          <p:cNvPr id="51" name="Rectangle 50"/>
+          <p:cNvSpPr/>
+          <p:nvPr/>
+        </p:nvSpPr>
+        <p:spPr>
+          <a:xfrm>
+            <a:off x="7220283" y="4408626"/>
+            <a:ext cx="2165353" cy="1414272"/>
+          </a:xfrm>
+          <a:prstGeom prst="rect">
+            <a:avLst/>
+          </a:prstGeom>
+          <a:solidFill>
+            <a:srgbClr val="F6F7F9"/>
+          </a:solidFill>
+          <a:ln>
+            <a:noFill/>
+          </a:ln>
+          <a:effectLst/>
+        </p:spPr>
+        <p:style>
+          <a:lnRef idx="1">
+            <a:schemeClr val="accent1"/>
+          </a:lnRef>
+          <a:fillRef idx="3">
+            <a:schemeClr val="accent1"/>
+          </a:fillRef>
+          <a:effectRef idx="2">
+            <a:schemeClr val="accent1"/>
+          </a:effectRef>
+          <a:fontRef idx="minor">
+            <a:schemeClr val="lt1"/>
+          </a:fontRef>
+        </p:style>
+        <p:txBody>
+          <a:bodyPr rtlCol="0" anchor="ctr"/>
+          <a:lstStyle/>
+          <a:p>
+            <a:pPr algn="ctr"/>
+            <a:endParaRPr/>
+          </a:p>
+        </p:txBody>
+      </p:sp>
+      <p:sp>
+        <p:nvSpPr>
+          <p:cNvPr id="52" name="Rectangle 51"/>
+          <p:cNvSpPr/>
+          <p:nvPr/>
+        </p:nvSpPr>
+        <p:spPr>
+          <a:xfrm>
+            <a:off x="7220283" y="4408626"/>
+            <a:ext cx="43892" cy="1414272"/>
+          </a:xfrm>
+          <a:prstGeom prst="rect">
+            <a:avLst/>
+          </a:prstGeom>
+          <a:solidFill>
+            <a:srgbClr val="152130"/>
+          </a:solidFill>
+          <a:ln>
+            <a:noFill/>
+          </a:ln>
+          <a:effectLst/>
+        </p:spPr>
+        <p:style>
+          <a:lnRef idx="1">
+            <a:schemeClr val="accent1"/>
+          </a:lnRef>
+          <a:fillRef idx="3">
+            <a:schemeClr val="accent1"/>
+          </a:fillRef>
+          <a:effectRef idx="2">
+            <a:schemeClr val="accent1"/>
+          </a:effectRef>
+          <a:fontRef idx="minor">
+            <a:schemeClr val="lt1"/>
+          </a:fontRef>
+        </p:style>
+        <p:txBody>
+          <a:bodyPr rtlCol="0" anchor="ctr"/>
+          <a:lstStyle/>
+          <a:p>
+            <a:pPr algn="ctr"/>
+            <a:endParaRPr/>
+          </a:p>
+        </p:txBody>
+      </p:sp>
+      <p:sp>
+        <p:nvSpPr>
+          <p:cNvPr id="53" name="TextBox 52"/>
+          <p:cNvSpPr txBox="1"/>
+          <p:nvPr/>
+        </p:nvSpPr>
+        <p:spPr>
+          <a:xfrm>
+            <a:off x="7366590" y="4535422"/>
+            <a:ext cx="1931261" cy="292608"/>
+          </a:xfrm>
+          <a:prstGeom prst="rect">
+            <a:avLst/>
+          </a:prstGeom>
+          <a:noFill/>
+        </p:spPr>
+        <p:txBody>
+          <a:bodyPr wrap="square" lIns="0" tIns="0" rIns="0" bIns="0" anchor="t">
+            <a:spAutoFit/>
+          </a:bodyPr>
+          <a:lstStyle/>
+          <a:p>
+            <a:pPr algn="l">
+              <a:lnSpc>
+                <a:spcPct val="110000"/>
+              </a:lnSpc>
+              <a:spcAft>
+                <a:spcPts val="0"/>
+              </a:spcAft>
+            </a:pPr>
+            <a:r>
+              <a:rPr sz="1000" b="1" i="0">
+                <a:solidFill>
+                  <a:srgbClr val="314359"/>
+                </a:solidFill>
+                <a:latin typeface="Times New Roman"/>
+              </a:rPr>
+              <a:t>Zetong Liu</a:t>
+            </a:r>
+          </a:p>
+        </p:txBody>
+      </p:sp>
+      <p:sp>
+        <p:nvSpPr>
+          <p:cNvPr id="54" name="TextBox 53"/>
+          <p:cNvSpPr txBox="1"/>
+          <p:nvPr/>
+        </p:nvSpPr>
+        <p:spPr>
+          <a:xfrm>
+            <a:off x="7366590" y="4818277"/>
+            <a:ext cx="1931261" cy="234086"/>
+          </a:xfrm>
+          <a:prstGeom prst="rect">
+            <a:avLst/>
+          </a:prstGeom>
+          <a:noFill/>
+        </p:spPr>
+        <p:txBody>
+          <a:bodyPr wrap="square" lIns="0" tIns="0" rIns="0" bIns="0" anchor="t">
+            <a:spAutoFit/>
+          </a:bodyPr>
+          <a:lstStyle/>
+          <a:p>
+            <a:pPr algn="l">
+              <a:lnSpc>
+                <a:spcPct val="110000"/>
+              </a:lnSpc>
+              <a:spcAft>
+                <a:spcPts val="0"/>
+              </a:spcAft>
+            </a:pPr>
+            <a:r>
+              <a:rPr sz="680" b="1" i="0">
+                <a:solidFill>
+                  <a:srgbClr val="314359"/>
+                </a:solidFill>
+                <a:latin typeface="Arial"/>
+              </a:rPr>
+              <a:t>TECHNOLOGY</a:t>
+            </a:r>
+          </a:p>
+        </p:txBody>
+      </p:sp>
+      <p:sp>
+        <p:nvSpPr>
+          <p:cNvPr id="55" name="TextBox 54"/>
+          <p:cNvSpPr txBox="1"/>
+          <p:nvPr/>
+        </p:nvSpPr>
+        <p:spPr>
+          <a:xfrm>
+            <a:off x="7366590" y="5071870"/>
+            <a:ext cx="1916630" cy="682752"/>
+          </a:xfrm>
+          <a:prstGeom prst="rect">
+            <a:avLst/>
+          </a:prstGeom>
+          <a:noFill/>
+        </p:spPr>
+        <p:txBody>
+          <a:bodyPr wrap="square" lIns="0" tIns="0" rIns="0" bIns="0" anchor="t">
+            <a:spAutoFit/>
+          </a:bodyPr>
+          <a:lstStyle/>
+          <a:p>
+            <a:pPr algn="l">
+              <a:lnSpc>
+                <a:spcPct val="110000"/>
+              </a:lnSpc>
+              <a:spcAft>
+                <a:spcPts val="0"/>
+              </a:spcAft>
+            </a:pPr>
+            <a:r>
+              <a:rPr sz="720" b="0" i="0">
+                <a:solidFill>
+                  <a:srgbClr val="0E1620"/>
+                </a:solidFill>
+                <a:latin typeface="Arial"/>
+              </a:rPr>
+              <a:t>MSc applied &amp; computational mathematics, KTH; projects for the Swiss Finance Institute / EPFL.</a:t>
+            </a:r>
+          </a:p>
+        </p:txBody>
+      </p:sp>
+      <p:sp>
+        <p:nvSpPr>
+          <p:cNvPr id="56" name="Rectangle 55"/>
+          <p:cNvSpPr/>
+          <p:nvPr/>
+        </p:nvSpPr>
+        <p:spPr>
+          <a:xfrm>
+            <a:off x="438922" y="6164275"/>
+            <a:ext cx="8873559" cy="604723"/>
+          </a:xfrm>
+          <a:prstGeom prst="rect">
+            <a:avLst/>
+          </a:prstGeom>
+          <a:solidFill>
+            <a:srgbClr val="152130"/>
+          </a:solidFill>
+          <a:ln>
+            <a:noFill/>
+          </a:ln>
+          <a:effectLst/>
+        </p:spPr>
+        <p:style>
+          <a:lnRef idx="1">
+            <a:schemeClr val="accent1"/>
+          </a:lnRef>
+          <a:fillRef idx="3">
+            <a:schemeClr val="accent1"/>
+          </a:fillRef>
+          <a:effectRef idx="2">
+            <a:schemeClr val="accent1"/>
+          </a:effectRef>
+          <a:fontRef idx="minor">
+            <a:schemeClr val="lt1"/>
+          </a:fontRef>
+        </p:style>
+        <p:txBody>
+          <a:bodyPr rtlCol="0" anchor="ctr"/>
+          <a:lstStyle/>
+          <a:p>
+            <a:pPr algn="ctr"/>
+            <a:endParaRPr/>
+          </a:p>
+        </p:txBody>
+      </p:sp>
+      <p:sp>
+        <p:nvSpPr>
+          <p:cNvPr id="57" name="TextBox 56"/>
+          <p:cNvSpPr txBox="1"/>
+          <p:nvPr/>
+        </p:nvSpPr>
+        <p:spPr>
+          <a:xfrm>
+            <a:off x="585230" y="6164275"/>
+            <a:ext cx="8558998" cy="604723"/>
+          </a:xfrm>
+          <a:prstGeom prst="rect">
+            <a:avLst/>
+          </a:prstGeom>
+          <a:noFill/>
+        </p:spPr>
+        <p:txBody>
+          <a:bodyPr wrap="square" lIns="0" tIns="0" rIns="0" bIns="0" anchor="ctr">
+            <a:spAutoFit/>
+          </a:bodyPr>
+          <a:lstStyle/>
+          <a:p>
+            <a:pPr algn="l">
+              <a:lnSpc>
+                <a:spcPct val="110000"/>
+              </a:lnSpc>
+              <a:spcAft>
+                <a:spcPts val="0"/>
+              </a:spcAft>
+            </a:pPr>
+            <a:r>
+              <a:rPr sz="960" b="0" i="1">
+                <a:solidFill>
+                  <a:srgbClr val="FFFFFF"/>
+                </a:solidFill>
+                <a:latin typeface="Arial"/>
+              </a:rPr>
+              <a:t>Segregation of duties protects investors: operations, valuation and risk sit apart from investment decisions — with SEB (custody), MUFG (administration) and KPMG (audit) independently verifying every NAV and fee.</a:t>
             </a:r>
           </a:p>
         </p:txBody>
@@ -32749,6 +33550,321 @@
 </a:theme>
 </file>
 
+<file path=ppt/theme/theme2.xml><?xml version="1.0" encoding="utf-8"?>
+<a:theme xmlns:a="http://schemas.openxmlformats.org/drawingml/2006/main" name="Office Theme">
+  <a:themeElements>
+    <a:clrScheme name="Office">
+      <a:dk1>
+        <a:sysClr val="windowText" lastClr="000000"/>
+      </a:dk1>
+      <a:lt1>
+        <a:sysClr val="window" lastClr="FFFFFF"/>
+      </a:lt1>
+      <a:dk2>
+        <a:srgbClr val="0E2841"/>
+      </a:dk2>
+      <a:lt2>
+        <a:srgbClr val="E8E8E8"/>
+      </a:lt2>
+      <a:accent1>
+        <a:srgbClr val="156082"/>
+      </a:accent1>
+      <a:accent2>
+        <a:srgbClr val="E97132"/>
+      </a:accent2>
+      <a:accent3>
+        <a:srgbClr val="196B24"/>
+      </a:accent3>
+      <a:accent4>
+        <a:srgbClr val="0F9ED5"/>
+      </a:accent4>
+      <a:accent5>
+        <a:srgbClr val="A02B93"/>
+      </a:accent5>
+      <a:accent6>
+        <a:srgbClr val="4EA72E"/>
+      </a:accent6>
+      <a:hlink>
+        <a:srgbClr val="467886"/>
+      </a:hlink>
+      <a:folHlink>
+        <a:srgbClr val="96607D"/>
+      </a:folHlink>
+    </a:clrScheme>
+    <a:fontScheme name="Office">
+      <a:majorFont>
+        <a:latin typeface="Aptos Display" panose="02110004020202020204"/>
+        <a:ea typeface=""/>
+        <a:cs typeface=""/>
+        <a:font script="Jpan" typeface="游ゴシック Light"/>
+        <a:font script="Hang" typeface="맑은 고딕"/>
+        <a:font script="Hans" typeface="等线 Light"/>
+        <a:font script="Hant" typeface="新細明體"/>
+        <a:font script="Arab" typeface="Times New Roman"/>
+        <a:font script="Hebr" typeface="Times New Roman"/>
+        <a:font script="Thai" typeface="Angsana New"/>
+        <a:font script="Ethi" typeface="Nyala"/>
+        <a:font script="Beng" typeface="Vrinda"/>
+        <a:font script="Gujr" typeface="Shruti"/>
+        <a:font script="Khmr" typeface="MoolBoran"/>
+        <a:font script="Knda" typeface="Tunga"/>
+        <a:font script="Guru" typeface="Raavi"/>
+        <a:font script="Cans" typeface="Euphemia"/>
+        <a:font script="Cher" typeface="Plantagenet Cherokee"/>
+        <a:font script="Yiii" typeface="Microsoft Yi Baiti"/>
+        <a:font script="Tibt" typeface="Microsoft Himalaya"/>
+        <a:font script="Thaa" typeface="MV Boli"/>
+        <a:font script="Deva" typeface="Mangal"/>
+        <a:font script="Telu" typeface="Gautami"/>
+        <a:font script="Taml" typeface="Latha"/>
+        <a:font script="Syrc" typeface="Estrangelo Edessa"/>
+        <a:font script="Orya" typeface="Kalinga"/>
+        <a:font script="Mlym" typeface="Kartika"/>
+        <a:font script="Laoo" typeface="DokChampa"/>
+        <a:font script="Sinh" typeface="Iskoola Pota"/>
+        <a:font script="Mong" typeface="Mongolian Baiti"/>
+        <a:font script="Viet" typeface="Times New Roman"/>
+        <a:font script="Uigh" typeface="Microsoft Uighur"/>
+        <a:font script="Geor" typeface="Sylfaen"/>
+        <a:font script="Armn" typeface="Arial"/>
+        <a:font script="Bugi" typeface="Leelawadee UI"/>
+        <a:font script="Bopo" typeface="Microsoft JhengHei"/>
+        <a:font script="Java" typeface="Javanese Text"/>
+        <a:font script="Lisu" typeface="Segoe UI"/>
+        <a:font script="Mymr" typeface="Myanmar Text"/>
+        <a:font script="Nkoo" typeface="Ebrima"/>
+        <a:font script="Olck" typeface="Nirmala UI"/>
+        <a:font script="Osma" typeface="Ebrima"/>
+        <a:font script="Phag" typeface="Phagspa"/>
+        <a:font script="Syrn" typeface="Estrangelo Edessa"/>
+        <a:font script="Syrj" typeface="Estrangelo Edessa"/>
+        <a:font script="Syre" typeface="Estrangelo Edessa"/>
+        <a:font script="Sora" typeface="Nirmala UI"/>
+        <a:font script="Tale" typeface="Microsoft Tai Le"/>
+        <a:font script="Talu" typeface="Microsoft New Tai Lue"/>
+        <a:font script="Tfng" typeface="Ebrima"/>
+      </a:majorFont>
+      <a:minorFont>
+        <a:latin typeface="Aptos" panose="02110004020202020204"/>
+        <a:ea typeface=""/>
+        <a:cs typeface=""/>
+        <a:font script="Jpan" typeface="游ゴシック"/>
+        <a:font script="Hang" typeface="맑은 고딕"/>
+        <a:font script="Hans" typeface="等线"/>
+        <a:font script="Hant" typeface="新細明體"/>
+        <a:font script="Arab" typeface="Arial"/>
+        <a:font script="Hebr" typeface="Arial"/>
+        <a:font script="Thai" typeface="Cordia New"/>
+        <a:font script="Ethi" typeface="Nyala"/>
+        <a:font script="Beng" typeface="Vrinda"/>
+        <a:font script="Gujr" typeface="Shruti"/>
+        <a:font script="Khmr" typeface="DaunPenh"/>
+        <a:font script="Knda" typeface="Tunga"/>
+        <a:font script="Guru" typeface="Raavi"/>
+        <a:font script="Cans" typeface="Euphemia"/>
+        <a:font script="Cher" typeface="Plantagenet Cherokee"/>
+        <a:font script="Yiii" typeface="Microsoft Yi Baiti"/>
+        <a:font script="Tibt" typeface="Microsoft Himalaya"/>
+        <a:font script="Thaa" typeface="MV Boli"/>
+        <a:font script="Deva" typeface="Mangal"/>
+        <a:font script="Telu" typeface="Gautami"/>
+        <a:font script="Taml" typeface="Latha"/>
+        <a:font script="Syrc" typeface="Estrangelo Edessa"/>
+        <a:font script="Orya" typeface="Kalinga"/>
+        <a:font script="Mlym" typeface="Kartika"/>
+        <a:font script="Laoo" typeface="DokChampa"/>
+        <a:font script="Sinh" typeface="Iskoola Pota"/>
+        <a:font script="Mong" typeface="Mongolian Baiti"/>
+        <a:font script="Viet" typeface="Arial"/>
+        <a:font script="Uigh" typeface="Microsoft Uighur"/>
+        <a:font script="Geor" typeface="Sylfaen"/>
+        <a:font script="Armn" typeface="Arial"/>
+        <a:font script="Bugi" typeface="Leelawadee UI"/>
+        <a:font script="Bopo" typeface="Microsoft JhengHei"/>
+        <a:font script="Java" typeface="Javanese Text"/>
+        <a:font script="Lisu" typeface="Segoe UI"/>
+        <a:font script="Mymr" typeface="Myanmar Text"/>
+        <a:font script="Nkoo" typeface="Ebrima"/>
+        <a:font script="Olck" typeface="Nirmala UI"/>
+        <a:font script="Osma" typeface="Ebrima"/>
+        <a:font script="Phag" typeface="Phagspa"/>
+        <a:font script="Syrn" typeface="Estrangelo Edessa"/>
+        <a:font script="Syrj" typeface="Estrangelo Edessa"/>
+        <a:font script="Syre" typeface="Estrangelo Edessa"/>
+        <a:font script="Sora" typeface="Nirmala UI"/>
+        <a:font script="Tale" typeface="Microsoft Tai Le"/>
+        <a:font script="Talu" typeface="Microsoft New Tai Lue"/>
+        <a:font script="Tfng" typeface="Ebrima"/>
+      </a:minorFont>
+    </a:fontScheme>
+    <a:fmtScheme name="Office">
+      <a:fillStyleLst>
+        <a:solidFill>
+          <a:schemeClr val="phClr"/>
+        </a:solidFill>
+        <a:gradFill rotWithShape="1">
+          <a:gsLst>
+            <a:gs pos="0">
+              <a:schemeClr val="phClr">
+                <a:lumMod val="110000"/>
+                <a:satMod val="105000"/>
+                <a:tint val="67000"/>
+              </a:schemeClr>
+            </a:gs>
+            <a:gs pos="50000">
+              <a:schemeClr val="phClr">
+                <a:lumMod val="105000"/>
+                <a:satMod val="103000"/>
+                <a:tint val="73000"/>
+              </a:schemeClr>
+            </a:gs>
+            <a:gs pos="100000">
+              <a:schemeClr val="phClr">
+                <a:lumMod val="105000"/>
+                <a:satMod val="109000"/>
+                <a:tint val="81000"/>
+              </a:schemeClr>
+            </a:gs>
+          </a:gsLst>
+          <a:lin ang="5400000" scaled="0"/>
+        </a:gradFill>
+        <a:gradFill rotWithShape="1">
+          <a:gsLst>
+            <a:gs pos="0">
+              <a:schemeClr val="phClr">
+                <a:satMod val="103000"/>
+                <a:lumMod val="102000"/>
+                <a:tint val="94000"/>
+              </a:schemeClr>
+            </a:gs>
+            <a:gs pos="50000">
+              <a:schemeClr val="phClr">
+                <a:satMod val="110000"/>
+                <a:lumMod val="100000"/>
+                <a:shade val="100000"/>
+              </a:schemeClr>
+            </a:gs>
+            <a:gs pos="100000">
+              <a:schemeClr val="phClr">
+                <a:lumMod val="99000"/>
+                <a:satMod val="120000"/>
+                <a:shade val="78000"/>
+              </a:schemeClr>
+            </a:gs>
+          </a:gsLst>
+          <a:lin ang="5400000" scaled="0"/>
+        </a:gradFill>
+      </a:fillStyleLst>
+      <a:lnStyleLst>
+        <a:ln w="12700" cap="flat" cmpd="sng" algn="ctr">
+          <a:solidFill>
+            <a:schemeClr val="phClr"/>
+          </a:solidFill>
+          <a:prstDash val="solid"/>
+          <a:miter lim="800000"/>
+        </a:ln>
+        <a:ln w="19050" cap="flat" cmpd="sng" algn="ctr">
+          <a:solidFill>
+            <a:schemeClr val="phClr"/>
+          </a:solidFill>
+          <a:prstDash val="solid"/>
+          <a:miter lim="800000"/>
+        </a:ln>
+        <a:ln w="25400" cap="flat" cmpd="sng" algn="ctr">
+          <a:solidFill>
+            <a:schemeClr val="phClr"/>
+          </a:solidFill>
+          <a:prstDash val="solid"/>
+          <a:miter lim="800000"/>
+        </a:ln>
+      </a:lnStyleLst>
+      <a:effectStyleLst>
+        <a:effectStyle>
+          <a:effectLst/>
+        </a:effectStyle>
+        <a:effectStyle>
+          <a:effectLst/>
+        </a:effectStyle>
+        <a:effectStyle>
+          <a:effectLst>
+            <a:outerShdw blurRad="57150" dist="19050" dir="5400000" algn="ctr" rotWithShape="0">
+              <a:srgbClr val="000000">
+                <a:alpha val="63000"/>
+              </a:srgbClr>
+            </a:outerShdw>
+          </a:effectLst>
+        </a:effectStyle>
+      </a:effectStyleLst>
+      <a:bgFillStyleLst>
+        <a:solidFill>
+          <a:schemeClr val="phClr"/>
+        </a:solidFill>
+        <a:solidFill>
+          <a:schemeClr val="phClr">
+            <a:tint val="95000"/>
+            <a:satMod val="170000"/>
+          </a:schemeClr>
+        </a:solidFill>
+        <a:gradFill rotWithShape="1">
+          <a:gsLst>
+            <a:gs pos="0">
+              <a:schemeClr val="phClr">
+                <a:tint val="93000"/>
+                <a:satMod val="150000"/>
+                <a:shade val="98000"/>
+                <a:lumMod val="102000"/>
+              </a:schemeClr>
+            </a:gs>
+            <a:gs pos="50000">
+              <a:schemeClr val="phClr">
+                <a:tint val="98000"/>
+                <a:satMod val="130000"/>
+                <a:shade val="90000"/>
+                <a:lumMod val="103000"/>
+              </a:schemeClr>
+            </a:gs>
+            <a:gs pos="100000">
+              <a:schemeClr val="phClr">
+                <a:shade val="63000"/>
+                <a:satMod val="120000"/>
+              </a:schemeClr>
+            </a:gs>
+          </a:gsLst>
+          <a:lin ang="5400000" scaled="0"/>
+        </a:gradFill>
+      </a:bgFillStyleLst>
+    </a:fmtScheme>
+  </a:themeElements>
+  <a:objectDefaults>
+    <a:lnDef>
+      <a:spPr/>
+      <a:bodyPr/>
+      <a:lstStyle/>
+      <a:style>
+        <a:lnRef idx="2">
+          <a:schemeClr val="accent1"/>
+        </a:lnRef>
+        <a:fillRef idx="0">
+          <a:schemeClr val="accent1"/>
+        </a:fillRef>
+        <a:effectRef idx="1">
+          <a:schemeClr val="accent1"/>
+        </a:effectRef>
+        <a:fontRef idx="minor">
+          <a:schemeClr val="tx1"/>
+        </a:fontRef>
+      </a:style>
+    </a:lnDef>
+  </a:objectDefaults>
+  <a:extraClrSchemeLst/>
+  <a:extLst>
+    <a:ext uri="{05A4C25C-085E-4340-85A3-A5531E510DB2}">
+      <thm15:themeFamily xmlns:thm15="http://schemas.microsoft.com/office/thememl/2012/main" name="Office Theme" id="{2E142A2C-CD16-42D6-873A-C26D2A0506FA}" vid="{1BDDFF52-6CD6-40A5-AB3C-68EB2F1E4D0A}"/>
+    </a:ext>
+  </a:extLst>
+</a:theme>
+</file>
+
 <file path=customXml/item1.xml><?xml version="1.0" encoding="utf-8"?>
 <p:properties xmlns:p="http://schemas.microsoft.com/office/2006/metadata/properties" xmlns:xsi="http://www.w3.org/2001/XMLSchema-instance" xmlns:pc="http://schemas.microsoft.com/office/infopath/2007/PartnerControls">
   <documentManagement>
@@ -32761,15 +33877,6 @@
 </file>
 
 <file path=customXml/item2.xml><?xml version="1.0" encoding="utf-8"?>
-<?mso-contentType ?>
-<FormTemplates xmlns="http://schemas.microsoft.com/sharepoint/v3/contenttype/forms">
-  <Display>DocumentLibraryForm</Display>
-  <Edit>DocumentLibraryForm</Edit>
-  <New>DocumentLibraryForm</New>
-</FormTemplates>
-</file>
-
-<file path=customXml/item3.xml><?xml version="1.0" encoding="utf-8"?>
 <ct:contentTypeSchema xmlns:ct="http://schemas.microsoft.com/office/2006/metadata/contentType" xmlns:ma="http://schemas.microsoft.com/office/2006/metadata/properties/metaAttributes" ct:_="" ma:_="" ma:contentTypeName="dokument" ma:contentTypeID="0x0101006310709CD82A6741BE5E8B9BFA41D3C0" ma:contentTypeVersion="13" ma:contentTypeDescription="Skapa ett nytt dokument." ma:contentTypeScope="" ma:versionID="ea70554b132df1325a42697029f21ce4">
   <xsd:schema xmlns:xsd="http://www.w3.org/2001/XMLSchema" xmlns:xs="http://www.w3.org/2001/XMLSchema" xmlns:p="http://schemas.microsoft.com/office/2006/metadata/properties" xmlns:ns2="5e27318a-0826-4810-8988-cc3e5c2e3a20" xmlns:ns3="4124b31e-6573-4802-b7ef-311f4d26277d" targetNamespace="http://schemas.microsoft.com/office/2006/metadata/properties" ma:root="true" ma:fieldsID="cc21193230fc81558174baefa7095284" ns2:_="" ns3:_="">
     <xsd:import namespace="5e27318a-0826-4810-8988-cc3e5c2e3a20"/>
@@ -32976,6 +34083,15 @@
 </ct:contentTypeSchema>
 </file>
 
+<file path=customXml/item3.xml><?xml version="1.0" encoding="utf-8"?>
+<?mso-contentType ?>
+<FormTemplates xmlns="http://schemas.microsoft.com/sharepoint/v3/contenttype/forms">
+  <Display>DocumentLibraryForm</Display>
+  <Edit>DocumentLibraryForm</Edit>
+  <New>DocumentLibraryForm</New>
+</FormTemplates>
+</file>
+
 <file path=customXml/itemProps1.xml><?xml version="1.0" encoding="utf-8"?>
 <ds:datastoreItem xmlns:ds="http://schemas.openxmlformats.org/officeDocument/2006/customXml" ds:itemID="{AF09CEDA-D96E-4DE0-BD69-05CF6CA08BCA}">
   <ds:schemaRefs>
@@ -32988,14 +34104,6 @@
 </file>
 
 <file path=customXml/itemProps2.xml><?xml version="1.0" encoding="utf-8"?>
-<ds:datastoreItem xmlns:ds="http://schemas.openxmlformats.org/officeDocument/2006/customXml" ds:itemID="{2B94E596-B65B-4BD7-8F65-8C8EB76BBAFF}">
-  <ds:schemaRefs>
-    <ds:schemaRef ds:uri="http://schemas.microsoft.com/sharepoint/v3/contenttype/forms"/>
-  </ds:schemaRefs>
-</ds:datastoreItem>
-</file>
-
-<file path=customXml/itemProps3.xml><?xml version="1.0" encoding="utf-8"?>
 <ds:datastoreItem xmlns:ds="http://schemas.openxmlformats.org/officeDocument/2006/customXml" ds:itemID="{E9B4E500-B9BC-47AF-8F6B-49D89CFF5B82}">
   <ds:schemaRefs>
     <ds:schemaRef ds:uri="http://schemas.microsoft.com/office/2006/metadata/contentType"/>
@@ -33012,4 +34120,12 @@
     <ds:schemaRef ds:uri="http://schemas.microsoft.com/internal/obd"/>
   </ds:schemaRefs>
 </ds:datastoreItem>
+</file>
+
+<file path=customXml/itemProps3.xml><?xml version="1.0" encoding="utf-8"?>
+<ds:datastoreItem xmlns:ds="http://schemas.openxmlformats.org/officeDocument/2006/customXml" ds:itemID="{2B94E596-B65B-4BD7-8F65-8C8EB76BBAFF}">
+  <ds:schemaRefs>
+    <ds:schemaRef ds:uri="http://schemas.microsoft.com/sharepoint/v3/contenttype/forms"/>
+  </ds:schemaRefs>
+</ds:datastoreItem>
 </file>
--- a/Athanase_Endowment_Pitch_21pp.pptx
+++ b/Athanase_Endowment_Pitch_21pp.pptx
@@ -13,7 +13,7 @@
     <p:sldId id="263" r:id="rId7"/>
     <p:sldId id="267" r:id="rId8"/>
     <p:sldId id="284" r:id="rId9"/>
-    <p:sldId id="274" r:id="rId11"/>
+    <p:sldId id="271" r:id="rId10"/>
     <p:sldId id="278" r:id="rId12"/>
     <p:sldId id="339" r:id="rId13"/>
     <p:sldId id="279" r:id="rId14"/>
@@ -26483,7 +26483,7 @@
 </p:sld>
 </file>
 
-<file path=ppt/slides/slide7.xml><?xml version="1.0" encoding="utf-8"?>
+<file path=ppt/slides/slide6.xml><?xml version="1.0" encoding="utf-8"?>
 <p:sld xmlns:a="http://schemas.openxmlformats.org/drawingml/2006/main" xmlns:r="http://schemas.openxmlformats.org/officeDocument/2006/relationships" xmlns:p="http://schemas.openxmlformats.org/presentationml/2006/main">
   <p:cSld>
     <p:spTree>
@@ -26648,7 +26648,7 @@
                 </a:solidFill>
                 <a:latin typeface="Arial"/>
               </a:rPr>
-              <a:t>Table 3</a:t>
+              <a:t>Table 2</a:t>
             </a:r>
           </a:p>
         </p:txBody>
@@ -26735,7 +26735,7 @@
                 </a:solidFill>
                 <a:latin typeface="Times New Roman"/>
               </a:rPr>
-              <a:t>The evidence: constructive engagement works</a:t>
+              <a:t>Why mid-market is the sweet spot</a:t>
             </a:r>
           </a:p>
         </p:txBody>
@@ -26777,7 +26777,7 @@
                 </a:solidFill>
                 <a:latin typeface="Arial"/>
               </a:rPr>
-              <a:t>Three decades of peer-reviewed research — across the US and Europe — converge on the same finding.</a:t>
+              <a:t>Big enough to run well, small enough to change — and to grow. The engaged-ownership opportunity is richest in the middle.</a:t>
             </a:r>
           </a:p>
         </p:txBody>
@@ -26832,8 +26832,87 @@
         </p:nvSpPr>
         <p:spPr>
           <a:xfrm>
-            <a:off x="438922" y="2292096"/>
-            <a:ext cx="2450653" cy="390144"/>
+            <a:off x="402346" y="2292096"/>
+            <a:ext cx="1828845" cy="390144"/>
+          </a:xfrm>
+          <a:prstGeom prst="rect">
+            <a:avLst/>
+          </a:prstGeom>
+          <a:solidFill>
+            <a:srgbClr val="FFFFFF"/>
+          </a:solidFill>
+          <a:ln>
+            <a:noFill/>
+          </a:ln>
+          <a:effectLst/>
+        </p:spPr>
+        <p:style>
+          <a:lnRef idx="1">
+            <a:schemeClr val="accent1"/>
+          </a:lnRef>
+          <a:fillRef idx="3">
+            <a:schemeClr val="accent1"/>
+          </a:fillRef>
+          <a:effectRef idx="2">
+            <a:schemeClr val="accent1"/>
+          </a:effectRef>
+          <a:fontRef idx="minor">
+            <a:schemeClr val="lt1"/>
+          </a:fontRef>
+        </p:style>
+        <p:txBody>
+          <a:bodyPr rtlCol="0" anchor="ctr"/>
+          <a:lstStyle/>
+          <a:p>
+            <a:pPr algn="ctr"/>
+            <a:endParaRPr/>
+          </a:p>
+        </p:txBody>
+      </p:sp>
+      <p:sp>
+        <p:nvSpPr>
+          <p:cNvPr id="11" name="TextBox 10"/>
+          <p:cNvSpPr txBox="1"/>
+          <p:nvPr/>
+        </p:nvSpPr>
+        <p:spPr>
+          <a:xfrm>
+            <a:off x="490130" y="2292096"/>
+            <a:ext cx="1682538" cy="390144"/>
+          </a:xfrm>
+          <a:prstGeom prst="rect">
+            <a:avLst/>
+          </a:prstGeom>
+          <a:noFill/>
+        </p:spPr>
+        <p:txBody>
+          <a:bodyPr wrap="square" lIns="0" tIns="0" rIns="0" bIns="0" anchor="ctr">
+            <a:spAutoFit/>
+          </a:bodyPr>
+          <a:lstStyle/>
+          <a:p>
+            <a:pPr algn="l">
+              <a:lnSpc>
+                <a:spcPct val="105000"/>
+              </a:lnSpc>
+              <a:spcAft>
+                <a:spcPts val="0"/>
+              </a:spcAft>
+            </a:pPr>
+            <a:endParaRPr/>
+          </a:p>
+        </p:txBody>
+      </p:sp>
+      <p:sp>
+        <p:nvSpPr>
+          <p:cNvPr id="12" name="Rectangle 11"/>
+          <p:cNvSpPr/>
+          <p:nvPr/>
+        </p:nvSpPr>
+        <p:spPr>
+          <a:xfrm>
+            <a:off x="2231191" y="2292096"/>
+            <a:ext cx="2377499" cy="390144"/>
           </a:xfrm>
           <a:prstGeom prst="rect">
             <a:avLst/>
@@ -26871,14 +26950,14 @@
       </p:sp>
       <p:sp>
         <p:nvSpPr>
-          <p:cNvPr id="11" name="TextBox 10"/>
-          <p:cNvSpPr txBox="1"/>
-          <p:nvPr/>
-        </p:nvSpPr>
-        <p:spPr>
-          <a:xfrm>
-            <a:off x="534022" y="2292096"/>
-            <a:ext cx="2275084" cy="390144"/>
+          <p:cNvPr id="13" name="TextBox 12"/>
+          <p:cNvSpPr txBox="1"/>
+          <p:nvPr/>
+        </p:nvSpPr>
+        <p:spPr>
+          <a:xfrm>
+            <a:off x="2318976" y="2292096"/>
+            <a:ext cx="2231191" cy="390144"/>
           </a:xfrm>
           <a:prstGeom prst="rect">
             <a:avLst/>
@@ -26893,34 +26972,121 @@
           <a:p>
             <a:pPr algn="l">
               <a:lnSpc>
-                <a:spcPct val="108000"/>
+                <a:spcPct val="105000"/>
               </a:lnSpc>
               <a:spcAft>
                 <a:spcPts val="0"/>
               </a:spcAft>
             </a:pPr>
             <a:r>
-              <a:rPr sz="880" b="1" i="0">
+              <a:rPr sz="960" b="1" i="0">
                 <a:solidFill>
                   <a:srgbClr val="FFFFFF"/>
                 </a:solidFill>
                 <a:latin typeface="Arial"/>
               </a:rPr>
-              <a:t>Study</a:t>
-            </a:r>
-          </a:p>
-        </p:txBody>
-      </p:sp>
-      <p:sp>
-        <p:nvSpPr>
-          <p:cNvPr id="12" name="Rectangle 11"/>
+              <a:t>Small-cap</a:t>
+            </a:r>
+          </a:p>
+        </p:txBody>
+      </p:sp>
+      <p:sp>
+        <p:nvSpPr>
+          <p:cNvPr id="14" name="Rectangle 13"/>
           <p:cNvSpPr/>
           <p:nvPr/>
         </p:nvSpPr>
         <p:spPr>
           <a:xfrm>
-            <a:off x="2889576" y="2292096"/>
-            <a:ext cx="1865422" cy="390144"/>
+            <a:off x="4608691" y="2292096"/>
+            <a:ext cx="2560384" cy="390144"/>
+          </a:xfrm>
+          <a:prstGeom prst="rect">
+            <a:avLst/>
+          </a:prstGeom>
+          <a:solidFill>
+            <a:srgbClr val="152130"/>
+          </a:solidFill>
+          <a:ln>
+            <a:noFill/>
+          </a:ln>
+          <a:effectLst/>
+        </p:spPr>
+        <p:style>
+          <a:lnRef idx="1">
+            <a:schemeClr val="accent1"/>
+          </a:lnRef>
+          <a:fillRef idx="3">
+            <a:schemeClr val="accent1"/>
+          </a:fillRef>
+          <a:effectRef idx="2">
+            <a:schemeClr val="accent1"/>
+          </a:effectRef>
+          <a:fontRef idx="minor">
+            <a:schemeClr val="lt1"/>
+          </a:fontRef>
+        </p:style>
+        <p:txBody>
+          <a:bodyPr rtlCol="0" anchor="ctr"/>
+          <a:lstStyle/>
+          <a:p>
+            <a:pPr algn="ctr"/>
+            <a:endParaRPr/>
+          </a:p>
+        </p:txBody>
+      </p:sp>
+      <p:sp>
+        <p:nvSpPr>
+          <p:cNvPr id="15" name="TextBox 14"/>
+          <p:cNvSpPr txBox="1"/>
+          <p:nvPr/>
+        </p:nvSpPr>
+        <p:spPr>
+          <a:xfrm>
+            <a:off x="4696475" y="2292096"/>
+            <a:ext cx="2414076" cy="390144"/>
+          </a:xfrm>
+          <a:prstGeom prst="rect">
+            <a:avLst/>
+          </a:prstGeom>
+          <a:noFill/>
+        </p:spPr>
+        <p:txBody>
+          <a:bodyPr wrap="square" lIns="0" tIns="0" rIns="0" bIns="0" anchor="ctr">
+            <a:spAutoFit/>
+          </a:bodyPr>
+          <a:lstStyle/>
+          <a:p>
+            <a:pPr algn="l">
+              <a:lnSpc>
+                <a:spcPct val="105000"/>
+              </a:lnSpc>
+              <a:spcAft>
+                <a:spcPts val="0"/>
+              </a:spcAft>
+            </a:pPr>
+            <a:r>
+              <a:rPr sz="960" b="1" i="0">
+                <a:solidFill>
+                  <a:srgbClr val="FFFFFF"/>
+                </a:solidFill>
+                <a:latin typeface="Arial"/>
+              </a:rPr>
+              <a:t>Mid-market</a:t>
+            </a:r>
+          </a:p>
+        </p:txBody>
+      </p:sp>
+      <p:sp>
+        <p:nvSpPr>
+          <p:cNvPr id="16" name="Rectangle 15"/>
+          <p:cNvSpPr/>
+          <p:nvPr/>
+        </p:nvSpPr>
+        <p:spPr>
+          <a:xfrm>
+            <a:off x="7169075" y="2292096"/>
+            <a:ext cx="2121461" cy="390144"/>
           </a:xfrm>
           <a:prstGeom prst="rect">
             <a:avLst/>
@@ -26958,14 +27124,14 @@
       </p:sp>
       <p:sp>
         <p:nvSpPr>
-          <p:cNvPr id="13" name="TextBox 12"/>
-          <p:cNvSpPr txBox="1"/>
-          <p:nvPr/>
-        </p:nvSpPr>
-        <p:spPr>
-          <a:xfrm>
-            <a:off x="2984676" y="2292096"/>
-            <a:ext cx="1689853" cy="390144"/>
+          <p:cNvPr id="17" name="TextBox 16"/>
+          <p:cNvSpPr txBox="1"/>
+          <p:nvPr/>
+        </p:nvSpPr>
+        <p:spPr>
+          <a:xfrm>
+            <a:off x="7256859" y="2292096"/>
+            <a:ext cx="1975153" cy="390144"/>
           </a:xfrm>
           <a:prstGeom prst="rect">
             <a:avLst/>
@@ -26980,40 +27146,40 @@
           <a:p>
             <a:pPr algn="l">
               <a:lnSpc>
-                <a:spcPct val="108000"/>
+                <a:spcPct val="105000"/>
               </a:lnSpc>
               <a:spcAft>
                 <a:spcPts val="0"/>
               </a:spcAft>
             </a:pPr>
             <a:r>
-              <a:rPr sz="880" b="1" i="0">
+              <a:rPr sz="960" b="1" i="0">
                 <a:solidFill>
                   <a:srgbClr val="FFFFFF"/>
                 </a:solidFill>
                 <a:latin typeface="Arial"/>
               </a:rPr>
-              <a:t>What it covers</a:t>
-            </a:r>
-          </a:p>
-        </p:txBody>
-      </p:sp>
-      <p:sp>
-        <p:nvSpPr>
-          <p:cNvPr id="14" name="Rectangle 13"/>
+              <a:t>Large-cap</a:t>
+            </a:r>
+          </a:p>
+        </p:txBody>
+      </p:sp>
+      <p:sp>
+        <p:nvSpPr>
+          <p:cNvPr id="18" name="Rectangle 17"/>
           <p:cNvSpPr/>
           <p:nvPr/>
         </p:nvSpPr>
         <p:spPr>
           <a:xfrm>
-            <a:off x="4754998" y="2292096"/>
-            <a:ext cx="4579429" cy="390144"/>
+            <a:off x="402346" y="2682240"/>
+            <a:ext cx="1828845" cy="760780"/>
           </a:xfrm>
           <a:prstGeom prst="rect">
             <a:avLst/>
           </a:prstGeom>
           <a:solidFill>
-            <a:srgbClr val="314359"/>
+            <a:srgbClr val="FFFFFF"/>
           </a:solidFill>
           <a:ln>
             <a:noFill/>
@@ -27045,14 +27211,14 @@
       </p:sp>
       <p:sp>
         <p:nvSpPr>
-          <p:cNvPr id="15" name="TextBox 14"/>
-          <p:cNvSpPr txBox="1"/>
-          <p:nvPr/>
-        </p:nvSpPr>
-        <p:spPr>
-          <a:xfrm>
-            <a:off x="4850098" y="2292096"/>
-            <a:ext cx="4403860" cy="390144"/>
+          <p:cNvPr id="19" name="TextBox 18"/>
+          <p:cNvSpPr txBox="1"/>
+          <p:nvPr/>
+        </p:nvSpPr>
+        <p:spPr>
+          <a:xfrm>
+            <a:off x="490130" y="2682240"/>
+            <a:ext cx="1682538" cy="760780"/>
           </a:xfrm>
           <a:prstGeom prst="rect">
             <a:avLst/>
@@ -27067,7 +27233,7 @@
           <a:p>
             <a:pPr algn="l">
               <a:lnSpc>
-                <a:spcPct val="108000"/>
+                <a:spcPct val="105000"/>
               </a:lnSpc>
               <a:spcAft>
                 <a:spcPts val="0"/>
@@ -27076,25 +27242,112 @@
             <a:r>
               <a:rPr sz="880" b="1" i="0">
                 <a:solidFill>
-                  <a:srgbClr val="FFFFFF"/>
-                </a:solidFill>
-                <a:latin typeface="Arial"/>
-              </a:rPr>
-              <a:t>What it establishes</a:t>
-            </a:r>
-          </a:p>
-        </p:txBody>
-      </p:sp>
-      <p:sp>
-        <p:nvSpPr>
-          <p:cNvPr id="16" name="Rectangle 15"/>
+                  <a:srgbClr val="314359"/>
+                </a:solidFill>
+                <a:latin typeface="Arial"/>
+              </a:rPr>
+              <a:t>Organisational depth</a:t>
+            </a:r>
+          </a:p>
+        </p:txBody>
+      </p:sp>
+      <p:sp>
+        <p:nvSpPr>
+          <p:cNvPr id="20" name="Rectangle 19"/>
           <p:cNvSpPr/>
           <p:nvPr/>
         </p:nvSpPr>
         <p:spPr>
           <a:xfrm>
-            <a:off x="438922" y="2682240"/>
-            <a:ext cx="2450653" cy="838809"/>
+            <a:off x="2231191" y="2682240"/>
+            <a:ext cx="2377499" cy="760780"/>
+          </a:xfrm>
+          <a:prstGeom prst="rect">
+            <a:avLst/>
+          </a:prstGeom>
+          <a:solidFill>
+            <a:srgbClr val="FFFFFF"/>
+          </a:solidFill>
+          <a:ln>
+            <a:noFill/>
+          </a:ln>
+          <a:effectLst/>
+        </p:spPr>
+        <p:style>
+          <a:lnRef idx="1">
+            <a:schemeClr val="accent1"/>
+          </a:lnRef>
+          <a:fillRef idx="3">
+            <a:schemeClr val="accent1"/>
+          </a:fillRef>
+          <a:effectRef idx="2">
+            <a:schemeClr val="accent1"/>
+          </a:effectRef>
+          <a:fontRef idx="minor">
+            <a:schemeClr val="lt1"/>
+          </a:fontRef>
+        </p:style>
+        <p:txBody>
+          <a:bodyPr rtlCol="0" anchor="ctr"/>
+          <a:lstStyle/>
+          <a:p>
+            <a:pPr algn="ctr"/>
+            <a:endParaRPr/>
+          </a:p>
+        </p:txBody>
+      </p:sp>
+      <p:sp>
+        <p:nvSpPr>
+          <p:cNvPr id="21" name="TextBox 20"/>
+          <p:cNvSpPr txBox="1"/>
+          <p:nvPr/>
+        </p:nvSpPr>
+        <p:spPr>
+          <a:xfrm>
+            <a:off x="2318976" y="2682240"/>
+            <a:ext cx="2231191" cy="760780"/>
+          </a:xfrm>
+          <a:prstGeom prst="rect">
+            <a:avLst/>
+          </a:prstGeom>
+          <a:noFill/>
+        </p:spPr>
+        <p:txBody>
+          <a:bodyPr wrap="square" lIns="0" tIns="0" rIns="0" bIns="0" anchor="ctr">
+            <a:spAutoFit/>
+          </a:bodyPr>
+          <a:lstStyle/>
+          <a:p>
+            <a:pPr algn="l">
+              <a:lnSpc>
+                <a:spcPct val="105000"/>
+              </a:lnSpc>
+              <a:spcAft>
+                <a:spcPts val="0"/>
+              </a:spcAft>
+            </a:pPr>
+            <a:r>
+              <a:rPr sz="880" b="0" i="0">
+                <a:solidFill>
+                  <a:srgbClr val="556A83"/>
+                </a:solidFill>
+                <a:latin typeface="Arial"/>
+              </a:rPr>
+              <a:t>Often too thin to support a capable team</a:t>
+            </a:r>
+          </a:p>
+        </p:txBody>
+      </p:sp>
+      <p:sp>
+        <p:nvSpPr>
+          <p:cNvPr id="22" name="Rectangle 21"/>
+          <p:cNvSpPr/>
+          <p:nvPr/>
+        </p:nvSpPr>
+        <p:spPr>
+          <a:xfrm>
+            <a:off x="4608691" y="2682240"/>
+            <a:ext cx="2560384" cy="760780"/>
           </a:xfrm>
           <a:prstGeom prst="rect">
             <a:avLst/>
@@ -27132,14 +27385,14 @@
       </p:sp>
       <p:sp>
         <p:nvSpPr>
-          <p:cNvPr id="17" name="TextBox 16"/>
-          <p:cNvSpPr txBox="1"/>
-          <p:nvPr/>
-        </p:nvSpPr>
-        <p:spPr>
-          <a:xfrm>
-            <a:off x="534022" y="2682240"/>
-            <a:ext cx="2275084" cy="838809"/>
+          <p:cNvPr id="23" name="TextBox 22"/>
+          <p:cNvSpPr txBox="1"/>
+          <p:nvPr/>
+        </p:nvSpPr>
+        <p:spPr>
+          <a:xfrm>
+            <a:off x="4696475" y="2682240"/>
+            <a:ext cx="2414076" cy="760780"/>
           </a:xfrm>
           <a:prstGeom prst="rect">
             <a:avLst/>
@@ -27154,34 +27407,121 @@
           <a:p>
             <a:pPr algn="l">
               <a:lnSpc>
-                <a:spcPct val="108000"/>
+                <a:spcPct val="105000"/>
               </a:lnSpc>
               <a:spcAft>
                 <a:spcPts val="0"/>
               </a:spcAft>
             </a:pPr>
             <a:r>
-              <a:rPr sz="800" b="1" i="0">
+              <a:rPr sz="880" b="1" i="0">
                 <a:solidFill>
                   <a:srgbClr val="314359"/>
                 </a:solidFill>
                 <a:latin typeface="Arial"/>
               </a:rPr>
-              <a:t>Brav, Jiang, Partnoy &amp; Thomas (2008) · J. Finance</a:t>
-            </a:r>
-          </a:p>
-        </p:txBody>
-      </p:sp>
-      <p:sp>
-        <p:nvSpPr>
-          <p:cNvPr id="18" name="Rectangle 17"/>
+              <a:t>Enough structure for a real management team and processes</a:t>
+            </a:r>
+          </a:p>
+        </p:txBody>
+      </p:sp>
+      <p:sp>
+        <p:nvSpPr>
+          <p:cNvPr id="24" name="Rectangle 23"/>
           <p:cNvSpPr/>
           <p:nvPr/>
         </p:nvSpPr>
         <p:spPr>
           <a:xfrm>
-            <a:off x="2889576" y="2682240"/>
-            <a:ext cx="1865422" cy="838809"/>
+            <a:off x="7169075" y="2682240"/>
+            <a:ext cx="2121461" cy="760780"/>
+          </a:xfrm>
+          <a:prstGeom prst="rect">
+            <a:avLst/>
+          </a:prstGeom>
+          <a:solidFill>
+            <a:srgbClr val="FFFFFF"/>
+          </a:solidFill>
+          <a:ln>
+            <a:noFill/>
+          </a:ln>
+          <a:effectLst/>
+        </p:spPr>
+        <p:style>
+          <a:lnRef idx="1">
+            <a:schemeClr val="accent1"/>
+          </a:lnRef>
+          <a:fillRef idx="3">
+            <a:schemeClr val="accent1"/>
+          </a:fillRef>
+          <a:effectRef idx="2">
+            <a:schemeClr val="accent1"/>
+          </a:effectRef>
+          <a:fontRef idx="minor">
+            <a:schemeClr val="lt1"/>
+          </a:fontRef>
+        </p:style>
+        <p:txBody>
+          <a:bodyPr rtlCol="0" anchor="ctr"/>
+          <a:lstStyle/>
+          <a:p>
+            <a:pPr algn="ctr"/>
+            <a:endParaRPr/>
+          </a:p>
+        </p:txBody>
+      </p:sp>
+      <p:sp>
+        <p:nvSpPr>
+          <p:cNvPr id="25" name="TextBox 24"/>
+          <p:cNvSpPr txBox="1"/>
+          <p:nvPr/>
+        </p:nvSpPr>
+        <p:spPr>
+          <a:xfrm>
+            <a:off x="7256859" y="2682240"/>
+            <a:ext cx="1975153" cy="760780"/>
+          </a:xfrm>
+          <a:prstGeom prst="rect">
+            <a:avLst/>
+          </a:prstGeom>
+          <a:noFill/>
+        </p:spPr>
+        <p:txBody>
+          <a:bodyPr wrap="square" lIns="0" tIns="0" rIns="0" bIns="0" anchor="ctr">
+            <a:spAutoFit/>
+          </a:bodyPr>
+          <a:lstStyle/>
+          <a:p>
+            <a:pPr algn="l">
+              <a:lnSpc>
+                <a:spcPct val="105000"/>
+              </a:lnSpc>
+              <a:spcAft>
+                <a:spcPts val="0"/>
+              </a:spcAft>
+            </a:pPr>
+            <a:r>
+              <a:rPr sz="880" b="0" i="0">
+                <a:solidFill>
+                  <a:srgbClr val="556A83"/>
+                </a:solidFill>
+                <a:latin typeface="Arial"/>
+              </a:rPr>
+              <a:t>Deep, but layered and slow</a:t>
+            </a:r>
+          </a:p>
+        </p:txBody>
+      </p:sp>
+      <p:sp>
+        <p:nvSpPr>
+          <p:cNvPr id="26" name="Rectangle 25"/>
+          <p:cNvSpPr/>
+          <p:nvPr/>
+        </p:nvSpPr>
+        <p:spPr>
+          <a:xfrm>
+            <a:off x="402346" y="3443020"/>
+            <a:ext cx="1828845" cy="760780"/>
           </a:xfrm>
           <a:prstGeom prst="rect">
             <a:avLst/>
@@ -27219,14 +27559,14 @@
       </p:sp>
       <p:sp>
         <p:nvSpPr>
-          <p:cNvPr id="19" name="TextBox 18"/>
-          <p:cNvSpPr txBox="1"/>
-          <p:nvPr/>
-        </p:nvSpPr>
-        <p:spPr>
-          <a:xfrm>
-            <a:off x="2984676" y="2682240"/>
-            <a:ext cx="1689853" cy="838809"/>
+          <p:cNvPr id="27" name="TextBox 26"/>
+          <p:cNvSpPr txBox="1"/>
+          <p:nvPr/>
+        </p:nvSpPr>
+        <p:spPr>
+          <a:xfrm>
+            <a:off x="490130" y="3443020"/>
+            <a:ext cx="1682538" cy="760780"/>
           </a:xfrm>
           <a:prstGeom prst="rect">
             <a:avLst/>
@@ -27241,34 +27581,34 @@
           <a:p>
             <a:pPr algn="l">
               <a:lnSpc>
-                <a:spcPct val="108000"/>
+                <a:spcPct val="105000"/>
               </a:lnSpc>
               <a:spcAft>
                 <a:spcPts val="0"/>
               </a:spcAft>
             </a:pPr>
             <a:r>
-              <a:rPr sz="760" b="0" i="0">
-                <a:solidFill>
-                  <a:srgbClr val="0E1620"/>
-                </a:solidFill>
-                <a:latin typeface="Arial"/>
-              </a:rPr>
-              <a:t>1,000+ US engagements, 2001–06</a:t>
-            </a:r>
-          </a:p>
-        </p:txBody>
-      </p:sp>
-      <p:sp>
-        <p:nvSpPr>
-          <p:cNvPr id="20" name="Rectangle 19"/>
+              <a:rPr sz="880" b="1" i="0">
+                <a:solidFill>
+                  <a:srgbClr val="314359"/>
+                </a:solidFill>
+                <a:latin typeface="Arial"/>
+              </a:rPr>
+              <a:t>Growth runway</a:t>
+            </a:r>
+          </a:p>
+        </p:txBody>
+      </p:sp>
+      <p:sp>
+        <p:nvSpPr>
+          <p:cNvPr id="28" name="Rectangle 27"/>
           <p:cNvSpPr/>
           <p:nvPr/>
         </p:nvSpPr>
         <p:spPr>
           <a:xfrm>
-            <a:off x="4754998" y="2682240"/>
-            <a:ext cx="4579429" cy="838809"/>
+            <a:off x="2231191" y="3443020"/>
+            <a:ext cx="2377499" cy="760780"/>
           </a:xfrm>
           <a:prstGeom prst="rect">
             <a:avLst/>
@@ -27306,14 +27646,14 @@
       </p:sp>
       <p:sp>
         <p:nvSpPr>
-          <p:cNvPr id="21" name="TextBox 20"/>
-          <p:cNvSpPr txBox="1"/>
-          <p:nvPr/>
-        </p:nvSpPr>
-        <p:spPr>
-          <a:xfrm>
-            <a:off x="4850098" y="2682240"/>
-            <a:ext cx="4403860" cy="838809"/>
+          <p:cNvPr id="29" name="TextBox 28"/>
+          <p:cNvSpPr txBox="1"/>
+          <p:nvPr/>
+        </p:nvSpPr>
+        <p:spPr>
+          <a:xfrm>
+            <a:off x="2318976" y="3443020"/>
+            <a:ext cx="2231191" cy="760780"/>
           </a:xfrm>
           <a:prstGeom prst="rect">
             <a:avLst/>
@@ -27328,34 +27668,208 @@
           <a:p>
             <a:pPr algn="l">
               <a:lnSpc>
-                <a:spcPct val="108000"/>
+                <a:spcPct val="105000"/>
               </a:lnSpc>
               <a:spcAft>
                 <a:spcPts val="0"/>
               </a:spcAft>
             </a:pPr>
             <a:r>
-              <a:rPr sz="760" b="0" i="0">
-                <a:solidFill>
-                  <a:srgbClr val="0E1620"/>
-                </a:solidFill>
-                <a:latin typeface="Arial"/>
-              </a:rPr>
-              <a:t>Activists “seldom seek control” and are “nonconfrontational”; ~2/3 reach full or partial success; +7% announcement return with no reversal; payout, operating performance and CEO turnover all rise.</a:t>
-            </a:r>
-          </a:p>
-        </p:txBody>
-      </p:sp>
-      <p:sp>
-        <p:nvSpPr>
-          <p:cNvPr id="22" name="Rectangle 21"/>
+              <a:rPr sz="880" b="0" i="0">
+                <a:solidFill>
+                  <a:srgbClr val="556A83"/>
+                </a:solidFill>
+                <a:latin typeface="Arial"/>
+              </a:rPr>
+              <a:t>Long, but fragile and under-resourced</a:t>
+            </a:r>
+          </a:p>
+        </p:txBody>
+      </p:sp>
+      <p:sp>
+        <p:nvSpPr>
+          <p:cNvPr id="30" name="Rectangle 29"/>
           <p:cNvSpPr/>
           <p:nvPr/>
         </p:nvSpPr>
         <p:spPr>
           <a:xfrm>
-            <a:off x="438922" y="3521049"/>
-            <a:ext cx="2450653" cy="838809"/>
+            <a:off x="4608691" y="3443020"/>
+            <a:ext cx="2560384" cy="760780"/>
+          </a:xfrm>
+          <a:prstGeom prst="rect">
+            <a:avLst/>
+          </a:prstGeom>
+          <a:solidFill>
+            <a:srgbClr val="E2E5E9"/>
+          </a:solidFill>
+          <a:ln>
+            <a:noFill/>
+          </a:ln>
+          <a:effectLst/>
+        </p:spPr>
+        <p:style>
+          <a:lnRef idx="1">
+            <a:schemeClr val="accent1"/>
+          </a:lnRef>
+          <a:fillRef idx="3">
+            <a:schemeClr val="accent1"/>
+          </a:fillRef>
+          <a:effectRef idx="2">
+            <a:schemeClr val="accent1"/>
+          </a:effectRef>
+          <a:fontRef idx="minor">
+            <a:schemeClr val="lt1"/>
+          </a:fontRef>
+        </p:style>
+        <p:txBody>
+          <a:bodyPr rtlCol="0" anchor="ctr"/>
+          <a:lstStyle/>
+          <a:p>
+            <a:pPr algn="ctr"/>
+            <a:endParaRPr/>
+          </a:p>
+        </p:txBody>
+      </p:sp>
+      <p:sp>
+        <p:nvSpPr>
+          <p:cNvPr id="31" name="TextBox 30"/>
+          <p:cNvSpPr txBox="1"/>
+          <p:nvPr/>
+        </p:nvSpPr>
+        <p:spPr>
+          <a:xfrm>
+            <a:off x="4696475" y="3443020"/>
+            <a:ext cx="2414076" cy="760780"/>
+          </a:xfrm>
+          <a:prstGeom prst="rect">
+            <a:avLst/>
+          </a:prstGeom>
+          <a:noFill/>
+        </p:spPr>
+        <p:txBody>
+          <a:bodyPr wrap="square" lIns="0" tIns="0" rIns="0" bIns="0" anchor="ctr">
+            <a:spAutoFit/>
+          </a:bodyPr>
+          <a:lstStyle/>
+          <a:p>
+            <a:pPr algn="l">
+              <a:lnSpc>
+                <a:spcPct val="105000"/>
+              </a:lnSpc>
+              <a:spcAft>
+                <a:spcPts val="0"/>
+              </a:spcAft>
+            </a:pPr>
+            <a:r>
+              <a:rPr sz="880" b="1" i="0">
+                <a:solidFill>
+                  <a:srgbClr val="314359"/>
+                </a:solidFill>
+                <a:latin typeface="Arial"/>
+              </a:rPr>
+              <a:t>Still long — small enough to compound for years</a:t>
+            </a:r>
+          </a:p>
+        </p:txBody>
+      </p:sp>
+      <p:sp>
+        <p:nvSpPr>
+          <p:cNvPr id="32" name="Rectangle 31"/>
+          <p:cNvSpPr/>
+          <p:nvPr/>
+        </p:nvSpPr>
+        <p:spPr>
+          <a:xfrm>
+            <a:off x="7169075" y="3443020"/>
+            <a:ext cx="2121461" cy="760780"/>
+          </a:xfrm>
+          <a:prstGeom prst="rect">
+            <a:avLst/>
+          </a:prstGeom>
+          <a:solidFill>
+            <a:srgbClr val="F6F7F9"/>
+          </a:solidFill>
+          <a:ln>
+            <a:noFill/>
+          </a:ln>
+          <a:effectLst/>
+        </p:spPr>
+        <p:style>
+          <a:lnRef idx="1">
+            <a:schemeClr val="accent1"/>
+          </a:lnRef>
+          <a:fillRef idx="3">
+            <a:schemeClr val="accent1"/>
+          </a:fillRef>
+          <a:effectRef idx="2">
+            <a:schemeClr val="accent1"/>
+          </a:effectRef>
+          <a:fontRef idx="minor">
+            <a:schemeClr val="lt1"/>
+          </a:fontRef>
+        </p:style>
+        <p:txBody>
+          <a:bodyPr rtlCol="0" anchor="ctr"/>
+          <a:lstStyle/>
+          <a:p>
+            <a:pPr algn="ctr"/>
+            <a:endParaRPr/>
+          </a:p>
+        </p:txBody>
+      </p:sp>
+      <p:sp>
+        <p:nvSpPr>
+          <p:cNvPr id="33" name="TextBox 32"/>
+          <p:cNvSpPr txBox="1"/>
+          <p:nvPr/>
+        </p:nvSpPr>
+        <p:spPr>
+          <a:xfrm>
+            <a:off x="7256859" y="3443020"/>
+            <a:ext cx="1975153" cy="760780"/>
+          </a:xfrm>
+          <a:prstGeom prst="rect">
+            <a:avLst/>
+          </a:prstGeom>
+          <a:noFill/>
+        </p:spPr>
+        <p:txBody>
+          <a:bodyPr wrap="square" lIns="0" tIns="0" rIns="0" bIns="0" anchor="ctr">
+            <a:spAutoFit/>
+          </a:bodyPr>
+          <a:lstStyle/>
+          <a:p>
+            <a:pPr algn="l">
+              <a:lnSpc>
+                <a:spcPct val="105000"/>
+              </a:lnSpc>
+              <a:spcAft>
+                <a:spcPts val="0"/>
+              </a:spcAft>
+            </a:pPr>
+            <a:r>
+              <a:rPr sz="880" b="0" i="0">
+                <a:solidFill>
+                  <a:srgbClr val="556A83"/>
+                </a:solidFill>
+                <a:latin typeface="Arial"/>
+              </a:rPr>
+              <a:t>Largely played out; growth is incremental</a:t>
+            </a:r>
+          </a:p>
+        </p:txBody>
+      </p:sp>
+      <p:sp>
+        <p:nvSpPr>
+          <p:cNvPr id="34" name="Rectangle 33"/>
+          <p:cNvSpPr/>
+          <p:nvPr/>
+        </p:nvSpPr>
+        <p:spPr>
+          <a:xfrm>
+            <a:off x="402346" y="4203801"/>
+            <a:ext cx="1828845" cy="760780"/>
           </a:xfrm>
           <a:prstGeom prst="rect">
             <a:avLst/>
@@ -27393,14 +27907,14 @@
       </p:sp>
       <p:sp>
         <p:nvSpPr>
-          <p:cNvPr id="23" name="TextBox 22"/>
-          <p:cNvSpPr txBox="1"/>
-          <p:nvPr/>
-        </p:nvSpPr>
-        <p:spPr>
-          <a:xfrm>
-            <a:off x="534022" y="3521049"/>
-            <a:ext cx="2275084" cy="838809"/>
+          <p:cNvPr id="35" name="TextBox 34"/>
+          <p:cNvSpPr txBox="1"/>
+          <p:nvPr/>
+        </p:nvSpPr>
+        <p:spPr>
+          <a:xfrm>
+            <a:off x="490130" y="4203801"/>
+            <a:ext cx="1682538" cy="760780"/>
           </a:xfrm>
           <a:prstGeom prst="rect">
             <a:avLst/>
@@ -27415,34 +27929,34 @@
           <a:p>
             <a:pPr algn="l">
               <a:lnSpc>
-                <a:spcPct val="108000"/>
+                <a:spcPct val="105000"/>
               </a:lnSpc>
               <a:spcAft>
                 <a:spcPts val="0"/>
               </a:spcAft>
             </a:pPr>
             <a:r>
-              <a:rPr sz="800" b="1" i="0">
+              <a:rPr sz="880" b="1" i="0">
                 <a:solidFill>
                   <a:srgbClr val="314359"/>
                 </a:solidFill>
                 <a:latin typeface="Arial"/>
               </a:rPr>
-              <a:t>Becht, Franks, Grant &amp; Wagner (2017) · Rev. Fin. Studies</a:t>
-            </a:r>
-          </a:p>
-        </p:txBody>
-      </p:sp>
-      <p:sp>
-        <p:nvSpPr>
-          <p:cNvPr id="24" name="Rectangle 23"/>
+              <a:t>Speed of change</a:t>
+            </a:r>
+          </a:p>
+        </p:txBody>
+      </p:sp>
+      <p:sp>
+        <p:nvSpPr>
+          <p:cNvPr id="36" name="Rectangle 35"/>
           <p:cNvSpPr/>
           <p:nvPr/>
         </p:nvSpPr>
         <p:spPr>
           <a:xfrm>
-            <a:off x="2889576" y="3521049"/>
-            <a:ext cx="1865422" cy="838809"/>
+            <a:off x="2231191" y="4203801"/>
+            <a:ext cx="2377499" cy="760780"/>
           </a:xfrm>
           <a:prstGeom prst="rect">
             <a:avLst/>
@@ -27480,14 +27994,14 @@
       </p:sp>
       <p:sp>
         <p:nvSpPr>
-          <p:cNvPr id="25" name="TextBox 24"/>
-          <p:cNvSpPr txBox="1"/>
-          <p:nvPr/>
-        </p:nvSpPr>
-        <p:spPr>
-          <a:xfrm>
-            <a:off x="2984676" y="3521049"/>
-            <a:ext cx="1689853" cy="838809"/>
+          <p:cNvPr id="37" name="TextBox 36"/>
+          <p:cNvSpPr txBox="1"/>
+          <p:nvPr/>
+        </p:nvSpPr>
+        <p:spPr>
+          <a:xfrm>
+            <a:off x="2318976" y="4203801"/>
+            <a:ext cx="2231191" cy="760780"/>
           </a:xfrm>
           <a:prstGeom prst="rect">
             <a:avLst/>
@@ -27502,34 +28016,121 @@
           <a:p>
             <a:pPr algn="l">
               <a:lnSpc>
-                <a:spcPct val="108000"/>
+                <a:spcPct val="105000"/>
               </a:lnSpc>
               <a:spcAft>
                 <a:spcPts val="0"/>
               </a:spcAft>
             </a:pPr>
             <a:r>
-              <a:rPr sz="760" b="0" i="0">
-                <a:solidFill>
-                  <a:srgbClr val="0E1620"/>
-                </a:solidFill>
-                <a:latin typeface="Arial"/>
-              </a:rPr>
-              <a:t>1,740 engagements, 23 countries</a:t>
-            </a:r>
-          </a:p>
-        </p:txBody>
-      </p:sp>
-      <p:sp>
-        <p:nvSpPr>
-          <p:cNvPr id="26" name="Rectangle 25"/>
+              <a:rPr sz="880" b="0" i="0">
+                <a:solidFill>
+                  <a:srgbClr val="556A83"/>
+                </a:solidFill>
+                <a:latin typeface="Arial"/>
+              </a:rPr>
+              <a:t>Fast, but limited resources to execute</a:t>
+            </a:r>
+          </a:p>
+        </p:txBody>
+      </p:sp>
+      <p:sp>
+        <p:nvSpPr>
+          <p:cNvPr id="38" name="Rectangle 37"/>
           <p:cNvSpPr/>
           <p:nvPr/>
         </p:nvSpPr>
         <p:spPr>
           <a:xfrm>
-            <a:off x="4754998" y="3521049"/>
-            <a:ext cx="4579429" cy="838809"/>
+            <a:off x="4608691" y="4203801"/>
+            <a:ext cx="2560384" cy="760780"/>
+          </a:xfrm>
+          <a:prstGeom prst="rect">
+            <a:avLst/>
+          </a:prstGeom>
+          <a:solidFill>
+            <a:srgbClr val="F6F7F9"/>
+          </a:solidFill>
+          <a:ln>
+            <a:noFill/>
+          </a:ln>
+          <a:effectLst/>
+        </p:spPr>
+        <p:style>
+          <a:lnRef idx="1">
+            <a:schemeClr val="accent1"/>
+          </a:lnRef>
+          <a:fillRef idx="3">
+            <a:schemeClr val="accent1"/>
+          </a:fillRef>
+          <a:effectRef idx="2">
+            <a:schemeClr val="accent1"/>
+          </a:effectRef>
+          <a:fontRef idx="minor">
+            <a:schemeClr val="lt1"/>
+          </a:fontRef>
+        </p:style>
+        <p:txBody>
+          <a:bodyPr rtlCol="0" anchor="ctr"/>
+          <a:lstStyle/>
+          <a:p>
+            <a:pPr algn="ctr"/>
+            <a:endParaRPr/>
+          </a:p>
+        </p:txBody>
+      </p:sp>
+      <p:sp>
+        <p:nvSpPr>
+          <p:cNvPr id="39" name="TextBox 38"/>
+          <p:cNvSpPr txBox="1"/>
+          <p:nvPr/>
+        </p:nvSpPr>
+        <p:spPr>
+          <a:xfrm>
+            <a:off x="4696475" y="4203801"/>
+            <a:ext cx="2414076" cy="760780"/>
+          </a:xfrm>
+          <a:prstGeom prst="rect">
+            <a:avLst/>
+          </a:prstGeom>
+          <a:noFill/>
+        </p:spPr>
+        <p:txBody>
+          <a:bodyPr wrap="square" lIns="0" tIns="0" rIns="0" bIns="0" anchor="ctr">
+            <a:spAutoFit/>
+          </a:bodyPr>
+          <a:lstStyle/>
+          <a:p>
+            <a:pPr algn="l">
+              <a:lnSpc>
+                <a:spcPct val="105000"/>
+              </a:lnSpc>
+              <a:spcAft>
+                <a:spcPts val="0"/>
+              </a:spcAft>
+            </a:pPr>
+            <a:r>
+              <a:rPr sz="880" b="1" i="0">
+                <a:solidFill>
+                  <a:srgbClr val="314359"/>
+                </a:solidFill>
+                <a:latin typeface="Arial"/>
+              </a:rPr>
+              <a:t>Operational change lands within ~1.5 years</a:t>
+            </a:r>
+          </a:p>
+        </p:txBody>
+      </p:sp>
+      <p:sp>
+        <p:nvSpPr>
+          <p:cNvPr id="40" name="Rectangle 39"/>
+          <p:cNvSpPr/>
+          <p:nvPr/>
+        </p:nvSpPr>
+        <p:spPr>
+          <a:xfrm>
+            <a:off x="7169075" y="4203801"/>
+            <a:ext cx="2121461" cy="760780"/>
           </a:xfrm>
           <a:prstGeom prst="rect">
             <a:avLst/>
@@ -27567,14 +28168,14 @@
       </p:sp>
       <p:sp>
         <p:nvSpPr>
-          <p:cNvPr id="27" name="TextBox 26"/>
-          <p:cNvSpPr txBox="1"/>
-          <p:nvPr/>
-        </p:nvSpPr>
-        <p:spPr>
-          <a:xfrm>
-            <a:off x="4850098" y="3521049"/>
-            <a:ext cx="4403860" cy="838809"/>
+          <p:cNvPr id="41" name="TextBox 40"/>
+          <p:cNvSpPr txBox="1"/>
+          <p:nvPr/>
+        </p:nvSpPr>
+        <p:spPr>
+          <a:xfrm>
+            <a:off x="7256859" y="4203801"/>
+            <a:ext cx="1975153" cy="760780"/>
           </a:xfrm>
           <a:prstGeom prst="rect">
             <a:avLst/>
@@ -27589,34 +28190,34 @@
           <a:p>
             <a:pPr algn="l">
               <a:lnSpc>
-                <a:spcPct val="108000"/>
+                <a:spcPct val="105000"/>
               </a:lnSpc>
               <a:spcAft>
                 <a:spcPts val="0"/>
               </a:spcAft>
             </a:pPr>
             <a:r>
-              <a:rPr sz="760" b="0" i="0">
-                <a:solidFill>
-                  <a:srgbClr val="0E1620"/>
-                </a:solidFill>
-                <a:latin typeface="Arial"/>
-              </a:rPr>
-              <a:t>Outcomes and market responses are similar in Europe and North America — the playbook travels; board representation is a central, value-creating outcome.</a:t>
-            </a:r>
-          </a:p>
-        </p:txBody>
-      </p:sp>
-      <p:sp>
-        <p:nvSpPr>
-          <p:cNvPr id="28" name="Rectangle 27"/>
+              <a:rPr sz="880" b="0" i="0">
+                <a:solidFill>
+                  <a:srgbClr val="556A83"/>
+                </a:solidFill>
+                <a:latin typeface="Arial"/>
+              </a:rPr>
+              <a:t>Years to turn; entrenched complexity</a:t>
+            </a:r>
+          </a:p>
+        </p:txBody>
+      </p:sp>
+      <p:sp>
+        <p:nvSpPr>
+          <p:cNvPr id="42" name="Rectangle 41"/>
           <p:cNvSpPr/>
           <p:nvPr/>
         </p:nvSpPr>
         <p:spPr>
           <a:xfrm>
-            <a:off x="438922" y="4359859"/>
-            <a:ext cx="2450653" cy="838809"/>
+            <a:off x="402346" y="4964582"/>
+            <a:ext cx="1828845" cy="760780"/>
           </a:xfrm>
           <a:prstGeom prst="rect">
             <a:avLst/>
@@ -27654,14 +28255,14 @@
       </p:sp>
       <p:sp>
         <p:nvSpPr>
-          <p:cNvPr id="29" name="TextBox 28"/>
-          <p:cNvSpPr txBox="1"/>
-          <p:nvPr/>
-        </p:nvSpPr>
-        <p:spPr>
-          <a:xfrm>
-            <a:off x="534022" y="4359859"/>
-            <a:ext cx="2275084" cy="838809"/>
+          <p:cNvPr id="43" name="TextBox 42"/>
+          <p:cNvSpPr txBox="1"/>
+          <p:nvPr/>
+        </p:nvSpPr>
+        <p:spPr>
+          <a:xfrm>
+            <a:off x="490130" y="4964582"/>
+            <a:ext cx="1682538" cy="760780"/>
           </a:xfrm>
           <a:prstGeom prst="rect">
             <a:avLst/>
@@ -27676,34 +28277,34 @@
           <a:p>
             <a:pPr algn="l">
               <a:lnSpc>
-                <a:spcPct val="108000"/>
+                <a:spcPct val="105000"/>
               </a:lnSpc>
               <a:spcAft>
                 <a:spcPts val="0"/>
               </a:spcAft>
             </a:pPr>
             <a:r>
-              <a:rPr sz="800" b="1" i="0">
+              <a:rPr sz="880" b="1" i="0">
                 <a:solidFill>
                   <a:srgbClr val="314359"/>
                 </a:solidFill>
                 <a:latin typeface="Arial"/>
               </a:rPr>
-              <a:t>Becht, Franks, Mayer &amp; Rossi (2009) · Rev. Fin. Studies</a:t>
-            </a:r>
-          </a:p>
-        </p:txBody>
-      </p:sp>
-      <p:sp>
-        <p:nvSpPr>
-          <p:cNvPr id="30" name="Rectangle 29"/>
+              <a:t>Owner influence</a:t>
+            </a:r>
+          </a:p>
+        </p:txBody>
+      </p:sp>
+      <p:sp>
+        <p:nvSpPr>
+          <p:cNvPr id="44" name="Rectangle 43"/>
           <p:cNvSpPr/>
           <p:nvPr/>
         </p:nvSpPr>
         <p:spPr>
           <a:xfrm>
-            <a:off x="2889576" y="4359859"/>
-            <a:ext cx="1865422" cy="838809"/>
+            <a:off x="2231191" y="4964582"/>
+            <a:ext cx="2377499" cy="760780"/>
           </a:xfrm>
           <a:prstGeom prst="rect">
             <a:avLst/>
@@ -27741,14 +28342,14 @@
       </p:sp>
       <p:sp>
         <p:nvSpPr>
-          <p:cNvPr id="31" name="TextBox 30"/>
-          <p:cNvSpPr txBox="1"/>
-          <p:nvPr/>
-        </p:nvSpPr>
-        <p:spPr>
-          <a:xfrm>
-            <a:off x="2984676" y="4359859"/>
-            <a:ext cx="1689853" cy="838809"/>
+          <p:cNvPr id="45" name="TextBox 44"/>
+          <p:cNvSpPr txBox="1"/>
+          <p:nvPr/>
+        </p:nvSpPr>
+        <p:spPr>
+          <a:xfrm>
+            <a:off x="2318976" y="4964582"/>
+            <a:ext cx="2231191" cy="760780"/>
           </a:xfrm>
           <a:prstGeom prst="rect">
             <a:avLst/>
@@ -27763,34 +28364,121 @@
           <a:p>
             <a:pPr algn="l">
               <a:lnSpc>
-                <a:spcPct val="108000"/>
+                <a:spcPct val="105000"/>
               </a:lnSpc>
               <a:spcAft>
                 <a:spcPts val="0"/>
               </a:spcAft>
             </a:pPr>
             <a:r>
-              <a:rPr sz="760" b="0" i="0">
-                <a:solidFill>
-                  <a:srgbClr val="0E1620"/>
-                </a:solidFill>
-                <a:latin typeface="Arial"/>
-              </a:rPr>
-              <a:t>Clinical study — Hermes UK Focus Fund</a:t>
-            </a:r>
-          </a:p>
-        </p:txBody>
-      </p:sp>
-      <p:sp>
-        <p:nvSpPr>
-          <p:cNvPr id="32" name="Rectangle 31"/>
+              <a:rPr sz="880" b="0" i="0">
+                <a:solidFill>
+                  <a:srgbClr val="556A83"/>
+                </a:solidFill>
+                <a:latin typeface="Arial"/>
+              </a:rPr>
+              <a:t>High, but little to work with</a:t>
+            </a:r>
+          </a:p>
+        </p:txBody>
+      </p:sp>
+      <p:sp>
+        <p:nvSpPr>
+          <p:cNvPr id="46" name="Rectangle 45"/>
           <p:cNvSpPr/>
           <p:nvPr/>
         </p:nvSpPr>
         <p:spPr>
           <a:xfrm>
-            <a:off x="4754998" y="4359859"/>
-            <a:ext cx="4579429" cy="838809"/>
+            <a:off x="4608691" y="4964582"/>
+            <a:ext cx="2560384" cy="760780"/>
+          </a:xfrm>
+          <a:prstGeom prst="rect">
+            <a:avLst/>
+          </a:prstGeom>
+          <a:solidFill>
+            <a:srgbClr val="E2E5E9"/>
+          </a:solidFill>
+          <a:ln>
+            <a:noFill/>
+          </a:ln>
+          <a:effectLst/>
+        </p:spPr>
+        <p:style>
+          <a:lnRef idx="1">
+            <a:schemeClr val="accent1"/>
+          </a:lnRef>
+          <a:fillRef idx="3">
+            <a:schemeClr val="accent1"/>
+          </a:fillRef>
+          <a:effectRef idx="2">
+            <a:schemeClr val="accent1"/>
+          </a:effectRef>
+          <a:fontRef idx="minor">
+            <a:schemeClr val="lt1"/>
+          </a:fontRef>
+        </p:style>
+        <p:txBody>
+          <a:bodyPr rtlCol="0" anchor="ctr"/>
+          <a:lstStyle/>
+          <a:p>
+            <a:pPr algn="ctr"/>
+            <a:endParaRPr/>
+          </a:p>
+        </p:txBody>
+      </p:sp>
+      <p:sp>
+        <p:nvSpPr>
+          <p:cNvPr id="47" name="TextBox 46"/>
+          <p:cNvSpPr txBox="1"/>
+          <p:nvPr/>
+        </p:nvSpPr>
+        <p:spPr>
+          <a:xfrm>
+            <a:off x="4696475" y="4964582"/>
+            <a:ext cx="2414076" cy="760780"/>
+          </a:xfrm>
+          <a:prstGeom prst="rect">
+            <a:avLst/>
+          </a:prstGeom>
+          <a:noFill/>
+        </p:spPr>
+        <p:txBody>
+          <a:bodyPr wrap="square" lIns="0" tIns="0" rIns="0" bIns="0" anchor="ctr">
+            <a:spAutoFit/>
+          </a:bodyPr>
+          <a:lstStyle/>
+          <a:p>
+            <a:pPr algn="l">
+              <a:lnSpc>
+                <a:spcPct val="105000"/>
+              </a:lnSpc>
+              <a:spcAft>
+                <a:spcPts val="0"/>
+              </a:spcAft>
+            </a:pPr>
+            <a:r>
+              <a:rPr sz="880" b="1" i="0">
+                <a:solidFill>
+                  <a:srgbClr val="314359"/>
+                </a:solidFill>
+                <a:latin typeface="Arial"/>
+              </a:rPr>
+              <a:t>A board seat genuinely moves the outcome</a:t>
+            </a:r>
+          </a:p>
+        </p:txBody>
+      </p:sp>
+      <p:sp>
+        <p:nvSpPr>
+          <p:cNvPr id="48" name="Rectangle 47"/>
+          <p:cNvSpPr/>
+          <p:nvPr/>
+        </p:nvSpPr>
+        <p:spPr>
+          <a:xfrm>
+            <a:off x="7169075" y="4964582"/>
+            <a:ext cx="2121461" cy="760780"/>
           </a:xfrm>
           <a:prstGeom prst="rect">
             <a:avLst/>
@@ -27828,14 +28516,14 @@
       </p:sp>
       <p:sp>
         <p:nvSpPr>
-          <p:cNvPr id="33" name="TextBox 32"/>
-          <p:cNvSpPr txBox="1"/>
-          <p:nvPr/>
-        </p:nvSpPr>
-        <p:spPr>
-          <a:xfrm>
-            <a:off x="4850098" y="4359859"/>
-            <a:ext cx="4403860" cy="838809"/>
+          <p:cNvPr id="49" name="TextBox 48"/>
+          <p:cNvSpPr txBox="1"/>
+          <p:nvPr/>
+        </p:nvSpPr>
+        <p:spPr>
+          <a:xfrm>
+            <a:off x="7256859" y="4964582"/>
+            <a:ext cx="1975153" cy="760780"/>
           </a:xfrm>
           <a:prstGeom prst="rect">
             <a:avLst/>
@@ -27850,584 +28538,104 @@
           <a:p>
             <a:pPr algn="l">
               <a:lnSpc>
-                <a:spcPct val="108000"/>
+                <a:spcPct val="105000"/>
               </a:lnSpc>
               <a:spcAft>
                 <a:spcPts val="0"/>
               </a:spcAft>
             </a:pPr>
             <a:r>
+              <a:rPr sz="880" b="0" i="0">
+                <a:solidFill>
+                  <a:srgbClr val="556A83"/>
+                </a:solidFill>
+                <a:latin typeface="Arial"/>
+              </a:rPr>
+              <a:t>Diluted; one owner rarely shifts the agenda</a:t>
+            </a:r>
+          </a:p>
+        </p:txBody>
+      </p:sp>
+      <p:sp>
+        <p:nvSpPr>
+          <p:cNvPr id="50" name="TextBox 49"/>
+          <p:cNvSpPr txBox="1"/>
+          <p:nvPr/>
+        </p:nvSpPr>
+        <p:spPr>
+          <a:xfrm>
+            <a:off x="402346" y="5861913"/>
+            <a:ext cx="8924767" cy="409651"/>
+          </a:xfrm>
+          <a:prstGeom prst="rect">
+            <a:avLst/>
+          </a:prstGeom>
+          <a:noFill/>
+        </p:spPr>
+        <p:txBody>
+          <a:bodyPr wrap="square" lIns="0" tIns="0" rIns="0" bIns="0" anchor="t">
+            <a:spAutoFit/>
+          </a:bodyPr>
+          <a:lstStyle/>
+          <a:p>
+            <a:pPr algn="l">
+              <a:lnSpc>
+                <a:spcPct val="110000"/>
+              </a:lnSpc>
+              <a:spcAft>
+                <a:spcPts val="0"/>
+              </a:spcAft>
+            </a:pPr>
+            <a:r>
+              <a:rPr sz="1040" b="0" i="1">
+                <a:solidFill>
+                  <a:srgbClr val="314359"/>
+                </a:solidFill>
+                <a:latin typeface="Arial"/>
+              </a:rPr>
+              <a:t>Mid-market companies are run well enough to be worth owning, yet small enough that an engaged owner can still change — and grow — them.</a:t>
+            </a:r>
+          </a:p>
+        </p:txBody>
+      </p:sp>
+      <p:sp>
+        <p:nvSpPr>
+          <p:cNvPr id="51" name="TextBox 50"/>
+          <p:cNvSpPr txBox="1"/>
+          <p:nvPr/>
+        </p:nvSpPr>
+        <p:spPr>
+          <a:xfrm>
+            <a:off x="402346" y="6369100"/>
+            <a:ext cx="8924767" cy="585216"/>
+          </a:xfrm>
+          <a:prstGeom prst="rect">
+            <a:avLst/>
+          </a:prstGeom>
+          <a:noFill/>
+        </p:spPr>
+        <p:txBody>
+          <a:bodyPr wrap="square" lIns="0" tIns="0" rIns="0" bIns="0" anchor="t">
+            <a:spAutoFit/>
+          </a:bodyPr>
+          <a:lstStyle/>
+          <a:p>
+            <a:pPr algn="l">
+              <a:lnSpc>
+                <a:spcPct val="116000"/>
+              </a:lnSpc>
+              <a:spcAft>
+                <a:spcPts val="0"/>
+              </a:spcAft>
+            </a:pPr>
+            <a:r>
               <a:rPr sz="760" b="0" i="0">
                 <a:solidFill>
-                  <a:srgbClr val="0E1620"/>
-                </a:solidFill>
-                <a:latin typeface="Arial"/>
-              </a:rPr>
-              <a:t>Returns come from engagement, not stock-picking — via private, cooperative interventions: refocus on the core, return cash, change the CEO / chair.</a:t>
-            </a:r>
-          </a:p>
-        </p:txBody>
-      </p:sp>
-      <p:sp>
-        <p:nvSpPr>
-          <p:cNvPr id="34" name="Rectangle 33"/>
-          <p:cNvSpPr/>
-          <p:nvPr/>
-        </p:nvSpPr>
-        <p:spPr>
-          <a:xfrm>
-            <a:off x="438922" y="5198668"/>
-            <a:ext cx="2450653" cy="838809"/>
-          </a:xfrm>
-          <a:prstGeom prst="rect">
-            <a:avLst/>
-          </a:prstGeom>
-          <a:solidFill>
-            <a:srgbClr val="FFFFFF"/>
-          </a:solidFill>
-          <a:ln>
-            <a:noFill/>
-          </a:ln>
-          <a:effectLst/>
-        </p:spPr>
-        <p:style>
-          <a:lnRef idx="1">
-            <a:schemeClr val="accent1"/>
-          </a:lnRef>
-          <a:fillRef idx="3">
-            <a:schemeClr val="accent1"/>
-          </a:fillRef>
-          <a:effectRef idx="2">
-            <a:schemeClr val="accent1"/>
-          </a:effectRef>
-          <a:fontRef idx="minor">
-            <a:schemeClr val="lt1"/>
-          </a:fontRef>
-        </p:style>
-        <p:txBody>
-          <a:bodyPr rtlCol="0" anchor="ctr"/>
-          <a:lstStyle/>
-          <a:p>
-            <a:pPr algn="ctr"/>
-            <a:endParaRPr/>
-          </a:p>
-        </p:txBody>
-      </p:sp>
-      <p:sp>
-        <p:nvSpPr>
-          <p:cNvPr id="35" name="TextBox 34"/>
-          <p:cNvSpPr txBox="1"/>
-          <p:nvPr/>
-        </p:nvSpPr>
-        <p:spPr>
-          <a:xfrm>
-            <a:off x="534022" y="5198668"/>
-            <a:ext cx="2275084" cy="838809"/>
-          </a:xfrm>
-          <a:prstGeom prst="rect">
-            <a:avLst/>
-          </a:prstGeom>
-          <a:noFill/>
-        </p:spPr>
-        <p:txBody>
-          <a:bodyPr wrap="square" lIns="0" tIns="0" rIns="0" bIns="0" anchor="ctr">
-            <a:spAutoFit/>
-          </a:bodyPr>
-          <a:lstStyle/>
-          <a:p>
-            <a:pPr algn="l">
-              <a:lnSpc>
-                <a:spcPct val="108000"/>
-              </a:lnSpc>
-              <a:spcAft>
-                <a:spcPts val="0"/>
-              </a:spcAft>
-            </a:pPr>
-            <a:r>
-              <a:rPr sz="800" b="1" i="0">
-                <a:solidFill>
-                  <a:srgbClr val="314359"/>
-                </a:solidFill>
-                <a:latin typeface="Arial"/>
-              </a:rPr>
-              <a:t>Bebchuk, Brav, Jiang &amp; Keusch (2020) · J. Fin. Economics</a:t>
-            </a:r>
-          </a:p>
-        </p:txBody>
-      </p:sp>
-      <p:sp>
-        <p:nvSpPr>
-          <p:cNvPr id="36" name="Rectangle 35"/>
-          <p:cNvSpPr/>
-          <p:nvPr/>
-        </p:nvSpPr>
-        <p:spPr>
-          <a:xfrm>
-            <a:off x="2889576" y="5198668"/>
-            <a:ext cx="1865422" cy="838809"/>
-          </a:xfrm>
-          <a:prstGeom prst="rect">
-            <a:avLst/>
-          </a:prstGeom>
-          <a:solidFill>
-            <a:srgbClr val="FFFFFF"/>
-          </a:solidFill>
-          <a:ln>
-            <a:noFill/>
-          </a:ln>
-          <a:effectLst/>
-        </p:spPr>
-        <p:style>
-          <a:lnRef idx="1">
-            <a:schemeClr val="accent1"/>
-          </a:lnRef>
-          <a:fillRef idx="3">
-            <a:schemeClr val="accent1"/>
-          </a:fillRef>
-          <a:effectRef idx="2">
-            <a:schemeClr val="accent1"/>
-          </a:effectRef>
-          <a:fontRef idx="minor">
-            <a:schemeClr val="lt1"/>
-          </a:fontRef>
-        </p:style>
-        <p:txBody>
-          <a:bodyPr rtlCol="0" anchor="ctr"/>
-          <a:lstStyle/>
-          <a:p>
-            <a:pPr algn="ctr"/>
-            <a:endParaRPr/>
-          </a:p>
-        </p:txBody>
-      </p:sp>
-      <p:sp>
-        <p:nvSpPr>
-          <p:cNvPr id="37" name="TextBox 36"/>
-          <p:cNvSpPr txBox="1"/>
-          <p:nvPr/>
-        </p:nvSpPr>
-        <p:spPr>
-          <a:xfrm>
-            <a:off x="2984676" y="5198668"/>
-            <a:ext cx="1689853" cy="838809"/>
-          </a:xfrm>
-          <a:prstGeom prst="rect">
-            <a:avLst/>
-          </a:prstGeom>
-          <a:noFill/>
-        </p:spPr>
-        <p:txBody>
-          <a:bodyPr wrap="square" lIns="0" tIns="0" rIns="0" bIns="0" anchor="ctr">
-            <a:spAutoFit/>
-          </a:bodyPr>
-          <a:lstStyle/>
-          <a:p>
-            <a:pPr algn="l">
-              <a:lnSpc>
-                <a:spcPct val="108000"/>
-              </a:lnSpc>
-              <a:spcAft>
-                <a:spcPts val="0"/>
-              </a:spcAft>
-            </a:pPr>
-            <a:r>
-              <a:rPr sz="760" b="0" i="0">
-                <a:solidFill>
-                  <a:srgbClr val="0E1620"/>
-                </a:solidFill>
-                <a:latin typeface="Arial"/>
-              </a:rPr>
-              <a:t>US settlement agreements</a:t>
-            </a:r>
-          </a:p>
-        </p:txBody>
-      </p:sp>
-      <p:sp>
-        <p:nvSpPr>
-          <p:cNvPr id="38" name="Rectangle 37"/>
-          <p:cNvSpPr/>
-          <p:nvPr/>
-        </p:nvSpPr>
-        <p:spPr>
-          <a:xfrm>
-            <a:off x="4754998" y="5198668"/>
-            <a:ext cx="4579429" cy="838809"/>
-          </a:xfrm>
-          <a:prstGeom prst="rect">
-            <a:avLst/>
-          </a:prstGeom>
-          <a:solidFill>
-            <a:srgbClr val="FFFFFF"/>
-          </a:solidFill>
-          <a:ln>
-            <a:noFill/>
-          </a:ln>
-          <a:effectLst/>
-        </p:spPr>
-        <p:style>
-          <a:lnRef idx="1">
-            <a:schemeClr val="accent1"/>
-          </a:lnRef>
-          <a:fillRef idx="3">
-            <a:schemeClr val="accent1"/>
-          </a:fillRef>
-          <a:effectRef idx="2">
-            <a:schemeClr val="accent1"/>
-          </a:effectRef>
-          <a:fontRef idx="minor">
-            <a:schemeClr val="lt1"/>
-          </a:fontRef>
-        </p:style>
-        <p:txBody>
-          <a:bodyPr rtlCol="0" anchor="ctr"/>
-          <a:lstStyle/>
-          <a:p>
-            <a:pPr algn="ctr"/>
-            <a:endParaRPr/>
-          </a:p>
-        </p:txBody>
-      </p:sp>
-      <p:sp>
-        <p:nvSpPr>
-          <p:cNvPr id="39" name="TextBox 38"/>
-          <p:cNvSpPr txBox="1"/>
-          <p:nvPr/>
-        </p:nvSpPr>
-        <p:spPr>
-          <a:xfrm>
-            <a:off x="4850098" y="5198668"/>
-            <a:ext cx="4403860" cy="838809"/>
-          </a:xfrm>
-          <a:prstGeom prst="rect">
-            <a:avLst/>
-          </a:prstGeom>
-          <a:noFill/>
-        </p:spPr>
-        <p:txBody>
-          <a:bodyPr wrap="square" lIns="0" tIns="0" rIns="0" bIns="0" anchor="ctr">
-            <a:spAutoFit/>
-          </a:bodyPr>
-          <a:lstStyle/>
-          <a:p>
-            <a:pPr algn="l">
-              <a:lnSpc>
-                <a:spcPct val="108000"/>
-              </a:lnSpc>
-              <a:spcAft>
-                <a:spcPts val="0"/>
-              </a:spcAft>
-            </a:pPr>
-            <a:r>
-              <a:rPr sz="760" b="0" i="0">
-                <a:solidFill>
-                  <a:srgbClr val="0E1620"/>
-                </a:solidFill>
-                <a:latin typeface="Arial"/>
-              </a:rPr>
-              <a:t>Boards settle by granting board seats — the intermediary step to the operational and leadership change activists seek. Exactly the precondition model.</a:t>
-            </a:r>
-          </a:p>
-        </p:txBody>
-      </p:sp>
-      <p:sp>
-        <p:nvSpPr>
-          <p:cNvPr id="40" name="Rectangle 39"/>
-          <p:cNvSpPr/>
-          <p:nvPr/>
-        </p:nvSpPr>
-        <p:spPr>
-          <a:xfrm>
-            <a:off x="438922" y="6037478"/>
-            <a:ext cx="2450653" cy="838809"/>
-          </a:xfrm>
-          <a:prstGeom prst="rect">
-            <a:avLst/>
-          </a:prstGeom>
-          <a:solidFill>
-            <a:srgbClr val="F6F7F9"/>
-          </a:solidFill>
-          <a:ln>
-            <a:noFill/>
-          </a:ln>
-          <a:effectLst/>
-        </p:spPr>
-        <p:style>
-          <a:lnRef idx="1">
-            <a:schemeClr val="accent1"/>
-          </a:lnRef>
-          <a:fillRef idx="3">
-            <a:schemeClr val="accent1"/>
-          </a:fillRef>
-          <a:effectRef idx="2">
-            <a:schemeClr val="accent1"/>
-          </a:effectRef>
-          <a:fontRef idx="minor">
-            <a:schemeClr val="lt1"/>
-          </a:fontRef>
-        </p:style>
-        <p:txBody>
-          <a:bodyPr rtlCol="0" anchor="ctr"/>
-          <a:lstStyle/>
-          <a:p>
-            <a:pPr algn="ctr"/>
-            <a:endParaRPr/>
-          </a:p>
-        </p:txBody>
-      </p:sp>
-      <p:sp>
-        <p:nvSpPr>
-          <p:cNvPr id="41" name="TextBox 40"/>
-          <p:cNvSpPr txBox="1"/>
-          <p:nvPr/>
-        </p:nvSpPr>
-        <p:spPr>
-          <a:xfrm>
-            <a:off x="534022" y="6037478"/>
-            <a:ext cx="2275084" cy="838809"/>
-          </a:xfrm>
-          <a:prstGeom prst="rect">
-            <a:avLst/>
-          </a:prstGeom>
-          <a:noFill/>
-        </p:spPr>
-        <p:txBody>
-          <a:bodyPr wrap="square" lIns="0" tIns="0" rIns="0" bIns="0" anchor="ctr">
-            <a:spAutoFit/>
-          </a:bodyPr>
-          <a:lstStyle/>
-          <a:p>
-            <a:pPr algn="l">
-              <a:lnSpc>
-                <a:spcPct val="108000"/>
-              </a:lnSpc>
-              <a:spcAft>
-                <a:spcPts val="0"/>
-              </a:spcAft>
-            </a:pPr>
-            <a:r>
-              <a:rPr sz="800" b="1" i="0">
-                <a:solidFill>
-                  <a:srgbClr val="314359"/>
-                </a:solidFill>
-                <a:latin typeface="Arial"/>
-              </a:rPr>
-              <a:t>Gantchev (2013) · J. Fin. Economics</a:t>
-            </a:r>
-          </a:p>
-        </p:txBody>
-      </p:sp>
-      <p:sp>
-        <p:nvSpPr>
-          <p:cNvPr id="42" name="Rectangle 41"/>
-          <p:cNvSpPr/>
-          <p:nvPr/>
-        </p:nvSpPr>
-        <p:spPr>
-          <a:xfrm>
-            <a:off x="2889576" y="6037478"/>
-            <a:ext cx="1865422" cy="838809"/>
-          </a:xfrm>
-          <a:prstGeom prst="rect">
-            <a:avLst/>
-          </a:prstGeom>
-          <a:solidFill>
-            <a:srgbClr val="F6F7F9"/>
-          </a:solidFill>
-          <a:ln>
-            <a:noFill/>
-          </a:ln>
-          <a:effectLst/>
-        </p:spPr>
-        <p:style>
-          <a:lnRef idx="1">
-            <a:schemeClr val="accent1"/>
-          </a:lnRef>
-          <a:fillRef idx="3">
-            <a:schemeClr val="accent1"/>
-          </a:fillRef>
-          <a:effectRef idx="2">
-            <a:schemeClr val="accent1"/>
-          </a:effectRef>
-          <a:fontRef idx="minor">
-            <a:schemeClr val="lt1"/>
-          </a:fontRef>
-        </p:style>
-        <p:txBody>
-          <a:bodyPr rtlCol="0" anchor="ctr"/>
-          <a:lstStyle/>
-          <a:p>
-            <a:pPr algn="ctr"/>
-            <a:endParaRPr/>
-          </a:p>
-        </p:txBody>
-      </p:sp>
-      <p:sp>
-        <p:nvSpPr>
-          <p:cNvPr id="43" name="TextBox 42"/>
-          <p:cNvSpPr txBox="1"/>
-          <p:nvPr/>
-        </p:nvSpPr>
-        <p:spPr>
-          <a:xfrm>
-            <a:off x="2984676" y="6037478"/>
-            <a:ext cx="1689853" cy="838809"/>
-          </a:xfrm>
-          <a:prstGeom prst="rect">
-            <a:avLst/>
-          </a:prstGeom>
-          <a:noFill/>
-        </p:spPr>
-        <p:txBody>
-          <a:bodyPr wrap="square" lIns="0" tIns="0" rIns="0" bIns="0" anchor="ctr">
-            <a:spAutoFit/>
-          </a:bodyPr>
-          <a:lstStyle/>
-          <a:p>
-            <a:pPr algn="l">
-              <a:lnSpc>
-                <a:spcPct val="108000"/>
-              </a:lnSpc>
-              <a:spcAft>
-                <a:spcPts val="0"/>
-              </a:spcAft>
-            </a:pPr>
-            <a:r>
-              <a:rPr sz="760" b="0" i="0">
-                <a:solidFill>
-                  <a:srgbClr val="0E1620"/>
-                </a:solidFill>
-                <a:latin typeface="Arial"/>
-              </a:rPr>
-              <a:t>1,492 campaigns, 2000–07</a:t>
-            </a:r>
-          </a:p>
-        </p:txBody>
-      </p:sp>
-      <p:sp>
-        <p:nvSpPr>
-          <p:cNvPr id="44" name="Rectangle 43"/>
-          <p:cNvSpPr/>
-          <p:nvPr/>
-        </p:nvSpPr>
-        <p:spPr>
-          <a:xfrm>
-            <a:off x="4754998" y="6037478"/>
-            <a:ext cx="4579429" cy="838809"/>
-          </a:xfrm>
-          <a:prstGeom prst="rect">
-            <a:avLst/>
-          </a:prstGeom>
-          <a:solidFill>
-            <a:srgbClr val="F6F7F9"/>
-          </a:solidFill>
-          <a:ln>
-            <a:noFill/>
-          </a:ln>
-          <a:effectLst/>
-        </p:spPr>
-        <p:style>
-          <a:lnRef idx="1">
-            <a:schemeClr val="accent1"/>
-          </a:lnRef>
-          <a:fillRef idx="3">
-            <a:schemeClr val="accent1"/>
-          </a:fillRef>
-          <a:effectRef idx="2">
-            <a:schemeClr val="accent1"/>
-          </a:effectRef>
-          <a:fontRef idx="minor">
-            <a:schemeClr val="lt1"/>
-          </a:fontRef>
-        </p:style>
-        <p:txBody>
-          <a:bodyPr rtlCol="0" anchor="ctr"/>
-          <a:lstStyle/>
-          <a:p>
-            <a:pPr algn="ctr"/>
-            <a:endParaRPr/>
-          </a:p>
-        </p:txBody>
-      </p:sp>
-      <p:sp>
-        <p:nvSpPr>
-          <p:cNvPr id="45" name="TextBox 44"/>
-          <p:cNvSpPr txBox="1"/>
-          <p:nvPr/>
-        </p:nvSpPr>
-        <p:spPr>
-          <a:xfrm>
-            <a:off x="4850098" y="6037478"/>
-            <a:ext cx="4403860" cy="838809"/>
-          </a:xfrm>
-          <a:prstGeom prst="rect">
-            <a:avLst/>
-          </a:prstGeom>
-          <a:noFill/>
-        </p:spPr>
-        <p:txBody>
-          <a:bodyPr wrap="square" lIns="0" tIns="0" rIns="0" bIns="0" anchor="ctr">
-            <a:spAutoFit/>
-          </a:bodyPr>
-          <a:lstStyle/>
-          <a:p>
-            <a:pPr algn="l">
-              <a:lnSpc>
-                <a:spcPct val="108000"/>
-              </a:lnSpc>
-              <a:spcAft>
-                <a:spcPts val="0"/>
-              </a:spcAft>
-            </a:pPr>
-            <a:r>
-              <a:rPr sz="760" b="0" i="0">
-                <a:solidFill>
-                  <a:srgbClr val="0E1620"/>
-                </a:solidFill>
-                <a:latin typeface="Arial"/>
-              </a:rPr>
-              <a:t>A campaign escalating to a proxy fight costs ~$10.7m; settling at the board-representation stage avoids most of it — collaboration is cheaper.</a:t>
-            </a:r>
-          </a:p>
-        </p:txBody>
-      </p:sp>
-      <p:sp>
-        <p:nvSpPr>
-          <p:cNvPr id="46" name="TextBox 45"/>
-          <p:cNvSpPr txBox="1"/>
-          <p:nvPr/>
-        </p:nvSpPr>
-        <p:spPr>
-          <a:xfrm>
-            <a:off x="438922" y="6993331"/>
-            <a:ext cx="8851613" cy="487680"/>
-          </a:xfrm>
-          <a:prstGeom prst="rect">
-            <a:avLst/>
-          </a:prstGeom>
-          <a:noFill/>
-        </p:spPr>
-        <p:txBody>
-          <a:bodyPr wrap="square" lIns="0" tIns="0" rIns="0" bIns="0" anchor="t">
-            <a:spAutoFit/>
-          </a:bodyPr>
-          <a:lstStyle/>
-          <a:p>
-            <a:pPr algn="l">
-              <a:lnSpc>
-                <a:spcPct val="110000"/>
-              </a:lnSpc>
-              <a:spcAft>
-                <a:spcPts val="0"/>
-              </a:spcAft>
-            </a:pPr>
-            <a:r>
-              <a:rPr sz="1000" b="0" i="1">
-                <a:solidFill>
-                  <a:srgbClr val="314359"/>
-                </a:solidFill>
-                <a:latin typeface="Arial"/>
-              </a:rPr>
-              <a:t>The academic record converges with our own 38 engagements: control secured cooperatively through a board seat is how operational value is created.</a:t>
+                  <a:srgbClr val="556A83"/>
+                </a:solidFill>
+                <a:latin typeface="Arial"/>
+              </a:rPr>
+              <a:t>And the opportunity set is deep and global: ~50,000 listed companies worldwide (World Federation of Exchanges, 2024); the investable MSCI ACWI IMI spans ~8,800 large-, mid- and small-cap names across 23 developed and 24 emerging markets — about 1,600 of them mid-caps (MSCI, 2024). Our €50m–€3bn target band, in markets with a stable legal system, is a large subset.</a:t>
             </a:r>
           </a:p>
         </p:txBody>

--- a/Athanase_Endowment_Pitch_21pp.pptx
+++ b/Athanase_Endowment_Pitch_21pp.pptx
@@ -942,335 +942,6 @@
 </c:chartSpace>
 </file>
 
-<file path=ppt/charts/chart3.xml><?xml version="1.0" encoding="utf-8"?>
-<c:chartSpace xmlns:c="http://schemas.openxmlformats.org/drawingml/2006/chart" xmlns:a="http://schemas.openxmlformats.org/drawingml/2006/main" xmlns:r="http://schemas.openxmlformats.org/officeDocument/2006/relationships" xmlns:c16r2="http://schemas.microsoft.com/office/drawing/2015/06/chart">
-  <c:date1904 val="0"/>
-  <c:lang val="en-US"/>
-  <c:roundedCorners val="1"/>
-  <c:style val="2"/>
-  <c:chart>
-    <c:title>
-      <c:tx>
-        <c:rich>
-          <a:bodyPr/>
-          <a:lstStyle/>
-          <a:p>
-            <a:r>
-              <a:t>Figure 5.  Growth of capital since 2006 (×)</a:t>
-            </a:r>
-          </a:p>
-        </c:rich>
-      </c:tx>
-      <c:overlay val="0"/>
-    </c:title>
-    <c:autoTitleDeleted val="0"/>
-    <c:plotArea>
-      <c:layout/>
-      <c:barChart>
-        <c:barDir val="col"/>
-        <c:grouping val="clustered"/>
-        <c:varyColors val="1"/>
-        <c:ser>
-          <c:idx val="0"/>
-          <c:order val="0"/>
-          <c:tx>
-            <c:strRef>
-              <c:f>Sheet1!$B$1</c:f>
-              <c:strCache>
-                <c:ptCount val="1"/>
-                <c:pt idx="0">
-                  <c:v>Athanase</c:v>
-                </c:pt>
-              </c:strCache>
-            </c:strRef>
-          </c:tx>
-          <c:spPr>
-            <a:solidFill>
-              <a:srgbClr val="152130"/>
-            </a:solidFill>
-          </c:spPr>
-          <c:invertIfNegative val="1"/>
-          <c:dLbls>
-            <c:numFmt formatCode="0.0&quot;%&quot;" sourceLinked="0"/>
-            <c:spPr>
-              <a:noFill/>
-              <a:ln>
-                <a:noFill/>
-              </a:ln>
-              <a:effectLst/>
-            </c:spPr>
-            <c:txPr>
-              <a:bodyPr/>
-              <a:lstStyle/>
-              <a:p>
-                <a:pPr>
-                  <a:defRPr sz="720">
-                    <a:solidFill>
-                      <a:srgbClr val="0E1620"/>
-                    </a:solidFill>
-                  </a:defRPr>
-                </a:pPr>
-                <a:endParaRPr lang="sv-SE"/>
-              </a:p>
-            </c:txPr>
-            <c:dLblPos val="outEnd"/>
-            <c:showLegendKey val="0"/>
-            <c:showVal val="1"/>
-            <c:showCatName val="0"/>
-            <c:showSerName val="0"/>
-            <c:showPercent val="0"/>
-            <c:showBubbleSize val="0"/>
-            <c:showLeaderLines val="0"/>
-            <c:extLst>
-              <c:ext xmlns:c15="http://schemas.microsoft.com/office/drawing/2012/chart" uri="{CE6537A1-D6FC-4f65-9D91-7224C49458BB}">
-                <c15:showLeaderLines val="0"/>
-              </c:ext>
-            </c:extLst>
-          </c:dLbls>
-          <c:cat>
-            <c:strRef>
-              <c:f>Sheet1!$A$2:$A$2</c:f>
-              <c:strCache>
-                <c:ptCount val="1"/>
-                <c:pt idx="0">
-                  <c:v>Since 2006</c:v>
-                </c:pt>
-              </c:strCache>
-            </c:strRef>
-          </c:cat>
-          <c:val>
-            <c:numRef>
-              <c:f>Sheet1!$B$2:$B$2</c:f>
-              <c:numCache>
-                <c:formatCode>General</c:formatCode>
-                <c:ptCount val="1"/>
-                <c:pt idx="0">
-                  <c:v>18.0</c:v>
-                </c:pt>
-              </c:numCache>
-            </c:numRef>
-          </c:val>
-          <c:extLst>
-            <c:ext xmlns:c14="http://schemas.microsoft.com/office/drawing/2007/8/2/chart" uri="{6F2FDCE9-48DA-4B69-8628-5D25D57E5C99}">
-              <c14:invertSolidFillFmt>
-                <c14:spPr xmlns:c14="http://schemas.microsoft.com/office/drawing/2007/8/2/chart">
-                  <a:solidFill>
-                    <a:srgbClr val="FFFFFF"/>
-                  </a:solidFill>
-                </c14:spPr>
-              </c14:invertSolidFillFmt>
-            </c:ext>
-            <c:ext xmlns:c16="http://schemas.microsoft.com/office/drawing/2014/chart" uri="{C3380CC4-5D6E-409C-BE32-E72D297353CC}">
-              <c16:uniqueId val="{00000000-E970-45BA-8499-251F9C2C08E0}"/>
-            </c:ext>
-          </c:extLst>
-        </c:ser>
-        <c:ser>
-          <c:idx val="1"/>
-          <c:order val="1"/>
-          <c:tx>
-            <c:strRef>
-              <c:f>Sheet1!$C$1</c:f>
-              <c:strCache>
-                <c:ptCount val="1"/>
-                <c:pt idx="0">
-                  <c:v>MSCI IMI</c:v>
-                </c:pt>
-              </c:strCache>
-            </c:strRef>
-          </c:tx>
-          <c:spPr>
-            <a:solidFill>
-              <a:srgbClr val="556A83"/>
-            </a:solidFill>
-          </c:spPr>
-          <c:invertIfNegative val="1"/>
-          <c:dLbls>
-            <c:numFmt formatCode="0.0&quot;%&quot;" sourceLinked="0"/>
-            <c:spPr>
-              <a:noFill/>
-              <a:ln>
-                <a:noFill/>
-              </a:ln>
-              <a:effectLst/>
-            </c:spPr>
-            <c:txPr>
-              <a:bodyPr/>
-              <a:lstStyle/>
-              <a:p>
-                <a:pPr>
-                  <a:defRPr sz="720">
-                    <a:solidFill>
-                      <a:srgbClr val="0E1620"/>
-                    </a:solidFill>
-                  </a:defRPr>
-                </a:pPr>
-                <a:endParaRPr lang="sv-SE"/>
-              </a:p>
-            </c:txPr>
-            <c:dLblPos val="outEnd"/>
-            <c:showLegendKey val="0"/>
-            <c:showVal val="1"/>
-            <c:showCatName val="0"/>
-            <c:showSerName val="0"/>
-            <c:showPercent val="0"/>
-            <c:showBubbleSize val="0"/>
-            <c:showLeaderLines val="0"/>
-            <c:extLst>
-              <c:ext xmlns:c15="http://schemas.microsoft.com/office/drawing/2012/chart" uri="{CE6537A1-D6FC-4f65-9D91-7224C49458BB}">
-                <c15:showLeaderLines val="0"/>
-              </c:ext>
-            </c:extLst>
-          </c:dLbls>
-          <c:cat>
-            <c:strRef>
-              <c:f>Sheet1!$A$2:$A$2</c:f>
-              <c:strCache>
-                <c:ptCount val="1"/>
-                <c:pt idx="0">
-                  <c:v>Since 2006</c:v>
-                </c:pt>
-              </c:strCache>
-            </c:strRef>
-          </c:cat>
-          <c:val>
-            <c:numRef>
-              <c:f>Sheet1!$C$2:$C$2</c:f>
-              <c:numCache>
-                <c:formatCode>General</c:formatCode>
-                <c:ptCount val="1"/>
-                <c:pt idx="0">
-                  <c:v>3.2</c:v>
-                </c:pt>
-              </c:numCache>
-            </c:numRef>
-          </c:val>
-          <c:extLst>
-            <c:ext xmlns:c14="http://schemas.microsoft.com/office/drawing/2007/8/2/chart" uri="{6F2FDCE9-48DA-4B69-8628-5D25D57E5C99}">
-              <c14:invertSolidFillFmt>
-                <c14:spPr xmlns:c14="http://schemas.microsoft.com/office/drawing/2007/8/2/chart">
-                  <a:solidFill>
-                    <a:srgbClr val="FFFFFF"/>
-                  </a:solidFill>
-                </c14:spPr>
-              </c14:invertSolidFillFmt>
-            </c:ext>
-            <c:ext xmlns:c16="http://schemas.microsoft.com/office/drawing/2014/chart" uri="{C3380CC4-5D6E-409C-BE32-E72D297353CC}">
-              <c16:uniqueId val="{00000001-E970-45BA-8499-251F9C2C08E0}"/>
-            </c:ext>
-          </c:extLst>
-        </c:ser>
-        <c:dLbls>
-          <c:numFmt formatCode="0.0&quot;×&quot;" sourceLinked="0"/>
-          <c:dLblPos val="outEnd"/>
-          <c:showLegendKey val="0"/>
-          <c:showVal val="1"/>
-          <c:showCatName val="0"/>
-          <c:showSerName val="0"/>
-          <c:showPercent val="0"/>
-          <c:showBubbleSize val="0"/>
-        </c:dLbls>
-        <c:gapWidth val="80"/>
-        <c:axId val="-2068027336"/>
-        <c:axId val="-2113994440"/>
-      </c:barChart>
-      <c:catAx>
-        <c:axId val="-2068027336"/>
-        <c:scaling>
-          <c:orientation val="minMax"/>
-        </c:scaling>
-        <c:delete val="0"/>
-        <c:axPos val="b"/>
-        <c:numFmt formatCode="General" sourceLinked="0"/>
-        <c:majorTickMark val="out"/>
-        <c:minorTickMark val="none"/>
-        <c:tickLblPos val="nextTo"/>
-        <c:txPr>
-          <a:bodyPr/>
-          <a:lstStyle/>
-          <a:p>
-            <a:pPr>
-              <a:defRPr sz="800">
-                <a:solidFill>
-                  <a:srgbClr val="0E1620"/>
-                </a:solidFill>
-              </a:defRPr>
-            </a:pPr>
-            <a:endParaRPr lang="sv-SE"/>
-          </a:p>
-        </c:txPr>
-        <c:crossAx val="-2113994440"/>
-        <c:crosses val="autoZero"/>
-        <c:auto val="1"/>
-        <c:lblAlgn val="ctr"/>
-        <c:lblOffset val="100"/>
-        <c:noMultiLvlLbl val="0"/>
-      </c:catAx>
-      <c:valAx>
-        <c:axId val="-2113994440"/>
-        <c:scaling>
-          <c:orientation val="minMax"/>
-        </c:scaling>
-        <c:delete val="0"/>
-        <c:axPos val="l"/>
-        <c:majorGridlines/>
-        <c:numFmt formatCode="General" sourceLinked="1"/>
-        <c:majorTickMark val="out"/>
-        <c:minorTickMark val="none"/>
-        <c:tickLblPos val="nextTo"/>
-        <c:txPr>
-          <a:bodyPr/>
-          <a:lstStyle/>
-          <a:p>
-            <a:pPr>
-              <a:defRPr sz="800">
-                <a:solidFill>
-                  <a:srgbClr val="0E1620"/>
-                </a:solidFill>
-              </a:defRPr>
-            </a:pPr>
-            <a:endParaRPr lang="sv-SE"/>
-          </a:p>
-        </c:txPr>
-        <c:crossAx val="-2068027336"/>
-        <c:crosses val="autoZero"/>
-        <c:crossBetween val="between"/>
-      </c:valAx>
-    </c:plotArea>
-    <c:legend>
-      <c:legendPos val="b"/>
-      <c:overlay val="0"/>
-      <c:txPr>
-        <a:bodyPr/>
-        <a:lstStyle/>
-        <a:p>
-          <a:pPr>
-            <a:defRPr sz="880"/>
-          </a:pPr>
-          <a:endParaRPr lang="sv-SE"/>
-        </a:p>
-      </c:txPr>
-    </c:legend>
-    <c:plotVisOnly val="1"/>
-    <c:dispBlanksAs val="gap"/>
-    <c:showDLblsOverMax val="1"/>
-  </c:chart>
-  <c:txPr>
-    <a:bodyPr/>
-    <a:lstStyle/>
-    <a:p>
-      <a:pPr>
-        <a:defRPr sz="1440"/>
-      </a:pPr>
-      <a:endParaRPr lang="en-US"/>
-    </a:p>
-  </c:txPr>
-  <c:externalData r:id="rId1">
-    <c:autoUpdate val="0"/>
-  </c:externalData>
-</c:chartSpace>
-</file>
-
 <file path=ppt/notesMasters/notesMaster1.xml><?xml version="1.0" encoding="utf-8"?>
 <p:notesMaster xmlns:a="http://schemas.openxmlformats.org/drawingml/2006/main" xmlns:r="http://schemas.openxmlformats.org/officeDocument/2006/relationships" xmlns:p="http://schemas.openxmlformats.org/presentationml/2006/main">
   <p:cSld>
@@ -11250,24 +10921,244 @@
                 </a:solidFill>
                 <a:latin typeface="Arial"/>
               </a:rPr>
-              <a:t>Figure 2  ·  SUM-OF-THE-PARTS (ILLUSTRATIVE · CONSTANT MULTIPLE)</a:t>
-            </a:r>
-          </a:p>
-        </p:txBody>
-      </p:sp>
-      <p:sp>
-        <p:nvSpPr>
-          <p:cNvPr id="12" name="Rectangle 11"/>
+              <a:t>Figure 2  ·  WHY THE EARNINGS LOOK LIKE ZERO  (ILLUSTRATIVE)</a:t>
+            </a:r>
+          </a:p>
+        </p:txBody>
+      </p:sp>
+      <p:sp>
+        <p:nvSpPr>
+          <p:cNvPr id="21" name="TextBox 20"/>
+          <p:cNvSpPr txBox="1"/>
+          <p:nvPr/>
+        </p:nvSpPr>
+        <p:spPr>
+          <a:xfrm>
+            <a:off x="512076" y="6291072"/>
+            <a:ext cx="8778459" cy="487680"/>
+          </a:xfrm>
+          <a:prstGeom prst="rect">
+            <a:avLst/>
+          </a:prstGeom>
+          <a:noFill/>
+        </p:spPr>
+        <p:txBody>
+          <a:bodyPr wrap="square" lIns="0" tIns="0" rIns="0" bIns="0" anchor="t">
+            <a:spAutoFit/>
+          </a:bodyPr>
+          <a:lstStyle/>
+          <a:p>
+            <a:pPr algn="l">
+              <a:lnSpc>
+                <a:spcPct val="110000"/>
+              </a:lnSpc>
+              <a:spcAft>
+                <a:spcPts val="0"/>
+              </a:spcAft>
+            </a:pPr>
+            <a:r>
+              <a:rPr sz="1040" b="0" i="1">
+                <a:solidFill>
+                  <a:srgbClr val="314359"/>
+                </a:solidFill>
+                <a:latin typeface="Arial"/>
+              </a:rPr>
+              <a:t>Reported earnings near zero — so the market prices the whole company as broken. We buy it, fix or exit the pivot, and the core’s high-ROIIC earnings surface: value we underwrite at zero.</a:t>
+            </a:r>
+          </a:p>
+        </p:txBody>
+      </p:sp>
+      <p:sp>
+        <p:nvSpPr>
+          <p:cNvPr id="22" name="Rectangle 21"/>
           <p:cNvSpPr/>
           <p:nvPr/>
         </p:nvSpPr>
         <p:spPr>
           <a:xfrm>
-            <a:off x="5852306" y="3706368"/>
-            <a:ext cx="1170461" cy="1658112"/>
-          </a:xfrm>
-          <a:prstGeom prst="rect">
-            <a:avLst/>
+            <a:off x="7307884" y="3218688"/>
+            <a:ext cx="14630" cy="237744"/>
+          </a:xfrm>
+          <a:prstGeom prst="rect">
+            <a:avLst/>
+          </a:prstGeom>
+          <a:solidFill>
+            <a:srgbClr val="556A83"/>
+          </a:solidFill>
+          <a:ln>
+            <a:noFill/>
+          </a:ln>
+          <a:effectLst/>
+        </p:spPr>
+        <p:style>
+          <a:lnRef idx="1">
+            <a:schemeClr val="accent1"/>
+          </a:lnRef>
+          <a:fillRef idx="3">
+            <a:schemeClr val="accent1"/>
+          </a:fillRef>
+          <a:effectRef idx="2">
+            <a:schemeClr val="accent1"/>
+          </a:effectRef>
+          <a:fontRef idx="minor">
+            <a:schemeClr val="lt1"/>
+          </a:fontRef>
+        </p:style>
+        <p:txBody>
+          <a:bodyPr rtlCol="0" anchor="ctr"/>
+          <a:lstStyle/>
+          <a:p>
+            <a:pPr algn="ctr"/>
+          </a:p>
+        </p:txBody>
+      </p:sp>
+      <p:sp>
+        <p:nvSpPr>
+          <p:cNvPr id="23" name="Rectangle 22"/>
+          <p:cNvSpPr/>
+          <p:nvPr/>
+        </p:nvSpPr>
+        <p:spPr>
+          <a:xfrm>
+            <a:off x="6277356" y="3456432"/>
+            <a:ext cx="2075688" cy="14630"/>
+          </a:xfrm>
+          <a:prstGeom prst="rect">
+            <a:avLst/>
+          </a:prstGeom>
+          <a:solidFill>
+            <a:srgbClr val="556A83"/>
+          </a:solidFill>
+          <a:ln>
+            <a:noFill/>
+          </a:ln>
+          <a:effectLst/>
+        </p:spPr>
+        <p:style>
+          <a:lnRef idx="1">
+            <a:schemeClr val="accent1"/>
+          </a:lnRef>
+          <a:fillRef idx="3">
+            <a:schemeClr val="accent1"/>
+          </a:fillRef>
+          <a:effectRef idx="2">
+            <a:schemeClr val="accent1"/>
+          </a:effectRef>
+          <a:fontRef idx="minor">
+            <a:schemeClr val="lt1"/>
+          </a:fontRef>
+        </p:style>
+        <p:txBody>
+          <a:bodyPr rtlCol="0" anchor="ctr"/>
+          <a:lstStyle/>
+          <a:p>
+            <a:pPr algn="ctr"/>
+          </a:p>
+        </p:txBody>
+      </p:sp>
+      <p:sp>
+        <p:nvSpPr>
+          <p:cNvPr id="24" name="Rectangle 23"/>
+          <p:cNvSpPr/>
+          <p:nvPr/>
+        </p:nvSpPr>
+        <p:spPr>
+          <a:xfrm>
+            <a:off x="6270040" y="3456432"/>
+            <a:ext cx="14630" cy="182880"/>
+          </a:xfrm>
+          <a:prstGeom prst="rect">
+            <a:avLst/>
+          </a:prstGeom>
+          <a:solidFill>
+            <a:srgbClr val="556A83"/>
+          </a:solidFill>
+          <a:ln>
+            <a:noFill/>
+          </a:ln>
+          <a:effectLst/>
+        </p:spPr>
+        <p:style>
+          <a:lnRef idx="1">
+            <a:schemeClr val="accent1"/>
+          </a:lnRef>
+          <a:fillRef idx="3">
+            <a:schemeClr val="accent1"/>
+          </a:fillRef>
+          <a:effectRef idx="2">
+            <a:schemeClr val="accent1"/>
+          </a:effectRef>
+          <a:fontRef idx="minor">
+            <a:schemeClr val="lt1"/>
+          </a:fontRef>
+        </p:style>
+        <p:txBody>
+          <a:bodyPr rtlCol="0" anchor="ctr"/>
+          <a:lstStyle/>
+          <a:p>
+            <a:pPr algn="ctr"/>
+          </a:p>
+        </p:txBody>
+      </p:sp>
+      <p:sp>
+        <p:nvSpPr>
+          <p:cNvPr id="25" name="Rectangle 24"/>
+          <p:cNvSpPr/>
+          <p:nvPr/>
+        </p:nvSpPr>
+        <p:spPr>
+          <a:xfrm>
+            <a:off x="8345728" y="3456432"/>
+            <a:ext cx="14630" cy="182880"/>
+          </a:xfrm>
+          <a:prstGeom prst="rect">
+            <a:avLst/>
+          </a:prstGeom>
+          <a:solidFill>
+            <a:srgbClr val="556A83"/>
+          </a:solidFill>
+          <a:ln>
+            <a:noFill/>
+          </a:ln>
+          <a:effectLst/>
+        </p:spPr>
+        <p:style>
+          <a:lnRef idx="1">
+            <a:schemeClr val="accent1"/>
+          </a:lnRef>
+          <a:fillRef idx="3">
+            <a:schemeClr val="accent1"/>
+          </a:fillRef>
+          <a:effectRef idx="2">
+            <a:schemeClr val="accent1"/>
+          </a:effectRef>
+          <a:fontRef idx="minor">
+            <a:schemeClr val="lt1"/>
+          </a:fontRef>
+        </p:style>
+        <p:txBody>
+          <a:bodyPr rtlCol="0" anchor="ctr"/>
+          <a:lstStyle/>
+          <a:p>
+            <a:pPr algn="ctr"/>
+          </a:p>
+        </p:txBody>
+      </p:sp>
+      <p:sp>
+        <p:nvSpPr>
+          <p:cNvPr id="26" name="Rounded Rectangle 25"/>
+          <p:cNvSpPr/>
+          <p:nvPr/>
+        </p:nvSpPr>
+        <p:spPr>
+          <a:xfrm>
+            <a:off x="6263640" y="2670048"/>
+            <a:ext cx="2103120" cy="548640"/>
+          </a:xfrm>
+          <a:prstGeom prst="roundRect">
+            <a:avLst>
+              <a:gd name="adj" fmla="val 10000"/>
+            </a:avLst>
           </a:prstGeom>
           <a:solidFill>
             <a:srgbClr val="314359"/>
@@ -11292,323 +11183,49 @@
           </a:fontRef>
         </p:style>
         <p:txBody>
-          <a:bodyPr rtlCol="0" anchor="ctr"/>
+          <a:bodyPr rtlCol="0" anchor="ctr" wrap="square" lIns="54864" rIns="54864" tIns="18288" bIns="18288"/>
           <a:lstStyle/>
           <a:p>
             <a:pPr algn="ctr"/>
-            <a:endParaRPr/>
-          </a:p>
-        </p:txBody>
-      </p:sp>
-      <p:sp>
-        <p:nvSpPr>
-          <p:cNvPr id="13" name="TextBox 12"/>
-          <p:cNvSpPr txBox="1"/>
-          <p:nvPr/>
-        </p:nvSpPr>
-        <p:spPr>
-          <a:xfrm>
-            <a:off x="5852306" y="3355238"/>
-            <a:ext cx="1170461" cy="312115"/>
-          </a:xfrm>
-          <a:prstGeom prst="rect">
-            <a:avLst/>
-          </a:prstGeom>
-          <a:noFill/>
-        </p:spPr>
-        <p:txBody>
-          <a:bodyPr wrap="square" lIns="0" tIns="0" rIns="0" bIns="0" anchor="t">
-            <a:spAutoFit/>
-          </a:bodyPr>
-          <a:lstStyle/>
-          <a:p>
-            <a:pPr algn="ctr">
-              <a:lnSpc>
-                <a:spcPct val="110000"/>
-              </a:lnSpc>
-              <a:spcAft>
-                <a:spcPts val="0"/>
-              </a:spcAft>
-            </a:pPr>
-            <a:r>
-              <a:rPr sz="1120" b="1" i="0">
-                <a:solidFill>
-                  <a:srgbClr val="314359"/>
-                </a:solidFill>
-                <a:latin typeface="Arial"/>
-              </a:rPr>
-              <a:t>100</a:t>
-            </a:r>
-          </a:p>
-        </p:txBody>
-      </p:sp>
-      <p:sp>
-        <p:nvSpPr>
-          <p:cNvPr id="14" name="TextBox 13"/>
-          <p:cNvSpPr txBox="1"/>
-          <p:nvPr/>
-        </p:nvSpPr>
-        <p:spPr>
-          <a:xfrm>
-            <a:off x="5559691" y="5462016"/>
-            <a:ext cx="1755691" cy="585216"/>
-          </a:xfrm>
-          <a:prstGeom prst="rect">
-            <a:avLst/>
-          </a:prstGeom>
-          <a:noFill/>
-        </p:spPr>
-        <p:txBody>
-          <a:bodyPr wrap="square" lIns="0" tIns="0" rIns="0" bIns="0" anchor="t">
-            <a:spAutoFit/>
-          </a:bodyPr>
-          <a:lstStyle/>
-          <a:p>
-            <a:pPr algn="ctr">
-              <a:lnSpc>
-                <a:spcPct val="100000"/>
-              </a:lnSpc>
-              <a:spcAft>
-                <a:spcPts val="0"/>
-              </a:spcAft>
-            </a:pPr>
-            <a:r>
-              <a:rPr sz="919" b="1" i="0">
-                <a:solidFill>
-                  <a:srgbClr val="0E1620"/>
-                </a:solidFill>
-                <a:latin typeface="Arial"/>
-              </a:rPr>
-              <a:t>Market price</a:t>
-            </a:r>
-          </a:p>
-          <a:p>
-            <a:pPr algn="ctr">
-              <a:lnSpc>
-                <a:spcPct val="100000"/>
-              </a:lnSpc>
-              <a:spcAft>
-                <a:spcPts val="0"/>
-              </a:spcAft>
-            </a:pPr>
-            <a:r>
-              <a:rPr sz="800" b="0" i="0">
-                <a:solidFill>
-                  <a:srgbClr val="0E1620"/>
-                </a:solidFill>
-                <a:latin typeface="Arial"/>
-              </a:rPr>
-              <a:t>(blended optics)</a:t>
-            </a:r>
-          </a:p>
-        </p:txBody>
-      </p:sp>
-      <p:sp>
-        <p:nvSpPr>
-          <p:cNvPr id="15" name="Rectangle 14"/>
+            <a:r>
+              <a:rPr sz="1100" b="1">
+                <a:solidFill>
+                  <a:srgbClr val="FFFFFF"/>
+                </a:solidFill>
+                <a:latin typeface="Arial"/>
+              </a:rPr>
+              <a:t>Company X</a:t>
+            </a:r>
+          </a:p>
+          <a:p>
+            <a:pPr algn="ctr"/>
+            <a:r>
+              <a:rPr sz="850" b="0">
+                <a:solidFill>
+                  <a:srgbClr val="C9D2DD"/>
+                </a:solidFill>
+                <a:latin typeface="Arial"/>
+              </a:rPr>
+              <a:t>central overhead  −10</a:t>
+            </a:r>
+          </a:p>
+        </p:txBody>
+      </p:sp>
+      <p:sp>
+        <p:nvSpPr>
+          <p:cNvPr id="27" name="Rounded Rectangle 26"/>
           <p:cNvSpPr/>
           <p:nvPr/>
         </p:nvSpPr>
         <p:spPr>
           <a:xfrm>
-            <a:off x="7754305" y="3043123"/>
-            <a:ext cx="1170461" cy="2321356"/>
-          </a:xfrm>
-          <a:prstGeom prst="rect">
-            <a:avLst/>
-          </a:prstGeom>
-          <a:solidFill>
-            <a:srgbClr val="152130"/>
-          </a:solidFill>
-          <a:ln>
-            <a:noFill/>
-          </a:ln>
-          <a:effectLst/>
-        </p:spPr>
-        <p:style>
-          <a:lnRef idx="1">
-            <a:schemeClr val="accent1"/>
-          </a:lnRef>
-          <a:fillRef idx="3">
-            <a:schemeClr val="accent1"/>
-          </a:fillRef>
-          <a:effectRef idx="2">
-            <a:schemeClr val="accent1"/>
-          </a:effectRef>
-          <a:fontRef idx="minor">
-            <a:schemeClr val="lt1"/>
-          </a:fontRef>
-        </p:style>
-        <p:txBody>
-          <a:bodyPr rtlCol="0" anchor="ctr"/>
-          <a:lstStyle/>
-          <a:p>
-            <a:pPr algn="ctr"/>
-            <a:endParaRPr/>
-          </a:p>
-        </p:txBody>
-      </p:sp>
-      <p:sp>
-        <p:nvSpPr>
-          <p:cNvPr id="16" name="TextBox 15"/>
-          <p:cNvSpPr txBox="1"/>
-          <p:nvPr/>
-        </p:nvSpPr>
-        <p:spPr>
-          <a:xfrm>
-            <a:off x="7754305" y="2691993"/>
-            <a:ext cx="1170461" cy="312115"/>
-          </a:xfrm>
-          <a:prstGeom prst="rect">
-            <a:avLst/>
-          </a:prstGeom>
-          <a:noFill/>
-        </p:spPr>
-        <p:txBody>
-          <a:bodyPr wrap="square" lIns="0" tIns="0" rIns="0" bIns="0" anchor="t">
-            <a:spAutoFit/>
-          </a:bodyPr>
-          <a:lstStyle/>
-          <a:p>
-            <a:pPr algn="ctr">
-              <a:lnSpc>
-                <a:spcPct val="110000"/>
-              </a:lnSpc>
-              <a:spcAft>
-                <a:spcPts val="0"/>
-              </a:spcAft>
-            </a:pPr>
-            <a:r>
-              <a:rPr sz="1120" b="1" i="0">
-                <a:solidFill>
-                  <a:srgbClr val="314359"/>
-                </a:solidFill>
-                <a:latin typeface="Arial"/>
-              </a:rPr>
-              <a:t>140</a:t>
-            </a:r>
-          </a:p>
-        </p:txBody>
-      </p:sp>
-      <p:sp>
-        <p:nvSpPr>
-          <p:cNvPr id="17" name="TextBox 16"/>
-          <p:cNvSpPr txBox="1"/>
-          <p:nvPr/>
-        </p:nvSpPr>
-        <p:spPr>
-          <a:xfrm>
-            <a:off x="7461690" y="5462016"/>
-            <a:ext cx="1755691" cy="585216"/>
-          </a:xfrm>
-          <a:prstGeom prst="rect">
-            <a:avLst/>
-          </a:prstGeom>
-          <a:noFill/>
-        </p:spPr>
-        <p:txBody>
-          <a:bodyPr wrap="square" lIns="0" tIns="0" rIns="0" bIns="0" anchor="t">
-            <a:spAutoFit/>
-          </a:bodyPr>
-          <a:lstStyle/>
-          <a:p>
-            <a:pPr algn="ctr">
-              <a:lnSpc>
-                <a:spcPct val="100000"/>
-              </a:lnSpc>
-              <a:spcAft>
-                <a:spcPts val="0"/>
-              </a:spcAft>
-            </a:pPr>
-            <a:r>
-              <a:rPr sz="919" b="1" i="0">
-                <a:solidFill>
-                  <a:srgbClr val="0E1620"/>
-                </a:solidFill>
-                <a:latin typeface="Arial"/>
-              </a:rPr>
-              <a:t>Core alone</a:t>
-            </a:r>
-          </a:p>
-          <a:p>
-            <a:pPr algn="ctr">
-              <a:lnSpc>
-                <a:spcPct val="100000"/>
-              </a:lnSpc>
-              <a:spcAft>
-                <a:spcPts val="0"/>
-              </a:spcAft>
-            </a:pPr>
-            <a:r>
-              <a:rPr sz="800" b="0" i="0">
-                <a:solidFill>
-                  <a:srgbClr val="0E1620"/>
-                </a:solidFill>
-                <a:latin typeface="Arial"/>
-              </a:rPr>
-              <a:t>(high ROIIC)</a:t>
-            </a:r>
-          </a:p>
-        </p:txBody>
-      </p:sp>
-      <p:sp>
-        <p:nvSpPr>
-          <p:cNvPr id="18" name="Rectangle 17"/>
-          <p:cNvSpPr/>
-          <p:nvPr/>
-        </p:nvSpPr>
-        <p:spPr>
-          <a:xfrm>
-            <a:off x="5852306" y="3706368"/>
-            <a:ext cx="2487230" cy="16256"/>
-          </a:xfrm>
-          <a:prstGeom prst="rect">
-            <a:avLst/>
-          </a:prstGeom>
-          <a:solidFill>
-            <a:srgbClr val="556A83"/>
-          </a:solidFill>
-          <a:ln>
-            <a:noFill/>
-          </a:ln>
-          <a:effectLst/>
-        </p:spPr>
-        <p:style>
-          <a:lnRef idx="1">
-            <a:schemeClr val="accent1"/>
-          </a:lnRef>
-          <a:fillRef idx="3">
-            <a:schemeClr val="accent1"/>
-          </a:fillRef>
-          <a:effectRef idx="2">
-            <a:schemeClr val="accent1"/>
-          </a:effectRef>
-          <a:fontRef idx="minor">
-            <a:schemeClr val="lt1"/>
-          </a:fontRef>
-        </p:style>
-        <p:txBody>
-          <a:bodyPr rtlCol="0" anchor="ctr"/>
-          <a:lstStyle/>
-          <a:p>
-            <a:pPr algn="ctr"/>
-            <a:endParaRPr/>
-          </a:p>
-        </p:txBody>
-      </p:sp>
-      <p:sp>
-        <p:nvSpPr>
-          <p:cNvPr id="19" name="Rectangle 18"/>
-          <p:cNvSpPr/>
-          <p:nvPr/>
-        </p:nvSpPr>
-        <p:spPr>
-          <a:xfrm>
-            <a:off x="8741882" y="3043123"/>
-            <a:ext cx="20320" cy="663244"/>
-          </a:xfrm>
-          <a:prstGeom prst="rect">
-            <a:avLst/>
+            <a:off x="5340096" y="3639312"/>
+            <a:ext cx="1874519" cy="731520"/>
+          </a:xfrm>
+          <a:prstGeom prst="roundRect">
+            <a:avLst>
+              <a:gd name="adj" fmla="val 10000"/>
+            </a:avLst>
           </a:prstGeom>
           <a:solidFill>
             <a:srgbClr val="314359"/>
@@ -11633,94 +11250,217 @@
           </a:fontRef>
         </p:style>
         <p:txBody>
+          <a:bodyPr rtlCol="0" anchor="ctr" wrap="square" lIns="54864" rIns="54864" tIns="18288" bIns="18288"/>
+          <a:lstStyle/>
+          <a:p>
+            <a:pPr algn="ctr"/>
+            <a:r>
+              <a:rPr sz="1050" b="1">
+                <a:solidFill>
+                  <a:srgbClr val="FFFFFF"/>
+                </a:solidFill>
+                <a:latin typeface="Arial"/>
+              </a:rPr>
+              <a:t>Core business    +30</a:t>
+            </a:r>
+          </a:p>
+          <a:p>
+            <a:pPr algn="ctr"/>
+            <a:r>
+              <a:rPr sz="830" b="0">
+                <a:solidFill>
+                  <a:srgbClr val="C9D2DD"/>
+                </a:solidFill>
+                <a:latin typeface="Arial"/>
+              </a:rPr>
+              <a:t>high ROIIC · strong prospects</a:t>
+            </a:r>
+          </a:p>
+        </p:txBody>
+      </p:sp>
+      <p:sp>
+        <p:nvSpPr>
+          <p:cNvPr id="28" name="Rounded Rectangle 27"/>
+          <p:cNvSpPr/>
+          <p:nvPr/>
+        </p:nvSpPr>
+        <p:spPr>
+          <a:xfrm>
+            <a:off x="7415783" y="3639312"/>
+            <a:ext cx="1874519" cy="731520"/>
+          </a:xfrm>
+          <a:prstGeom prst="roundRect">
+            <a:avLst>
+              <a:gd name="adj" fmla="val 10000"/>
+            </a:avLst>
+          </a:prstGeom>
+          <a:solidFill>
+            <a:srgbClr val="F6F7F9"/>
+          </a:solidFill>
+          <a:ln w="12700">
+            <a:solidFill>
+              <a:srgbClr val="556A83"/>
+            </a:solidFill>
+          </a:ln>
+          <a:effectLst/>
+        </p:spPr>
+        <p:style>
+          <a:lnRef idx="1">
+            <a:schemeClr val="accent1"/>
+          </a:lnRef>
+          <a:fillRef idx="3">
+            <a:schemeClr val="accent1"/>
+          </a:fillRef>
+          <a:effectRef idx="2">
+            <a:schemeClr val="accent1"/>
+          </a:effectRef>
+          <a:fontRef idx="minor">
+            <a:schemeClr val="lt1"/>
+          </a:fontRef>
+        </p:style>
+        <p:txBody>
+          <a:bodyPr rtlCol="0" anchor="ctr" wrap="square" lIns="54864" rIns="54864" tIns="18288" bIns="18288"/>
+          <a:lstStyle/>
+          <a:p>
+            <a:pPr algn="ctr"/>
+            <a:r>
+              <a:rPr sz="1050" b="1">
+                <a:solidFill>
+                  <a:srgbClr val="314359"/>
+                </a:solidFill>
+                <a:latin typeface="Arial"/>
+              </a:rPr>
+              <a:t>Mgmt’s pivot    −20</a:t>
+            </a:r>
+          </a:p>
+          <a:p>
+            <a:pPr algn="ctr"/>
+            <a:r>
+              <a:rPr sz="830" b="0">
+                <a:solidFill>
+                  <a:srgbClr val="556A83"/>
+                </a:solidFill>
+                <a:latin typeface="Arial"/>
+              </a:rPr>
+              <a:t>poor returns · weak prospects</a:t>
+            </a:r>
+          </a:p>
+        </p:txBody>
+      </p:sp>
+      <p:sp>
+        <p:nvSpPr>
+          <p:cNvPr id="29" name="Rectangle 28"/>
+          <p:cNvSpPr/>
+          <p:nvPr/>
+        </p:nvSpPr>
+        <p:spPr>
+          <a:xfrm>
+            <a:off x="6400800" y="4425696"/>
+            <a:ext cx="1828800" cy="274320"/>
+          </a:xfrm>
+          <a:prstGeom prst="rect">
+            <a:avLst/>
+          </a:prstGeom>
+          <a:noFill/>
+          <a:ln>
+            <a:noFill/>
+          </a:ln>
+          <a:effectLst/>
+        </p:spPr>
+        <p:style>
+          <a:lnRef idx="1">
+            <a:schemeClr val="accent1"/>
+          </a:lnRef>
+          <a:fillRef idx="3">
+            <a:schemeClr val="accent1"/>
+          </a:fillRef>
+          <a:effectRef idx="2">
+            <a:schemeClr val="accent1"/>
+          </a:effectRef>
+          <a:fontRef idx="minor">
+            <a:schemeClr val="lt1"/>
+          </a:fontRef>
+        </p:style>
+        <p:txBody>
           <a:bodyPr rtlCol="0" anchor="ctr"/>
           <a:lstStyle/>
           <a:p>
             <a:pPr algn="ctr"/>
-            <a:endParaRPr/>
-          </a:p>
-        </p:txBody>
-      </p:sp>
-      <p:sp>
-        <p:nvSpPr>
-          <p:cNvPr id="20" name="TextBox 19"/>
-          <p:cNvSpPr txBox="1"/>
-          <p:nvPr/>
-        </p:nvSpPr>
-        <p:spPr>
-          <a:xfrm>
-            <a:off x="5962037" y="3082137"/>
-            <a:ext cx="2633537" cy="487680"/>
-          </a:xfrm>
-          <a:prstGeom prst="rect">
-            <a:avLst/>
-          </a:prstGeom>
-          <a:noFill/>
-        </p:spPr>
-        <p:txBody>
-          <a:bodyPr wrap="square" lIns="0" tIns="0" rIns="0" bIns="0" anchor="t">
-            <a:spAutoFit/>
-          </a:bodyPr>
-          <a:lstStyle/>
-          <a:p>
-            <a:pPr algn="l">
-              <a:lnSpc>
-                <a:spcPct val="110000"/>
-              </a:lnSpc>
-              <a:spcAft>
-                <a:spcPts val="0"/>
-              </a:spcAft>
-            </a:pPr>
-            <a:r>
-              <a:rPr sz="960" b="1" i="0">
+            <a:r>
+              <a:rPr sz="1500" b="1">
+                <a:solidFill>
+                  <a:srgbClr val="556A83"/>
+                </a:solidFill>
+                <a:latin typeface="Arial"/>
+              </a:rPr>
+              <a:t>=</a:t>
+            </a:r>
+          </a:p>
+        </p:txBody>
+      </p:sp>
+      <p:sp>
+        <p:nvSpPr>
+          <p:cNvPr id="30" name="Rounded Rectangle 29"/>
+          <p:cNvSpPr/>
+          <p:nvPr/>
+        </p:nvSpPr>
+        <p:spPr>
+          <a:xfrm>
+            <a:off x="5760720" y="4718304"/>
+            <a:ext cx="3108960" cy="566928"/>
+          </a:xfrm>
+          <a:prstGeom prst="roundRect">
+            <a:avLst>
+              <a:gd name="adj" fmla="val 10000"/>
+            </a:avLst>
+          </a:prstGeom>
+          <a:solidFill>
+            <a:srgbClr val="F6F7F9"/>
+          </a:solidFill>
+          <a:ln>
+            <a:noFill/>
+          </a:ln>
+          <a:effectLst/>
+        </p:spPr>
+        <p:style>
+          <a:lnRef idx="1">
+            <a:schemeClr val="accent1"/>
+          </a:lnRef>
+          <a:fillRef idx="3">
+            <a:schemeClr val="accent1"/>
+          </a:fillRef>
+          <a:effectRef idx="2">
+            <a:schemeClr val="accent1"/>
+          </a:effectRef>
+          <a:fontRef idx="minor">
+            <a:schemeClr val="lt1"/>
+          </a:fontRef>
+        </p:style>
+        <p:txBody>
+          <a:bodyPr rtlCol="0" anchor="ctr" wrap="square" lIns="54864" rIns="54864" tIns="18288" bIns="18288"/>
+          <a:lstStyle/>
+          <a:p>
+            <a:pPr algn="ctr"/>
+            <a:r>
+              <a:rPr sz="1050" b="1">
                 <a:solidFill>
                   <a:srgbClr val="314359"/>
                 </a:solidFill>
                 <a:latin typeface="Arial"/>
               </a:rPr>
-              <a:t>+40% hidden value</a:t>
-            </a:r>
-          </a:p>
-        </p:txBody>
-      </p:sp>
-      <p:sp>
-        <p:nvSpPr>
-          <p:cNvPr id="21" name="TextBox 20"/>
-          <p:cNvSpPr txBox="1"/>
-          <p:nvPr/>
-        </p:nvSpPr>
-        <p:spPr>
-          <a:xfrm>
-            <a:off x="512076" y="6291072"/>
-            <a:ext cx="8778459" cy="487680"/>
-          </a:xfrm>
-          <a:prstGeom prst="rect">
-            <a:avLst/>
-          </a:prstGeom>
-          <a:noFill/>
-        </p:spPr>
-        <p:txBody>
-          <a:bodyPr wrap="square" lIns="0" tIns="0" rIns="0" bIns="0" anchor="t">
-            <a:spAutoFit/>
-          </a:bodyPr>
-          <a:lstStyle/>
-          <a:p>
-            <a:pPr algn="l">
-              <a:lnSpc>
-                <a:spcPct val="110000"/>
-              </a:lnSpc>
-              <a:spcAft>
-                <a:spcPts val="0"/>
-              </a:spcAft>
-            </a:pPr>
-            <a:r>
-              <a:rPr sz="1040" b="0" i="1">
-                <a:solidFill>
-                  <a:srgbClr val="314359"/>
-                </a:solidFill>
-                <a:latin typeface="Arial"/>
-              </a:rPr>
-              <a:t>The +40% is pure earnings and mix — the same multiple on a cleaner, higher-ROIIC core. Any re-rating is upside we underwrite at zero.</a:t>
+              <a:t>≈ 0 reported operating result</a:t>
+            </a:r>
+          </a:p>
+          <a:p>
+            <a:pPr algn="ctr"/>
+            <a:r>
+              <a:rPr sz="830" b="0">
+                <a:solidFill>
+                  <a:srgbClr val="556A83"/>
+                </a:solidFill>
+                <a:latin typeface="Arial"/>
+              </a:rPr>
+              <a:t>so the market prices the whole company as broken</a:t>
             </a:r>
           </a:p>
         </p:txBody>
@@ -23568,468 +23308,6 @@
 </file>
 
 <file path=ppt/slides/slide21.xml><?xml version="1.0" encoding="utf-8"?>
-<p:sld xmlns:a="http://schemas.openxmlformats.org/drawingml/2006/main" xmlns:r="http://schemas.openxmlformats.org/officeDocument/2006/relationships" xmlns:p="http://schemas.openxmlformats.org/presentationml/2006/main">
-  <p:cSld>
-    <p:spTree>
-      <p:nvGrpSpPr>
-        <p:cNvPr id="1" name=""/>
-        <p:cNvGrpSpPr/>
-        <p:nvPr/>
-      </p:nvGrpSpPr>
-      <p:grpSpPr>
-        <a:xfrm>
-          <a:off x="0" y="0"/>
-          <a:ext cx="0" cy="0"/>
-          <a:chOff x="0" y="0"/>
-          <a:chExt cx="0" cy="0"/>
-        </a:xfrm>
-      </p:grpSpPr>
-      <p:sp>
-        <p:nvSpPr>
-          <p:cNvPr id="2" name="Rectangle 1"/>
-          <p:cNvSpPr/>
-          <p:nvPr/>
-        </p:nvSpPr>
-        <p:spPr>
-          <a:xfrm>
-            <a:off x="0" y="0"/>
-            <a:ext cx="9753600" cy="7315200"/>
-          </a:xfrm>
-          <a:prstGeom prst="rect">
-            <a:avLst/>
-          </a:prstGeom>
-          <a:solidFill>
-            <a:srgbClr val="FFFFFF"/>
-          </a:solidFill>
-          <a:ln>
-            <a:noFill/>
-          </a:ln>
-          <a:effectLst/>
-        </p:spPr>
-        <p:style>
-          <a:lnRef idx="1">
-            <a:schemeClr val="accent1"/>
-          </a:lnRef>
-          <a:fillRef idx="3">
-            <a:schemeClr val="accent1"/>
-          </a:fillRef>
-          <a:effectRef idx="2">
-            <a:schemeClr val="accent1"/>
-          </a:effectRef>
-          <a:fontRef idx="minor">
-            <a:schemeClr val="lt1"/>
-          </a:fontRef>
-        </p:style>
-        <p:txBody>
-          <a:bodyPr rtlCol="0" anchor="ctr"/>
-          <a:lstStyle/>
-          <a:p>
-            <a:pPr algn="ctr"/>
-            <a:endParaRPr/>
-          </a:p>
-        </p:txBody>
-      </p:sp>
-      <p:pic>
-        <p:nvPicPr>
-          <p:cNvPr id="3" name="Picture 2" descr="mark_dark.png"/>
-          <p:cNvPicPr>
-            <a:picLocks noChangeAspect="1"/>
-          </p:cNvPicPr>
-          <p:nvPr/>
-        </p:nvPicPr>
-        <p:blipFill>
-          <a:blip r:embed="rId2"/>
-          <a:stretch>
-            <a:fillRect/>
-          </a:stretch>
-        </p:blipFill>
-        <p:spPr>
-          <a:xfrm>
-            <a:off x="402346" y="234086"/>
-            <a:ext cx="224012" cy="190199"/>
-          </a:xfrm>
-          <a:prstGeom prst="rect">
-            <a:avLst/>
-          </a:prstGeom>
-        </p:spPr>
-      </p:pic>
-      <p:sp>
-        <p:nvSpPr>
-          <p:cNvPr id="4" name="TextBox 3"/>
-          <p:cNvSpPr txBox="1"/>
-          <p:nvPr/>
-        </p:nvSpPr>
-        <p:spPr>
-          <a:xfrm>
-            <a:off x="716907" y="263347"/>
-            <a:ext cx="5120768" cy="292608"/>
-          </a:xfrm>
-          <a:prstGeom prst="rect">
-            <a:avLst/>
-          </a:prstGeom>
-          <a:noFill/>
-        </p:spPr>
-        <p:txBody>
-          <a:bodyPr wrap="square" lIns="0" tIns="0" rIns="0" bIns="0" anchor="t">
-            <a:spAutoFit/>
-          </a:bodyPr>
-          <a:lstStyle/>
-          <a:p>
-            <a:pPr algn="l">
-              <a:lnSpc>
-                <a:spcPct val="110000"/>
-              </a:lnSpc>
-              <a:spcAft>
-                <a:spcPts val="0"/>
-              </a:spcAft>
-            </a:pPr>
-            <a:r>
-              <a:rPr sz="880" b="0" i="0">
-                <a:solidFill>
-                  <a:srgbClr val="556A83"/>
-                </a:solidFill>
-                <a:latin typeface="Arial"/>
-              </a:rPr>
-              <a:t>Track Record</a:t>
-            </a:r>
-          </a:p>
-        </p:txBody>
-      </p:sp>
-      <p:sp>
-        <p:nvSpPr>
-          <p:cNvPr id="5" name="TextBox 4"/>
-          <p:cNvSpPr txBox="1"/>
-          <p:nvPr/>
-        </p:nvSpPr>
-        <p:spPr>
-          <a:xfrm>
-            <a:off x="7242229" y="263347"/>
-            <a:ext cx="2084884" cy="292608"/>
-          </a:xfrm>
-          <a:prstGeom prst="rect">
-            <a:avLst/>
-          </a:prstGeom>
-          <a:noFill/>
-        </p:spPr>
-        <p:txBody>
-          <a:bodyPr wrap="square" lIns="0" tIns="0" rIns="0" bIns="0" anchor="t">
-            <a:spAutoFit/>
-          </a:bodyPr>
-          <a:lstStyle/>
-          <a:p>
-            <a:pPr algn="r">
-              <a:lnSpc>
-                <a:spcPct val="110000"/>
-              </a:lnSpc>
-              <a:spcAft>
-                <a:spcPts val="0"/>
-              </a:spcAft>
-            </a:pPr>
-            <a:r>
-              <a:rPr sz="880" b="1" i="0">
-                <a:solidFill>
-                  <a:srgbClr val="556A83"/>
-                </a:solidFill>
-                <a:latin typeface="Arial"/>
-              </a:rPr>
-              <a:t>Figure 5</a:t>
-            </a:r>
-          </a:p>
-        </p:txBody>
-      </p:sp>
-      <p:sp>
-        <p:nvSpPr>
-          <p:cNvPr id="6" name="Rectangle 5"/>
-          <p:cNvSpPr/>
-          <p:nvPr/>
-        </p:nvSpPr>
-        <p:spPr>
-          <a:xfrm>
-            <a:off x="0" y="604723"/>
-            <a:ext cx="9753600" cy="1024128"/>
-          </a:xfrm>
-          <a:prstGeom prst="rect">
-            <a:avLst/>
-          </a:prstGeom>
-          <a:solidFill>
-            <a:srgbClr val="F6F7F9"/>
-          </a:solidFill>
-          <a:ln>
-            <a:noFill/>
-          </a:ln>
-          <a:effectLst/>
-        </p:spPr>
-        <p:style>
-          <a:lnRef idx="1">
-            <a:schemeClr val="accent1"/>
-          </a:lnRef>
-          <a:fillRef idx="3">
-            <a:schemeClr val="accent1"/>
-          </a:fillRef>
-          <a:effectRef idx="2">
-            <a:schemeClr val="accent1"/>
-          </a:effectRef>
-          <a:fontRef idx="minor">
-            <a:schemeClr val="lt1"/>
-          </a:fontRef>
-        </p:style>
-        <p:txBody>
-          <a:bodyPr rtlCol="0" anchor="ctr"/>
-          <a:lstStyle/>
-          <a:p>
-            <a:pPr algn="ctr"/>
-            <a:endParaRPr/>
-          </a:p>
-        </p:txBody>
-      </p:sp>
-      <p:sp>
-        <p:nvSpPr>
-          <p:cNvPr id="7" name="TextBox 6"/>
-          <p:cNvSpPr txBox="1"/>
-          <p:nvPr/>
-        </p:nvSpPr>
-        <p:spPr>
-          <a:xfrm>
-            <a:off x="438922" y="721766"/>
-            <a:ext cx="8851613" cy="829056"/>
-          </a:xfrm>
-          <a:prstGeom prst="rect">
-            <a:avLst/>
-          </a:prstGeom>
-          <a:noFill/>
-        </p:spPr>
-        <p:txBody>
-          <a:bodyPr wrap="square" lIns="0" tIns="0" rIns="0" bIns="0" anchor="t">
-            <a:spAutoFit/>
-          </a:bodyPr>
-          <a:lstStyle/>
-          <a:p>
-            <a:pPr algn="l">
-              <a:lnSpc>
-                <a:spcPct val="110000"/>
-              </a:lnSpc>
-              <a:spcAft>
-                <a:spcPts val="200"/>
-              </a:spcAft>
-            </a:pPr>
-            <a:r>
-              <a:rPr sz="2400" b="0" i="0" spc="-90">
-                <a:solidFill>
-                  <a:srgbClr val="314359"/>
-                </a:solidFill>
-                <a:latin typeface="Times New Roman"/>
-              </a:rPr>
-              <a:t>Proof: outperformance with downside protection</a:t>
-            </a:r>
-          </a:p>
-        </p:txBody>
-      </p:sp>
-      <p:sp>
-        <p:nvSpPr>
-          <p:cNvPr id="8" name="TextBox 7"/>
-          <p:cNvSpPr txBox="1"/>
-          <p:nvPr/>
-        </p:nvSpPr>
-        <p:spPr>
-          <a:xfrm>
-            <a:off x="6583844" y="6876288"/>
-            <a:ext cx="2926153" cy="292608"/>
-          </a:xfrm>
-          <a:prstGeom prst="rect">
-            <a:avLst/>
-          </a:prstGeom>
-          <a:noFill/>
-        </p:spPr>
-        <p:txBody>
-          <a:bodyPr wrap="square" lIns="0" tIns="0" rIns="0" bIns="0" anchor="t">
-            <a:spAutoFit/>
-          </a:bodyPr>
-          <a:lstStyle/>
-          <a:p>
-            <a:pPr algn="r">
-              <a:lnSpc>
-                <a:spcPct val="110000"/>
-              </a:lnSpc>
-              <a:spcAft>
-                <a:spcPts val="0"/>
-              </a:spcAft>
-            </a:pPr>
-            <a:r>
-              <a:rPr sz="680" b="0" i="0">
-                <a:solidFill>
-                  <a:srgbClr val="556A83"/>
-                </a:solidFill>
-                <a:latin typeface="Arial"/>
-              </a:rPr>
-              <a:t>Strictly confidential          21</a:t>
-            </a:r>
-          </a:p>
-        </p:txBody>
-      </p:sp>
-      <p:graphicFrame>
-        <p:nvGraphicFramePr>
-          <p:cNvPr id="9" name="Chart 8"/>
-          <p:cNvGraphicFramePr>
-            <a:graphicFrameLocks noGrp="1"/>
-          </p:cNvGraphicFramePr>
-          <p:nvPr/>
-        </p:nvGraphicFramePr>
-        <p:xfrm>
-          <a:off x="512076" y="1901952"/>
-          <a:ext cx="5193921" cy="4096512"/>
-        </p:xfrm>
-        <a:graphic>
-          <a:graphicData uri="http://schemas.openxmlformats.org/drawingml/2006/chart">
-            <c:chart xmlns:c="http://schemas.openxmlformats.org/drawingml/2006/chart" xmlns:r="http://schemas.openxmlformats.org/officeDocument/2006/relationships" r:id="rId3"/>
-          </a:graphicData>
-        </a:graphic>
-      </p:graphicFrame>
-      <p:sp>
-        <p:nvSpPr>
-          <p:cNvPr id="10" name="TextBox 9"/>
-          <p:cNvSpPr txBox="1"/>
-          <p:nvPr/>
-        </p:nvSpPr>
-        <p:spPr>
-          <a:xfrm>
-            <a:off x="5925460" y="1999488"/>
-            <a:ext cx="3365076" cy="4389120"/>
-          </a:xfrm>
-          <a:prstGeom prst="rect">
-            <a:avLst/>
-          </a:prstGeom>
-          <a:noFill/>
-        </p:spPr>
-        <p:txBody>
-          <a:bodyPr wrap="square" lIns="0" tIns="0" rIns="0" bIns="0" anchor="t">
-            <a:spAutoFit/>
-          </a:bodyPr>
-          <a:lstStyle/>
-          <a:p>
-            <a:pPr algn="l">
-              <a:lnSpc>
-                <a:spcPct val="110000"/>
-              </a:lnSpc>
-              <a:spcAft>
-                <a:spcPts val="200"/>
-              </a:spcAft>
-            </a:pPr>
-            <a:r>
-              <a:rPr sz="1280" b="1" i="0">
-                <a:solidFill>
-                  <a:srgbClr val="314359"/>
-                </a:solidFill>
-                <a:latin typeface="Times New Roman"/>
-              </a:rPr>
-              <a:t>Win by losing less</a:t>
-            </a:r>
-          </a:p>
-          <a:p>
-            <a:pPr algn="l">
-              <a:lnSpc>
-                <a:spcPct val="115000"/>
-              </a:lnSpc>
-              <a:spcAft>
-                <a:spcPts val="1400"/>
-              </a:spcAft>
-            </a:pPr>
-            <a:r>
-              <a:rPr sz="1040" b="0" i="0">
-                <a:solidFill>
-                  <a:srgbClr val="0E1620"/>
-                </a:solidFill>
-                <a:latin typeface="Arial"/>
-              </a:rPr>
-              <a:t>Athanase keeps pace in up markets but takes less than half the downside — 93% up-capture, 43% down-capture. The asymmetry, not outsized rallies, is the edge.</a:t>
-            </a:r>
-          </a:p>
-          <a:p>
-            <a:pPr algn="l">
-              <a:lnSpc>
-                <a:spcPct val="110000"/>
-              </a:lnSpc>
-              <a:spcAft>
-                <a:spcPts val="200"/>
-              </a:spcAft>
-            </a:pPr>
-            <a:r>
-              <a:rPr sz="1280" b="1" i="0">
-                <a:solidFill>
-                  <a:srgbClr val="314359"/>
-                </a:solidFill>
-                <a:latin typeface="Times New Roman"/>
-              </a:rPr>
-              <a:t>And it compounds</a:t>
-            </a:r>
-          </a:p>
-          <a:p>
-            <a:pPr algn="l">
-              <a:lnSpc>
-                <a:spcPct val="115000"/>
-              </a:lnSpc>
-              <a:spcAft>
-                <a:spcPts val="1400"/>
-              </a:spcAft>
-            </a:pPr>
-            <a:r>
-              <a:rPr sz="1040" b="0" i="0">
-                <a:solidFill>
-                  <a:srgbClr val="0E1620"/>
-                </a:solidFill>
-                <a:latin typeface="Arial"/>
-              </a:rPr>
-              <a:t>Losing less in every drawdown leaves more capital working in the recovery. Since 2006 that turned each €1 into ~€18 of capital — 18× growth, versus ~3.2× for the market.</a:t>
-            </a:r>
-          </a:p>
-          <a:p>
-            <a:pPr algn="l">
-              <a:lnSpc>
-                <a:spcPct val="110000"/>
-              </a:lnSpc>
-              <a:spcAft>
-                <a:spcPts val="200"/>
-              </a:spcAft>
-            </a:pPr>
-            <a:r>
-              <a:rPr sz="1280" b="1" i="0">
-                <a:solidFill>
-                  <a:srgbClr val="314359"/>
-                </a:solidFill>
-                <a:latin typeface="Times New Roman"/>
-              </a:rPr>
-              <a:t>Net of every fee</a:t>
-            </a:r>
-          </a:p>
-          <a:p>
-            <a:pPr algn="l">
-              <a:lnSpc>
-                <a:spcPct val="115000"/>
-              </a:lnSpc>
-              <a:spcAft>
-                <a:spcPts val="0"/>
-              </a:spcAft>
-            </a:pPr>
-            <a:r>
-              <a:rPr sz="1040" b="0" i="0">
-                <a:solidFill>
-                  <a:srgbClr val="0E1620"/>
-                </a:solidFill>
-                <a:latin typeface="Arial"/>
-              </a:rPr>
-              <a:t>16.3% net per year versus the market’s 6.2% — about +10 points a year, after all fees and across two full market cycles.</a:t>
-            </a:r>
-          </a:p>
-        </p:txBody>
-      </p:sp>
-    </p:spTree>
-  </p:cSld>
-  <p:clrMapOvr>
-    <a:masterClrMapping/>
-  </p:clrMapOvr>
-</p:sld>
-</file>
-
-<file path=ppt/slides/slide22.xml><?xml version="1.0" encoding="utf-8"?>
 <p:sld xmlns:a="http://schemas.openxmlformats.org/drawingml/2006/main" xmlns:r="http://schemas.openxmlformats.org/officeDocument/2006/relationships" xmlns:p="http://schemas.openxmlformats.org/presentationml/2006/main">
   <p:cSld>
     <p:spTree>

--- a/Athanase_Endowment_Pitch_21pp.pptx
+++ b/Athanase_Endowment_Pitch_21pp.pptx
@@ -4494,7 +4494,7 @@
                 </a:solidFill>
                 <a:latin typeface="Times New Roman"/>
               </a:rPr>
-              <a:t>Investor Presentation</a:t>
+              <a:t>Athanase diversifies your portfolio</a:t>
             </a:r>
             <a:endParaRPr sz="3360" b="0" i="0" spc="-126" dirty="0">
               <a:solidFill>

--- a/Athanase_Endowment_Pitch_21pp.pptx
+++ b/Athanase_Endowment_Pitch_21pp.pptx
@@ -4494,7 +4494,7 @@
                 </a:solidFill>
                 <a:latin typeface="Times New Roman"/>
               </a:rPr>
-              <a:t>Athanase diversifies your portfolio</a:t>
+              <a:t>Don’t bet your wealth</a:t>
             </a:r>
             <a:endParaRPr sz="3360" b="0" i="0" spc="-126" dirty="0">
               <a:solidFill>
@@ -4502,6 +4502,16 @@
               </a:solidFill>
               <a:latin typeface="Times New Roman"/>
             </a:endParaRPr>
+            <a:br/>
+            <a:r>
+              <a:rPr lang="en-GB" sz="3360" spc="-126" dirty="0">
+                <a:solidFill>
+                  <a:srgbClr val="FFFFFF"/>
+                </a:solidFill>
+                <a:latin typeface="Times New Roman"/>
+              </a:rPr>
+              <a:t>on a handful of AI stocks</a:t>
+            </a:r>
           </a:p>
           <a:p>
             <a:pPr algn="l">

--- a/Athanase_Endowment_Pitch_21pp.pptx
+++ b/Athanase_Endowment_Pitch_21pp.pptx
@@ -4494,14 +4494,8 @@
                 </a:solidFill>
                 <a:latin typeface="Times New Roman"/>
               </a:rPr>
-              <a:t>Don’t bet your wealth</a:t>
-            </a:r>
-            <a:endParaRPr sz="3360" b="0" i="0" spc="-126" dirty="0">
-              <a:solidFill>
-                <a:srgbClr val="FFFFFF"/>
-              </a:solidFill>
-              <a:latin typeface="Times New Roman"/>
-            </a:endParaRPr>
+              <a:t>Your index is now a bet on AI</a:t>
+            </a:r>
             <a:br/>
             <a:r>
               <a:rPr lang="en-GB" sz="3360" spc="-126" dirty="0">
@@ -4510,7 +4504,7 @@
                 </a:solidFill>
                 <a:latin typeface="Times New Roman"/>
               </a:rPr>
-              <a:t>on a handful of AI stocks</a:t>
+              <a:t>— diversify it</a:t>
             </a:r>
           </a:p>
           <a:p>
